--- a/P2/pgcrypto_prezentacija.pptx
+++ b/P2/pgcrypto_prezentacija.pptx
@@ -2849,7 +2849,7 @@
                 <a:ea typeface="Calibri" pitchFamily="34" charset="-122"/>
                 <a:cs typeface="Calibri" pitchFamily="34" charset="-120"/>
               </a:rPr>
-              <a:t> soli.</a:t>
+              <a:t> soli</a:t>
             </a:r>
             <a:endParaRPr lang="en-US" sz="1200" dirty="0"/>
           </a:p>
@@ -3087,9 +3087,6 @@
             </a:pPr>
             <a:r>
               <a:rPr lang="en-US" sz="1200" dirty="0">
-                <a:solidFill>
-                  <a:srgbClr val="0F1B2D"/>
-                </a:solidFill>
                 <a:latin typeface="Calibri" pitchFamily="34" charset="0"/>
                 <a:ea typeface="Calibri" pitchFamily="34" charset="-122"/>
                 <a:cs typeface="Calibri" pitchFamily="34" charset="-120"/>
@@ -3098,9 +3095,6 @@
             </a:r>
             <a:r>
               <a:rPr lang="en-US" sz="1200" dirty="0" err="1">
-                <a:solidFill>
-                  <a:srgbClr val="0F1B2D"/>
-                </a:solidFill>
                 <a:latin typeface="Calibri" pitchFamily="34" charset="0"/>
                 <a:ea typeface="Calibri" pitchFamily="34" charset="-122"/>
                 <a:cs typeface="Calibri" pitchFamily="34" charset="-120"/>
@@ -3109,20 +3103,14 @@
             </a:r>
             <a:r>
               <a:rPr lang="en-US" sz="1200" dirty="0">
-                <a:solidFill>
-                  <a:srgbClr val="0F1B2D"/>
-                </a:solidFill>
-                <a:latin typeface="Calibri" pitchFamily="34" charset="0"/>
-                <a:ea typeface="Calibri" pitchFamily="34" charset="-122"/>
-                <a:cs typeface="Calibri" pitchFamily="34" charset="-120"/>
-              </a:rPr>
-              <a:t> </a:t>
-            </a:r>
-            <a:r>
-              <a:rPr lang="en-US" sz="1200" dirty="0" err="1">
-                <a:solidFill>
-                  <a:srgbClr val="0F1B2D"/>
-                </a:solidFill>
+                <a:latin typeface="Calibri" pitchFamily="34" charset="0"/>
+                <a:ea typeface="Calibri" pitchFamily="34" charset="-122"/>
+                <a:cs typeface="Calibri" pitchFamily="34" charset="-120"/>
+              </a:rPr>
+              <a:t> </a:t>
+            </a:r>
+            <a:r>
+              <a:rPr lang="en-US" sz="1200" dirty="0" err="1">
                 <a:latin typeface="Calibri" pitchFamily="34" charset="0"/>
                 <a:ea typeface="Calibri" pitchFamily="34" charset="-122"/>
                 <a:cs typeface="Calibri" pitchFamily="34" charset="-120"/>
@@ -3131,9 +3119,6 @@
             </a:r>
             <a:r>
               <a:rPr lang="en-US" sz="1200" dirty="0">
-                <a:solidFill>
-                  <a:srgbClr val="0F1B2D"/>
-                </a:solidFill>
                 <a:latin typeface="Calibri" pitchFamily="34" charset="0"/>
                 <a:ea typeface="Calibri" pitchFamily="34" charset="-122"/>
                 <a:cs typeface="Calibri" pitchFamily="34" charset="-120"/>
@@ -3142,9 +3127,6 @@
             </a:r>
             <a:r>
               <a:rPr lang="en-US" sz="1200" dirty="0" err="1">
-                <a:solidFill>
-                  <a:srgbClr val="0F1B2D"/>
-                </a:solidFill>
                 <a:latin typeface="Calibri" pitchFamily="34" charset="0"/>
                 <a:ea typeface="Calibri" pitchFamily="34" charset="-122"/>
                 <a:cs typeface="Calibri" pitchFamily="34" charset="-120"/>
@@ -3153,20 +3135,14 @@
             </a:r>
             <a:r>
               <a:rPr lang="en-US" sz="1200" dirty="0">
-                <a:solidFill>
-                  <a:srgbClr val="0F1B2D"/>
-                </a:solidFill>
-                <a:latin typeface="Calibri" pitchFamily="34" charset="0"/>
-                <a:ea typeface="Calibri" pitchFamily="34" charset="-122"/>
-                <a:cs typeface="Calibri" pitchFamily="34" charset="-120"/>
-              </a:rPr>
-              <a:t> </a:t>
-            </a:r>
-            <a:r>
-              <a:rPr lang="en-US" sz="1200" dirty="0" err="1">
-                <a:solidFill>
-                  <a:srgbClr val="0F1B2D"/>
-                </a:solidFill>
+                <a:latin typeface="Calibri" pitchFamily="34" charset="0"/>
+                <a:ea typeface="Calibri" pitchFamily="34" charset="-122"/>
+                <a:cs typeface="Calibri" pitchFamily="34" charset="-120"/>
+              </a:rPr>
+              <a:t> </a:t>
+            </a:r>
+            <a:r>
+              <a:rPr lang="en-US" sz="1200" dirty="0" err="1">
                 <a:latin typeface="Calibri" pitchFamily="34" charset="0"/>
                 <a:ea typeface="Calibri" pitchFamily="34" charset="-122"/>
                 <a:cs typeface="Calibri" pitchFamily="34" charset="-120"/>
@@ -3175,9 +3151,6 @@
             </a:r>
             <a:r>
               <a:rPr lang="en-US" sz="1200" dirty="0">
-                <a:solidFill>
-                  <a:srgbClr val="0F1B2D"/>
-                </a:solidFill>
                 <a:latin typeface="Calibri" pitchFamily="34" charset="0"/>
                 <a:ea typeface="Calibri" pitchFamily="34" charset="-122"/>
                 <a:cs typeface="Calibri" pitchFamily="34" charset="-120"/>
@@ -3186,9 +3159,6 @@
             </a:r>
             <a:r>
               <a:rPr lang="en-US" sz="1200" dirty="0" err="1">
-                <a:solidFill>
-                  <a:srgbClr val="0F1B2D"/>
-                </a:solidFill>
                 <a:latin typeface="Calibri" pitchFamily="34" charset="0"/>
                 <a:ea typeface="Calibri" pitchFamily="34" charset="-122"/>
                 <a:cs typeface="Calibri" pitchFamily="34" charset="-120"/>
@@ -3197,20 +3167,14 @@
             </a:r>
             <a:r>
               <a:rPr lang="en-US" sz="1200" dirty="0">
-                <a:solidFill>
-                  <a:srgbClr val="0F1B2D"/>
-                </a:solidFill>
-                <a:latin typeface="Calibri" pitchFamily="34" charset="0"/>
-                <a:ea typeface="Calibri" pitchFamily="34" charset="-122"/>
-                <a:cs typeface="Calibri" pitchFamily="34" charset="-120"/>
-              </a:rPr>
-              <a:t> </a:t>
-            </a:r>
-            <a:r>
-              <a:rPr lang="en-US" sz="1200" dirty="0" err="1">
-                <a:solidFill>
-                  <a:srgbClr val="0F1B2D"/>
-                </a:solidFill>
+                <a:latin typeface="Calibri" pitchFamily="34" charset="0"/>
+                <a:ea typeface="Calibri" pitchFamily="34" charset="-122"/>
+                <a:cs typeface="Calibri" pitchFamily="34" charset="-120"/>
+              </a:rPr>
+              <a:t> </a:t>
+            </a:r>
+            <a:r>
+              <a:rPr lang="en-US" sz="1200" dirty="0" err="1">
                 <a:latin typeface="Calibri" pitchFamily="34" charset="0"/>
                 <a:ea typeface="Calibri" pitchFamily="34" charset="-122"/>
                 <a:cs typeface="Calibri" pitchFamily="34" charset="-120"/>
@@ -3219,20 +3183,14 @@
             </a:r>
             <a:r>
               <a:rPr lang="en-US" sz="1200" dirty="0">
-                <a:solidFill>
-                  <a:srgbClr val="0F1B2D"/>
-                </a:solidFill>
-                <a:latin typeface="Calibri" pitchFamily="34" charset="0"/>
-                <a:ea typeface="Calibri" pitchFamily="34" charset="-122"/>
-                <a:cs typeface="Calibri" pitchFamily="34" charset="-120"/>
-              </a:rPr>
-              <a:t> </a:t>
-            </a:r>
-            <a:r>
-              <a:rPr lang="en-US" sz="1200" dirty="0" err="1">
-                <a:solidFill>
-                  <a:srgbClr val="0F1B2D"/>
-                </a:solidFill>
+                <a:latin typeface="Calibri" pitchFamily="34" charset="0"/>
+                <a:ea typeface="Calibri" pitchFamily="34" charset="-122"/>
+                <a:cs typeface="Calibri" pitchFamily="34" charset="-120"/>
+              </a:rPr>
+              <a:t> </a:t>
+            </a:r>
+            <a:r>
+              <a:rPr lang="en-US" sz="1200" dirty="0" err="1">
                 <a:latin typeface="Calibri" pitchFamily="34" charset="0"/>
                 <a:ea typeface="Calibri" pitchFamily="34" charset="-122"/>
                 <a:cs typeface="Calibri" pitchFamily="34" charset="-120"/>
@@ -3241,20 +3199,14 @@
             </a:r>
             <a:r>
               <a:rPr lang="en-US" sz="1200" dirty="0">
-                <a:solidFill>
-                  <a:srgbClr val="0F1B2D"/>
-                </a:solidFill>
-                <a:latin typeface="Calibri" pitchFamily="34" charset="0"/>
-                <a:ea typeface="Calibri" pitchFamily="34" charset="-122"/>
-                <a:cs typeface="Calibri" pitchFamily="34" charset="-120"/>
-              </a:rPr>
-              <a:t> </a:t>
-            </a:r>
-            <a:r>
-              <a:rPr lang="en-US" sz="1200" dirty="0" err="1">
-                <a:solidFill>
-                  <a:srgbClr val="0F1B2D"/>
-                </a:solidFill>
+                <a:latin typeface="Calibri" pitchFamily="34" charset="0"/>
+                <a:ea typeface="Calibri" pitchFamily="34" charset="-122"/>
+                <a:cs typeface="Calibri" pitchFamily="34" charset="-120"/>
+              </a:rPr>
+              <a:t> </a:t>
+            </a:r>
+            <a:r>
+              <a:rPr lang="en-US" sz="1200" dirty="0" err="1">
                 <a:latin typeface="Calibri" pitchFamily="34" charset="0"/>
                 <a:ea typeface="Calibri" pitchFamily="34" charset="-122"/>
                 <a:cs typeface="Calibri" pitchFamily="34" charset="-120"/>
@@ -3263,20 +3215,14 @@
             </a:r>
             <a:r>
               <a:rPr lang="en-US" sz="1200" dirty="0">
-                <a:solidFill>
-                  <a:srgbClr val="0F1B2D"/>
-                </a:solidFill>
-                <a:latin typeface="Calibri" pitchFamily="34" charset="0"/>
-                <a:ea typeface="Calibri" pitchFamily="34" charset="-122"/>
-                <a:cs typeface="Calibri" pitchFamily="34" charset="-120"/>
-              </a:rPr>
-              <a:t> </a:t>
-            </a:r>
-            <a:r>
-              <a:rPr lang="en-US" sz="1200" dirty="0" err="1">
-                <a:solidFill>
-                  <a:srgbClr val="0F1B2D"/>
-                </a:solidFill>
+                <a:latin typeface="Calibri" pitchFamily="34" charset="0"/>
+                <a:ea typeface="Calibri" pitchFamily="34" charset="-122"/>
+                <a:cs typeface="Calibri" pitchFamily="34" charset="-120"/>
+              </a:rPr>
+              <a:t> </a:t>
+            </a:r>
+            <a:r>
+              <a:rPr lang="en-US" sz="1200" dirty="0" err="1">
                 <a:latin typeface="Calibri" pitchFamily="34" charset="0"/>
                 <a:ea typeface="Calibri" pitchFamily="34" charset="-122"/>
                 <a:cs typeface="Calibri" pitchFamily="34" charset="-120"/>
@@ -3285,9 +3231,6 @@
             </a:r>
             <a:r>
               <a:rPr lang="en-US" sz="1200" dirty="0">
-                <a:solidFill>
-                  <a:srgbClr val="0F1B2D"/>
-                </a:solidFill>
                 <a:latin typeface="Calibri" pitchFamily="34" charset="0"/>
                 <a:ea typeface="Calibri" pitchFamily="34" charset="-122"/>
                 <a:cs typeface="Calibri" pitchFamily="34" charset="-120"/>
@@ -3296,9 +3239,6 @@
             </a:r>
             <a:r>
               <a:rPr lang="en-US" sz="1200" dirty="0" err="1">
-                <a:solidFill>
-                  <a:srgbClr val="0F1B2D"/>
-                </a:solidFill>
                 <a:latin typeface="Calibri" pitchFamily="34" charset="0"/>
                 <a:ea typeface="Calibri" pitchFamily="34" charset="-122"/>
                 <a:cs typeface="Calibri" pitchFamily="34" charset="-120"/>
@@ -3307,20 +3247,14 @@
             </a:r>
             <a:r>
               <a:rPr lang="en-US" sz="1200" dirty="0">
-                <a:solidFill>
-                  <a:srgbClr val="0F1B2D"/>
-                </a:solidFill>
-                <a:latin typeface="Calibri" pitchFamily="34" charset="0"/>
-                <a:ea typeface="Calibri" pitchFamily="34" charset="-122"/>
-                <a:cs typeface="Calibri" pitchFamily="34" charset="-120"/>
-              </a:rPr>
-              <a:t> </a:t>
-            </a:r>
-            <a:r>
-              <a:rPr lang="en-US" sz="1200" dirty="0" err="1">
-                <a:solidFill>
-                  <a:srgbClr val="0F1B2D"/>
-                </a:solidFill>
+                <a:latin typeface="Calibri" pitchFamily="34" charset="0"/>
+                <a:ea typeface="Calibri" pitchFamily="34" charset="-122"/>
+                <a:cs typeface="Calibri" pitchFamily="34" charset="-120"/>
+              </a:rPr>
+              <a:t> </a:t>
+            </a:r>
+            <a:r>
+              <a:rPr lang="en-US" sz="1200" dirty="0" err="1">
                 <a:latin typeface="Calibri" pitchFamily="34" charset="0"/>
                 <a:ea typeface="Calibri" pitchFamily="34" charset="-122"/>
                 <a:cs typeface="Calibri" pitchFamily="34" charset="-120"/>
@@ -3329,20 +3263,14 @@
             </a:r>
             <a:r>
               <a:rPr lang="en-US" sz="1200" dirty="0">
-                <a:solidFill>
-                  <a:srgbClr val="0F1B2D"/>
-                </a:solidFill>
-                <a:latin typeface="Calibri" pitchFamily="34" charset="0"/>
-                <a:ea typeface="Calibri" pitchFamily="34" charset="-122"/>
-                <a:cs typeface="Calibri" pitchFamily="34" charset="-120"/>
-              </a:rPr>
-              <a:t> </a:t>
-            </a:r>
-            <a:r>
-              <a:rPr lang="en-US" sz="1200" dirty="0" err="1">
-                <a:solidFill>
-                  <a:srgbClr val="0F1B2D"/>
-                </a:solidFill>
+                <a:latin typeface="Calibri" pitchFamily="34" charset="0"/>
+                <a:ea typeface="Calibri" pitchFamily="34" charset="-122"/>
+                <a:cs typeface="Calibri" pitchFamily="34" charset="-120"/>
+              </a:rPr>
+              <a:t> </a:t>
+            </a:r>
+            <a:r>
+              <a:rPr lang="en-US" sz="1200" dirty="0" err="1">
                 <a:latin typeface="Calibri" pitchFamily="34" charset="0"/>
                 <a:ea typeface="Calibri" pitchFamily="34" charset="-122"/>
                 <a:cs typeface="Calibri" pitchFamily="34" charset="-120"/>
@@ -3351,20 +3279,14 @@
             </a:r>
             <a:r>
               <a:rPr lang="en-US" sz="1200" dirty="0">
-                <a:solidFill>
-                  <a:srgbClr val="0F1B2D"/>
-                </a:solidFill>
-                <a:latin typeface="Calibri" pitchFamily="34" charset="0"/>
-                <a:ea typeface="Calibri" pitchFamily="34" charset="-122"/>
-                <a:cs typeface="Calibri" pitchFamily="34" charset="-120"/>
-              </a:rPr>
-              <a:t> </a:t>
-            </a:r>
-            <a:r>
-              <a:rPr lang="en-US" sz="1200" dirty="0" err="1">
-                <a:solidFill>
-                  <a:srgbClr val="0F1B2D"/>
-                </a:solidFill>
+                <a:latin typeface="Calibri" pitchFamily="34" charset="0"/>
+                <a:ea typeface="Calibri" pitchFamily="34" charset="-122"/>
+                <a:cs typeface="Calibri" pitchFamily="34" charset="-120"/>
+              </a:rPr>
+              <a:t> </a:t>
+            </a:r>
+            <a:r>
+              <a:rPr lang="en-US" sz="1200" dirty="0" err="1">
                 <a:latin typeface="Calibri" pitchFamily="34" charset="0"/>
                 <a:ea typeface="Calibri" pitchFamily="34" charset="-122"/>
                 <a:cs typeface="Calibri" pitchFamily="34" charset="-120"/>
@@ -3373,20 +3295,14 @@
             </a:r>
             <a:r>
               <a:rPr lang="en-US" sz="1200" dirty="0">
-                <a:solidFill>
-                  <a:srgbClr val="0F1B2D"/>
-                </a:solidFill>
-                <a:latin typeface="Calibri" pitchFamily="34" charset="0"/>
-                <a:ea typeface="Calibri" pitchFamily="34" charset="-122"/>
-                <a:cs typeface="Calibri" pitchFamily="34" charset="-120"/>
-              </a:rPr>
-              <a:t> </a:t>
-            </a:r>
-            <a:r>
-              <a:rPr lang="en-US" sz="1200" dirty="0" err="1">
-                <a:solidFill>
-                  <a:srgbClr val="0F1B2D"/>
-                </a:solidFill>
+                <a:latin typeface="Calibri" pitchFamily="34" charset="0"/>
+                <a:ea typeface="Calibri" pitchFamily="34" charset="-122"/>
+                <a:cs typeface="Calibri" pitchFamily="34" charset="-120"/>
+              </a:rPr>
+              <a:t> </a:t>
+            </a:r>
+            <a:r>
+              <a:rPr lang="en-US" sz="1200" dirty="0" err="1">
                 <a:latin typeface="Calibri" pitchFamily="34" charset="0"/>
                 <a:ea typeface="Calibri" pitchFamily="34" charset="-122"/>
                 <a:cs typeface="Calibri" pitchFamily="34" charset="-120"/>
@@ -3395,20 +3311,14 @@
             </a:r>
             <a:r>
               <a:rPr lang="en-US" sz="1200" dirty="0">
-                <a:solidFill>
-                  <a:srgbClr val="0F1B2D"/>
-                </a:solidFill>
-                <a:latin typeface="Calibri" pitchFamily="34" charset="0"/>
-                <a:ea typeface="Calibri" pitchFamily="34" charset="-122"/>
-                <a:cs typeface="Calibri" pitchFamily="34" charset="-120"/>
-              </a:rPr>
-              <a:t> </a:t>
-            </a:r>
-            <a:r>
-              <a:rPr lang="en-US" sz="1200" dirty="0" err="1">
-                <a:solidFill>
-                  <a:srgbClr val="0F1B2D"/>
-                </a:solidFill>
+                <a:latin typeface="Calibri" pitchFamily="34" charset="0"/>
+                <a:ea typeface="Calibri" pitchFamily="34" charset="-122"/>
+                <a:cs typeface="Calibri" pitchFamily="34" charset="-120"/>
+              </a:rPr>
+              <a:t> </a:t>
+            </a:r>
+            <a:r>
+              <a:rPr lang="en-US" sz="1200" dirty="0" err="1">
                 <a:latin typeface="Calibri" pitchFamily="34" charset="0"/>
                 <a:ea typeface="Calibri" pitchFamily="34" charset="-122"/>
                 <a:cs typeface="Calibri" pitchFamily="34" charset="-120"/>
@@ -3417,20 +3327,14 @@
             </a:r>
             <a:r>
               <a:rPr lang="en-US" sz="1200" dirty="0">
-                <a:solidFill>
-                  <a:srgbClr val="0F1B2D"/>
-                </a:solidFill>
-                <a:latin typeface="Calibri" pitchFamily="34" charset="0"/>
-                <a:ea typeface="Calibri" pitchFamily="34" charset="-122"/>
-                <a:cs typeface="Calibri" pitchFamily="34" charset="-120"/>
-              </a:rPr>
-              <a:t> </a:t>
-            </a:r>
-            <a:r>
-              <a:rPr lang="en-US" sz="1200" dirty="0" err="1">
-                <a:solidFill>
-                  <a:srgbClr val="0F1B2D"/>
-                </a:solidFill>
+                <a:latin typeface="Calibri" pitchFamily="34" charset="0"/>
+                <a:ea typeface="Calibri" pitchFamily="34" charset="-122"/>
+                <a:cs typeface="Calibri" pitchFamily="34" charset="-120"/>
+              </a:rPr>
+              <a:t> </a:t>
+            </a:r>
+            <a:r>
+              <a:rPr lang="en-US" sz="1200" dirty="0" err="1">
                 <a:latin typeface="Calibri" pitchFamily="34" charset="0"/>
                 <a:ea typeface="Calibri" pitchFamily="34" charset="-122"/>
                 <a:cs typeface="Calibri" pitchFamily="34" charset="-120"/>
@@ -3439,20 +3343,14 @@
             </a:r>
             <a:r>
               <a:rPr lang="en-US" sz="1200" dirty="0">
-                <a:solidFill>
-                  <a:srgbClr val="0F1B2D"/>
-                </a:solidFill>
-                <a:latin typeface="Calibri" pitchFamily="34" charset="0"/>
-                <a:ea typeface="Calibri" pitchFamily="34" charset="-122"/>
-                <a:cs typeface="Calibri" pitchFamily="34" charset="-120"/>
-              </a:rPr>
-              <a:t> </a:t>
-            </a:r>
-            <a:r>
-              <a:rPr lang="en-US" sz="1200" dirty="0" err="1">
-                <a:solidFill>
-                  <a:srgbClr val="0F1B2D"/>
-                </a:solidFill>
+                <a:latin typeface="Calibri" pitchFamily="34" charset="0"/>
+                <a:ea typeface="Calibri" pitchFamily="34" charset="-122"/>
+                <a:cs typeface="Calibri" pitchFamily="34" charset="-120"/>
+              </a:rPr>
+              <a:t> </a:t>
+            </a:r>
+            <a:r>
+              <a:rPr lang="en-US" sz="1200" dirty="0" err="1">
                 <a:latin typeface="Calibri" pitchFamily="34" charset="0"/>
                 <a:ea typeface="Calibri" pitchFamily="34" charset="-122"/>
                 <a:cs typeface="Calibri" pitchFamily="34" charset="-120"/>
@@ -3461,20 +3359,14 @@
             </a:r>
             <a:r>
               <a:rPr lang="en-US" sz="1200" dirty="0">
-                <a:solidFill>
-                  <a:srgbClr val="0F1B2D"/>
-                </a:solidFill>
-                <a:latin typeface="Calibri" pitchFamily="34" charset="0"/>
-                <a:ea typeface="Calibri" pitchFamily="34" charset="-122"/>
-                <a:cs typeface="Calibri" pitchFamily="34" charset="-120"/>
-              </a:rPr>
-              <a:t> </a:t>
-            </a:r>
-            <a:r>
-              <a:rPr lang="en-US" sz="1200" dirty="0" err="1">
-                <a:solidFill>
-                  <a:srgbClr val="0F1B2D"/>
-                </a:solidFill>
+                <a:latin typeface="Calibri" pitchFamily="34" charset="0"/>
+                <a:ea typeface="Calibri" pitchFamily="34" charset="-122"/>
+                <a:cs typeface="Calibri" pitchFamily="34" charset="-120"/>
+              </a:rPr>
+              <a:t> </a:t>
+            </a:r>
+            <a:r>
+              <a:rPr lang="en-US" sz="1200" dirty="0" err="1">
                 <a:latin typeface="Calibri" pitchFamily="34" charset="0"/>
                 <a:ea typeface="Calibri" pitchFamily="34" charset="-122"/>
                 <a:cs typeface="Calibri" pitchFamily="34" charset="-120"/>
@@ -3483,20 +3375,14 @@
             </a:r>
             <a:r>
               <a:rPr lang="en-US" sz="1200" dirty="0">
-                <a:solidFill>
-                  <a:srgbClr val="0F1B2D"/>
-                </a:solidFill>
-                <a:latin typeface="Calibri" pitchFamily="34" charset="0"/>
-                <a:ea typeface="Calibri" pitchFamily="34" charset="-122"/>
-                <a:cs typeface="Calibri" pitchFamily="34" charset="-120"/>
-              </a:rPr>
-              <a:t> </a:t>
-            </a:r>
-            <a:r>
-              <a:rPr lang="en-US" sz="1200" dirty="0" err="1">
-                <a:solidFill>
-                  <a:srgbClr val="0F1B2D"/>
-                </a:solidFill>
+                <a:latin typeface="Calibri" pitchFamily="34" charset="0"/>
+                <a:ea typeface="Calibri" pitchFamily="34" charset="-122"/>
+                <a:cs typeface="Calibri" pitchFamily="34" charset="-120"/>
+              </a:rPr>
+              <a:t> </a:t>
+            </a:r>
+            <a:r>
+              <a:rPr lang="en-US" sz="1200" dirty="0" err="1">
                 <a:latin typeface="Calibri" pitchFamily="34" charset="0"/>
                 <a:ea typeface="Calibri" pitchFamily="34" charset="-122"/>
                 <a:cs typeface="Calibri" pitchFamily="34" charset="-120"/>
@@ -3505,20 +3391,14 @@
             </a:r>
             <a:r>
               <a:rPr lang="en-US" sz="1200" dirty="0">
-                <a:solidFill>
-                  <a:srgbClr val="0F1B2D"/>
-                </a:solidFill>
-                <a:latin typeface="Calibri" pitchFamily="34" charset="0"/>
-                <a:ea typeface="Calibri" pitchFamily="34" charset="-122"/>
-                <a:cs typeface="Calibri" pitchFamily="34" charset="-120"/>
-              </a:rPr>
-              <a:t> </a:t>
-            </a:r>
-            <a:r>
-              <a:rPr lang="en-US" sz="1200" dirty="0" err="1">
-                <a:solidFill>
-                  <a:srgbClr val="0F1B2D"/>
-                </a:solidFill>
+                <a:latin typeface="Calibri" pitchFamily="34" charset="0"/>
+                <a:ea typeface="Calibri" pitchFamily="34" charset="-122"/>
+                <a:cs typeface="Calibri" pitchFamily="34" charset="-120"/>
+              </a:rPr>
+              <a:t> </a:t>
+            </a:r>
+            <a:r>
+              <a:rPr lang="en-US" sz="1200" dirty="0" err="1">
                 <a:latin typeface="Calibri" pitchFamily="34" charset="0"/>
                 <a:ea typeface="Calibri" pitchFamily="34" charset="-122"/>
                 <a:cs typeface="Calibri" pitchFamily="34" charset="-120"/>
@@ -3527,20 +3407,14 @@
             </a:r>
             <a:r>
               <a:rPr lang="en-US" sz="1200" dirty="0">
-                <a:solidFill>
-                  <a:srgbClr val="0F1B2D"/>
-                </a:solidFill>
-                <a:latin typeface="Calibri" pitchFamily="34" charset="0"/>
-                <a:ea typeface="Calibri" pitchFamily="34" charset="-122"/>
-                <a:cs typeface="Calibri" pitchFamily="34" charset="-120"/>
-              </a:rPr>
-              <a:t> </a:t>
-            </a:r>
-            <a:r>
-              <a:rPr lang="en-US" sz="1200" dirty="0" err="1">
-                <a:solidFill>
-                  <a:srgbClr val="0F1B2D"/>
-                </a:solidFill>
+                <a:latin typeface="Calibri" pitchFamily="34" charset="0"/>
+                <a:ea typeface="Calibri" pitchFamily="34" charset="-122"/>
+                <a:cs typeface="Calibri" pitchFamily="34" charset="-120"/>
+              </a:rPr>
+              <a:t> </a:t>
+            </a:r>
+            <a:r>
+              <a:rPr lang="en-US" sz="1200" dirty="0" err="1">
                 <a:latin typeface="Calibri" pitchFamily="34" charset="0"/>
                 <a:ea typeface="Calibri" pitchFamily="34" charset="-122"/>
                 <a:cs typeface="Calibri" pitchFamily="34" charset="-120"/>
@@ -3549,9 +3423,6 @@
             </a:r>
             <a:r>
               <a:rPr lang="en-US" sz="1200" dirty="0">
-                <a:solidFill>
-                  <a:srgbClr val="0F1B2D"/>
-                </a:solidFill>
                 <a:latin typeface="Calibri" pitchFamily="34" charset="0"/>
                 <a:ea typeface="Calibri" pitchFamily="34" charset="-122"/>
                 <a:cs typeface="Calibri" pitchFamily="34" charset="-120"/>
@@ -3560,9 +3431,6 @@
             </a:r>
             <a:r>
               <a:rPr lang="en-US" sz="1200" dirty="0" err="1">
-                <a:solidFill>
-                  <a:srgbClr val="0F1B2D"/>
-                </a:solidFill>
                 <a:latin typeface="Calibri" pitchFamily="34" charset="0"/>
                 <a:ea typeface="Calibri" pitchFamily="34" charset="-122"/>
                 <a:cs typeface="Calibri" pitchFamily="34" charset="-120"/>
@@ -3571,9 +3439,6 @@
             </a:r>
             <a:r>
               <a:rPr lang="en-US" sz="1200" dirty="0">
-                <a:solidFill>
-                  <a:srgbClr val="0F1B2D"/>
-                </a:solidFill>
                 <a:latin typeface="Calibri" pitchFamily="34" charset="0"/>
                 <a:ea typeface="Calibri" pitchFamily="34" charset="-122"/>
                 <a:cs typeface="Calibri" pitchFamily="34" charset="-120"/>
@@ -3582,9 +3447,6 @@
             </a:r>
             <a:r>
               <a:rPr lang="en-US" sz="1200" dirty="0" err="1">
-                <a:solidFill>
-                  <a:srgbClr val="0F1B2D"/>
-                </a:solidFill>
                 <a:latin typeface="Calibri" pitchFamily="34" charset="0"/>
                 <a:ea typeface="Calibri" pitchFamily="34" charset="-122"/>
                 <a:cs typeface="Calibri" pitchFamily="34" charset="-120"/>
@@ -3593,9 +3455,6 @@
             </a:r>
             <a:r>
               <a:rPr lang="en-US" sz="1200" dirty="0">
-                <a:solidFill>
-                  <a:srgbClr val="0F1B2D"/>
-                </a:solidFill>
                 <a:latin typeface="Calibri" pitchFamily="34" charset="0"/>
                 <a:ea typeface="Calibri" pitchFamily="34" charset="-122"/>
                 <a:cs typeface="Calibri" pitchFamily="34" charset="-120"/>
@@ -3604,9 +3463,6 @@
             </a:r>
             <a:r>
               <a:rPr lang="en-US" sz="1200" dirty="0" err="1">
-                <a:solidFill>
-                  <a:srgbClr val="0F1B2D"/>
-                </a:solidFill>
                 <a:latin typeface="Calibri" pitchFamily="34" charset="0"/>
                 <a:ea typeface="Calibri" pitchFamily="34" charset="-122"/>
                 <a:cs typeface="Calibri" pitchFamily="34" charset="-120"/>
@@ -3615,9 +3471,6 @@
             </a:r>
             <a:r>
               <a:rPr lang="en-US" sz="1200" dirty="0">
-                <a:solidFill>
-                  <a:srgbClr val="0F1B2D"/>
-                </a:solidFill>
                 <a:latin typeface="Calibri" pitchFamily="34" charset="0"/>
                 <a:ea typeface="Calibri" pitchFamily="34" charset="-122"/>
                 <a:cs typeface="Calibri" pitchFamily="34" charset="-120"/>
@@ -3626,9 +3479,6 @@
             </a:r>
             <a:r>
               <a:rPr lang="en-US" sz="1200" dirty="0" err="1">
-                <a:solidFill>
-                  <a:srgbClr val="0F1B2D"/>
-                </a:solidFill>
                 <a:latin typeface="Calibri" pitchFamily="34" charset="0"/>
                 <a:ea typeface="Calibri" pitchFamily="34" charset="-122"/>
                 <a:cs typeface="Calibri" pitchFamily="34" charset="-120"/>
@@ -3637,9 +3487,6 @@
             </a:r>
             <a:r>
               <a:rPr lang="en-US" sz="1200" dirty="0">
-                <a:solidFill>
-                  <a:srgbClr val="0F1B2D"/>
-                </a:solidFill>
                 <a:latin typeface="Calibri" pitchFamily="34" charset="0"/>
                 <a:ea typeface="Calibri" pitchFamily="34" charset="-122"/>
                 <a:cs typeface="Calibri" pitchFamily="34" charset="-120"/>
@@ -3648,9 +3495,6 @@
             </a:r>
             <a:r>
               <a:rPr lang="en-US" sz="1200" dirty="0" err="1">
-                <a:solidFill>
-                  <a:srgbClr val="0F1B2D"/>
-                </a:solidFill>
                 <a:latin typeface="Calibri" pitchFamily="34" charset="0"/>
                 <a:ea typeface="Calibri" pitchFamily="34" charset="-122"/>
                 <a:cs typeface="Calibri" pitchFamily="34" charset="-120"/>
@@ -3659,20 +3503,14 @@
             </a:r>
             <a:r>
               <a:rPr lang="en-US" sz="1200" dirty="0">
-                <a:solidFill>
-                  <a:srgbClr val="0F1B2D"/>
-                </a:solidFill>
-                <a:latin typeface="Calibri" pitchFamily="34" charset="0"/>
-                <a:ea typeface="Calibri" pitchFamily="34" charset="-122"/>
-                <a:cs typeface="Calibri" pitchFamily="34" charset="-120"/>
-              </a:rPr>
-              <a:t> </a:t>
-            </a:r>
-            <a:r>
-              <a:rPr lang="en-US" sz="1200" dirty="0" err="1">
-                <a:solidFill>
-                  <a:srgbClr val="0F1B2D"/>
-                </a:solidFill>
+                <a:latin typeface="Calibri" pitchFamily="34" charset="0"/>
+                <a:ea typeface="Calibri" pitchFamily="34" charset="-122"/>
+                <a:cs typeface="Calibri" pitchFamily="34" charset="-120"/>
+              </a:rPr>
+              <a:t> </a:t>
+            </a:r>
+            <a:r>
+              <a:rPr lang="en-US" sz="1200" dirty="0" err="1">
                 <a:latin typeface="Calibri" pitchFamily="34" charset="0"/>
                 <a:ea typeface="Calibri" pitchFamily="34" charset="-122"/>
                 <a:cs typeface="Calibri" pitchFamily="34" charset="-120"/>
@@ -3681,9 +3519,6 @@
             </a:r>
             <a:r>
               <a:rPr lang="en-US" sz="1200" dirty="0">
-                <a:solidFill>
-                  <a:srgbClr val="0F1B2D"/>
-                </a:solidFill>
                 <a:latin typeface="Calibri" pitchFamily="34" charset="0"/>
                 <a:ea typeface="Calibri" pitchFamily="34" charset="-122"/>
                 <a:cs typeface="Calibri" pitchFamily="34" charset="-120"/>
@@ -3692,9 +3527,6 @@
             </a:r>
             <a:r>
               <a:rPr lang="en-US" sz="1200" dirty="0" err="1">
-                <a:solidFill>
-                  <a:srgbClr val="0F1B2D"/>
-                </a:solidFill>
                 <a:latin typeface="Calibri" pitchFamily="34" charset="0"/>
                 <a:ea typeface="Calibri" pitchFamily="34" charset="-122"/>
                 <a:cs typeface="Calibri" pitchFamily="34" charset="-120"/>
@@ -3703,20 +3535,14 @@
             </a:r>
             <a:r>
               <a:rPr lang="en-US" sz="1200" dirty="0">
-                <a:solidFill>
-                  <a:srgbClr val="0F1B2D"/>
-                </a:solidFill>
-                <a:latin typeface="Calibri" pitchFamily="34" charset="0"/>
-                <a:ea typeface="Calibri" pitchFamily="34" charset="-122"/>
-                <a:cs typeface="Calibri" pitchFamily="34" charset="-120"/>
-              </a:rPr>
-              <a:t> </a:t>
-            </a:r>
-            <a:r>
-              <a:rPr lang="en-US" sz="1200" dirty="0" err="1">
-                <a:solidFill>
-                  <a:srgbClr val="0F1B2D"/>
-                </a:solidFill>
+                <a:latin typeface="Calibri" pitchFamily="34" charset="0"/>
+                <a:ea typeface="Calibri" pitchFamily="34" charset="-122"/>
+                <a:cs typeface="Calibri" pitchFamily="34" charset="-120"/>
+              </a:rPr>
+              <a:t> </a:t>
+            </a:r>
+            <a:r>
+              <a:rPr lang="en-US" sz="1200" dirty="0" err="1">
                 <a:latin typeface="Calibri" pitchFamily="34" charset="0"/>
                 <a:ea typeface="Calibri" pitchFamily="34" charset="-122"/>
                 <a:cs typeface="Calibri" pitchFamily="34" charset="-120"/>
@@ -3725,20 +3551,14 @@
             </a:r>
             <a:r>
               <a:rPr lang="en-US" sz="1200" dirty="0">
-                <a:solidFill>
-                  <a:srgbClr val="0F1B2D"/>
-                </a:solidFill>
-                <a:latin typeface="Calibri" pitchFamily="34" charset="0"/>
-                <a:ea typeface="Calibri" pitchFamily="34" charset="-122"/>
-                <a:cs typeface="Calibri" pitchFamily="34" charset="-120"/>
-              </a:rPr>
-              <a:t> </a:t>
-            </a:r>
-            <a:r>
-              <a:rPr lang="en-US" sz="1200" dirty="0" err="1">
-                <a:solidFill>
-                  <a:srgbClr val="0F1B2D"/>
-                </a:solidFill>
+                <a:latin typeface="Calibri" pitchFamily="34" charset="0"/>
+                <a:ea typeface="Calibri" pitchFamily="34" charset="-122"/>
+                <a:cs typeface="Calibri" pitchFamily="34" charset="-120"/>
+              </a:rPr>
+              <a:t> </a:t>
+            </a:r>
+            <a:r>
+              <a:rPr lang="en-US" sz="1200" dirty="0" err="1">
                 <a:latin typeface="Calibri" pitchFamily="34" charset="0"/>
                 <a:ea typeface="Calibri" pitchFamily="34" charset="-122"/>
                 <a:cs typeface="Calibri" pitchFamily="34" charset="-120"/>
@@ -3747,20 +3567,14 @@
             </a:r>
             <a:r>
               <a:rPr lang="en-US" sz="1200" dirty="0">
-                <a:solidFill>
-                  <a:srgbClr val="0F1B2D"/>
-                </a:solidFill>
-                <a:latin typeface="Calibri" pitchFamily="34" charset="0"/>
-                <a:ea typeface="Calibri" pitchFamily="34" charset="-122"/>
-                <a:cs typeface="Calibri" pitchFamily="34" charset="-120"/>
-              </a:rPr>
-              <a:t> </a:t>
-            </a:r>
-            <a:r>
-              <a:rPr lang="en-US" sz="1200" dirty="0" err="1">
-                <a:solidFill>
-                  <a:srgbClr val="0F1B2D"/>
-                </a:solidFill>
+                <a:latin typeface="Calibri" pitchFamily="34" charset="0"/>
+                <a:ea typeface="Calibri" pitchFamily="34" charset="-122"/>
+                <a:cs typeface="Calibri" pitchFamily="34" charset="-120"/>
+              </a:rPr>
+              <a:t> </a:t>
+            </a:r>
+            <a:r>
+              <a:rPr lang="en-US" sz="1200" dirty="0" err="1">
                 <a:latin typeface="Calibri" pitchFamily="34" charset="0"/>
                 <a:ea typeface="Calibri" pitchFamily="34" charset="-122"/>
                 <a:cs typeface="Calibri" pitchFamily="34" charset="-120"/>
@@ -3769,20 +3583,14 @@
             </a:r>
             <a:r>
               <a:rPr lang="en-US" sz="1200" dirty="0">
-                <a:solidFill>
-                  <a:srgbClr val="0F1B2D"/>
-                </a:solidFill>
-                <a:latin typeface="Calibri" pitchFamily="34" charset="0"/>
-                <a:ea typeface="Calibri" pitchFamily="34" charset="-122"/>
-                <a:cs typeface="Calibri" pitchFamily="34" charset="-120"/>
-              </a:rPr>
-              <a:t> </a:t>
-            </a:r>
-            <a:r>
-              <a:rPr lang="en-US" sz="1200" dirty="0" err="1">
-                <a:solidFill>
-                  <a:srgbClr val="0F1B2D"/>
-                </a:solidFill>
+                <a:latin typeface="Calibri" pitchFamily="34" charset="0"/>
+                <a:ea typeface="Calibri" pitchFamily="34" charset="-122"/>
+                <a:cs typeface="Calibri" pitchFamily="34" charset="-120"/>
+              </a:rPr>
+              <a:t> </a:t>
+            </a:r>
+            <a:r>
+              <a:rPr lang="en-US" sz="1200" dirty="0" err="1">
                 <a:latin typeface="Calibri" pitchFamily="34" charset="0"/>
                 <a:ea typeface="Calibri" pitchFamily="34" charset="-122"/>
                 <a:cs typeface="Calibri" pitchFamily="34" charset="-120"/>
@@ -3791,20 +3599,14 @@
             </a:r>
             <a:r>
               <a:rPr lang="en-US" sz="1200" dirty="0">
-                <a:solidFill>
-                  <a:srgbClr val="0F1B2D"/>
-                </a:solidFill>
-                <a:latin typeface="Calibri" pitchFamily="34" charset="0"/>
-                <a:ea typeface="Calibri" pitchFamily="34" charset="-122"/>
-                <a:cs typeface="Calibri" pitchFamily="34" charset="-120"/>
-              </a:rPr>
-              <a:t> </a:t>
-            </a:r>
-            <a:r>
-              <a:rPr lang="en-US" sz="1200" dirty="0" err="1">
-                <a:solidFill>
-                  <a:srgbClr val="0F1B2D"/>
-                </a:solidFill>
+                <a:latin typeface="Calibri" pitchFamily="34" charset="0"/>
+                <a:ea typeface="Calibri" pitchFamily="34" charset="-122"/>
+                <a:cs typeface="Calibri" pitchFamily="34" charset="-120"/>
+              </a:rPr>
+              <a:t> </a:t>
+            </a:r>
+            <a:r>
+              <a:rPr lang="en-US" sz="1200" dirty="0" err="1">
                 <a:latin typeface="Calibri" pitchFamily="34" charset="0"/>
                 <a:ea typeface="Calibri" pitchFamily="34" charset="-122"/>
                 <a:cs typeface="Calibri" pitchFamily="34" charset="-120"/>
@@ -3813,20 +3615,14 @@
             </a:r>
             <a:r>
               <a:rPr lang="en-US" sz="1200" dirty="0">
-                <a:solidFill>
-                  <a:srgbClr val="0F1B2D"/>
-                </a:solidFill>
-                <a:latin typeface="Calibri" pitchFamily="34" charset="0"/>
-                <a:ea typeface="Calibri" pitchFamily="34" charset="-122"/>
-                <a:cs typeface="Calibri" pitchFamily="34" charset="-120"/>
-              </a:rPr>
-              <a:t> </a:t>
-            </a:r>
-            <a:r>
-              <a:rPr lang="en-US" sz="1200" dirty="0" err="1">
-                <a:solidFill>
-                  <a:srgbClr val="0F1B2D"/>
-                </a:solidFill>
+                <a:latin typeface="Calibri" pitchFamily="34" charset="0"/>
+                <a:ea typeface="Calibri" pitchFamily="34" charset="-122"/>
+                <a:cs typeface="Calibri" pitchFamily="34" charset="-120"/>
+              </a:rPr>
+              <a:t> </a:t>
+            </a:r>
+            <a:r>
+              <a:rPr lang="en-US" sz="1200" dirty="0" err="1">
                 <a:latin typeface="Calibri" pitchFamily="34" charset="0"/>
                 <a:ea typeface="Calibri" pitchFamily="34" charset="-122"/>
                 <a:cs typeface="Calibri" pitchFamily="34" charset="-120"/>
@@ -4028,9 +3824,6 @@
             </a:pPr>
             <a:r>
               <a:rPr lang="en-US" sz="1200" dirty="0" err="1">
-                <a:solidFill>
-                  <a:srgbClr val="0F1B2D"/>
-                </a:solidFill>
                 <a:latin typeface="Calibri" pitchFamily="34" charset="0"/>
                 <a:ea typeface="Calibri" pitchFamily="34" charset="-122"/>
                 <a:cs typeface="Calibri" pitchFamily="34" charset="-120"/>
@@ -4039,9 +3832,6 @@
             </a:r>
             <a:r>
               <a:rPr lang="en-US" sz="1200" dirty="0">
-                <a:solidFill>
-                  <a:srgbClr val="0F1B2D"/>
-                </a:solidFill>
                 <a:latin typeface="Calibri" pitchFamily="34" charset="0"/>
                 <a:ea typeface="Calibri" pitchFamily="34" charset="-122"/>
                 <a:cs typeface="Calibri" pitchFamily="34" charset="-120"/>
@@ -4050,9 +3840,6 @@
             </a:r>
             <a:r>
               <a:rPr lang="en-US" sz="1200" dirty="0" err="1">
-                <a:solidFill>
-                  <a:srgbClr val="0F1B2D"/>
-                </a:solidFill>
                 <a:latin typeface="Calibri" pitchFamily="34" charset="0"/>
                 <a:ea typeface="Calibri" pitchFamily="34" charset="-122"/>
                 <a:cs typeface="Calibri" pitchFamily="34" charset="-120"/>
@@ -4061,20 +3848,14 @@
             </a:r>
             <a:r>
               <a:rPr lang="en-US" sz="1200" dirty="0">
-                <a:solidFill>
-                  <a:srgbClr val="0F1B2D"/>
-                </a:solidFill>
-                <a:latin typeface="Calibri" pitchFamily="34" charset="0"/>
-                <a:ea typeface="Calibri" pitchFamily="34" charset="-122"/>
-                <a:cs typeface="Calibri" pitchFamily="34" charset="-120"/>
-              </a:rPr>
-              <a:t> </a:t>
-            </a:r>
-            <a:r>
-              <a:rPr lang="en-US" sz="1200" dirty="0" err="1">
-                <a:solidFill>
-                  <a:srgbClr val="0F1B2D"/>
-                </a:solidFill>
+                <a:latin typeface="Calibri" pitchFamily="34" charset="0"/>
+                <a:ea typeface="Calibri" pitchFamily="34" charset="-122"/>
+                <a:cs typeface="Calibri" pitchFamily="34" charset="-120"/>
+              </a:rPr>
+              <a:t> </a:t>
+            </a:r>
+            <a:r>
+              <a:rPr lang="en-US" sz="1200" dirty="0" err="1">
                 <a:latin typeface="Calibri" pitchFamily="34" charset="0"/>
                 <a:ea typeface="Calibri" pitchFamily="34" charset="-122"/>
                 <a:cs typeface="Calibri" pitchFamily="34" charset="-120"/>
@@ -4083,20 +3864,14 @@
             </a:r>
             <a:r>
               <a:rPr lang="en-US" sz="1200" dirty="0">
-                <a:solidFill>
-                  <a:srgbClr val="0F1B2D"/>
-                </a:solidFill>
-                <a:latin typeface="Calibri" pitchFamily="34" charset="0"/>
-                <a:ea typeface="Calibri" pitchFamily="34" charset="-122"/>
-                <a:cs typeface="Calibri" pitchFamily="34" charset="-120"/>
-              </a:rPr>
-              <a:t> </a:t>
-            </a:r>
-            <a:r>
-              <a:rPr lang="en-US" sz="1200" dirty="0" err="1">
-                <a:solidFill>
-                  <a:srgbClr val="0F1B2D"/>
-                </a:solidFill>
+                <a:latin typeface="Calibri" pitchFamily="34" charset="0"/>
+                <a:ea typeface="Calibri" pitchFamily="34" charset="-122"/>
+                <a:cs typeface="Calibri" pitchFamily="34" charset="-120"/>
+              </a:rPr>
+              <a:t> </a:t>
+            </a:r>
+            <a:r>
+              <a:rPr lang="en-US" sz="1200" dirty="0" err="1">
                 <a:latin typeface="Calibri" pitchFamily="34" charset="0"/>
                 <a:ea typeface="Calibri" pitchFamily="34" charset="-122"/>
                 <a:cs typeface="Calibri" pitchFamily="34" charset="-120"/>
@@ -4105,20 +3880,14 @@
             </a:r>
             <a:r>
               <a:rPr lang="en-US" sz="1200" dirty="0">
-                <a:solidFill>
-                  <a:srgbClr val="0F1B2D"/>
-                </a:solidFill>
-                <a:latin typeface="Calibri" pitchFamily="34" charset="0"/>
-                <a:ea typeface="Calibri" pitchFamily="34" charset="-122"/>
-                <a:cs typeface="Calibri" pitchFamily="34" charset="-120"/>
-              </a:rPr>
-              <a:t> </a:t>
-            </a:r>
-            <a:r>
-              <a:rPr lang="en-US" sz="1200" dirty="0" err="1">
-                <a:solidFill>
-                  <a:srgbClr val="0F1B2D"/>
-                </a:solidFill>
+                <a:latin typeface="Calibri" pitchFamily="34" charset="0"/>
+                <a:ea typeface="Calibri" pitchFamily="34" charset="-122"/>
+                <a:cs typeface="Calibri" pitchFamily="34" charset="-120"/>
+              </a:rPr>
+              <a:t> </a:t>
+            </a:r>
+            <a:r>
+              <a:rPr lang="en-US" sz="1200" dirty="0" err="1">
                 <a:latin typeface="Calibri" pitchFamily="34" charset="0"/>
                 <a:ea typeface="Calibri" pitchFamily="34" charset="-122"/>
                 <a:cs typeface="Calibri" pitchFamily="34" charset="-120"/>
@@ -4127,9 +3896,6 @@
             </a:r>
             <a:r>
               <a:rPr lang="en-US" sz="1200" dirty="0">
-                <a:solidFill>
-                  <a:srgbClr val="0F1B2D"/>
-                </a:solidFill>
                 <a:latin typeface="Calibri" pitchFamily="34" charset="0"/>
                 <a:ea typeface="Calibri" pitchFamily="34" charset="-122"/>
                 <a:cs typeface="Calibri" pitchFamily="34" charset="-120"/>
@@ -4138,9 +3904,6 @@
             </a:r>
             <a:r>
               <a:rPr lang="en-US" sz="1200" dirty="0" err="1">
-                <a:solidFill>
-                  <a:srgbClr val="0F1B2D"/>
-                </a:solidFill>
                 <a:latin typeface="Calibri" pitchFamily="34" charset="0"/>
                 <a:ea typeface="Calibri" pitchFamily="34" charset="-122"/>
                 <a:cs typeface="Calibri" pitchFamily="34" charset="-120"/>
@@ -4149,20 +3912,14 @@
             </a:r>
             <a:r>
               <a:rPr lang="en-US" sz="1200" dirty="0">
-                <a:solidFill>
-                  <a:srgbClr val="0F1B2D"/>
-                </a:solidFill>
-                <a:latin typeface="Calibri" pitchFamily="34" charset="0"/>
-                <a:ea typeface="Calibri" pitchFamily="34" charset="-122"/>
-                <a:cs typeface="Calibri" pitchFamily="34" charset="-120"/>
-              </a:rPr>
-              <a:t> </a:t>
-            </a:r>
-            <a:r>
-              <a:rPr lang="en-US" sz="1200" dirty="0" err="1">
-                <a:solidFill>
-                  <a:srgbClr val="0F1B2D"/>
-                </a:solidFill>
+                <a:latin typeface="Calibri" pitchFamily="34" charset="0"/>
+                <a:ea typeface="Calibri" pitchFamily="34" charset="-122"/>
+                <a:cs typeface="Calibri" pitchFamily="34" charset="-120"/>
+              </a:rPr>
+              <a:t> </a:t>
+            </a:r>
+            <a:r>
+              <a:rPr lang="en-US" sz="1200" dirty="0" err="1">
                 <a:latin typeface="Calibri" pitchFamily="34" charset="0"/>
                 <a:ea typeface="Calibri" pitchFamily="34" charset="-122"/>
                 <a:cs typeface="Calibri" pitchFamily="34" charset="-120"/>
@@ -4171,20 +3928,14 @@
             </a:r>
             <a:r>
               <a:rPr lang="en-US" sz="1200" dirty="0">
-                <a:solidFill>
-                  <a:srgbClr val="0F1B2D"/>
-                </a:solidFill>
-                <a:latin typeface="Calibri" pitchFamily="34" charset="0"/>
-                <a:ea typeface="Calibri" pitchFamily="34" charset="-122"/>
-                <a:cs typeface="Calibri" pitchFamily="34" charset="-120"/>
-              </a:rPr>
-              <a:t> </a:t>
-            </a:r>
-            <a:r>
-              <a:rPr lang="en-US" sz="1200" dirty="0" err="1">
-                <a:solidFill>
-                  <a:srgbClr val="0F1B2D"/>
-                </a:solidFill>
+                <a:latin typeface="Calibri" pitchFamily="34" charset="0"/>
+                <a:ea typeface="Calibri" pitchFamily="34" charset="-122"/>
+                <a:cs typeface="Calibri" pitchFamily="34" charset="-120"/>
+              </a:rPr>
+              <a:t> </a:t>
+            </a:r>
+            <a:r>
+              <a:rPr lang="en-US" sz="1200" dirty="0" err="1">
                 <a:latin typeface="Calibri" pitchFamily="34" charset="0"/>
                 <a:ea typeface="Calibri" pitchFamily="34" charset="-122"/>
                 <a:cs typeface="Calibri" pitchFamily="34" charset="-120"/>
@@ -4193,20 +3944,14 @@
             </a:r>
             <a:r>
               <a:rPr lang="en-US" sz="1200" dirty="0">
-                <a:solidFill>
-                  <a:srgbClr val="0F1B2D"/>
-                </a:solidFill>
-                <a:latin typeface="Calibri" pitchFamily="34" charset="0"/>
-                <a:ea typeface="Calibri" pitchFamily="34" charset="-122"/>
-                <a:cs typeface="Calibri" pitchFamily="34" charset="-120"/>
-              </a:rPr>
-              <a:t> </a:t>
-            </a:r>
-            <a:r>
-              <a:rPr lang="en-US" sz="1200" dirty="0" err="1">
-                <a:solidFill>
-                  <a:srgbClr val="0F1B2D"/>
-                </a:solidFill>
+                <a:latin typeface="Calibri" pitchFamily="34" charset="0"/>
+                <a:ea typeface="Calibri" pitchFamily="34" charset="-122"/>
+                <a:cs typeface="Calibri" pitchFamily="34" charset="-120"/>
+              </a:rPr>
+              <a:t> </a:t>
+            </a:r>
+            <a:r>
+              <a:rPr lang="en-US" sz="1200" dirty="0" err="1">
                 <a:latin typeface="Calibri" pitchFamily="34" charset="0"/>
                 <a:ea typeface="Calibri" pitchFamily="34" charset="-122"/>
                 <a:cs typeface="Calibri" pitchFamily="34" charset="-120"/>
@@ -4215,9 +3960,6 @@
             </a:r>
             <a:r>
               <a:rPr lang="en-US" sz="1200" dirty="0">
-                <a:solidFill>
-                  <a:srgbClr val="0F1B2D"/>
-                </a:solidFill>
                 <a:latin typeface="Calibri" pitchFamily="34" charset="0"/>
                 <a:ea typeface="Calibri" pitchFamily="34" charset="-122"/>
                 <a:cs typeface="Calibri" pitchFamily="34" charset="-120"/>
@@ -4226,9 +3968,6 @@
             </a:r>
             <a:r>
               <a:rPr lang="en-US" sz="1200" dirty="0" err="1">
-                <a:solidFill>
-                  <a:srgbClr val="0F1B2D"/>
-                </a:solidFill>
                 <a:latin typeface="Calibri" pitchFamily="34" charset="0"/>
                 <a:ea typeface="Calibri" pitchFamily="34" charset="-122"/>
                 <a:cs typeface="Calibri" pitchFamily="34" charset="-120"/>
@@ -4237,20 +3976,14 @@
             </a:r>
             <a:r>
               <a:rPr lang="en-US" sz="1200" dirty="0">
-                <a:solidFill>
-                  <a:srgbClr val="0F1B2D"/>
-                </a:solidFill>
-                <a:latin typeface="Calibri" pitchFamily="34" charset="0"/>
-                <a:ea typeface="Calibri" pitchFamily="34" charset="-122"/>
-                <a:cs typeface="Calibri" pitchFamily="34" charset="-120"/>
-              </a:rPr>
-              <a:t> </a:t>
-            </a:r>
-            <a:r>
-              <a:rPr lang="en-US" sz="1200" dirty="0" err="1">
-                <a:solidFill>
-                  <a:srgbClr val="0F1B2D"/>
-                </a:solidFill>
+                <a:latin typeface="Calibri" pitchFamily="34" charset="0"/>
+                <a:ea typeface="Calibri" pitchFamily="34" charset="-122"/>
+                <a:cs typeface="Calibri" pitchFamily="34" charset="-120"/>
+              </a:rPr>
+              <a:t> </a:t>
+            </a:r>
+            <a:r>
+              <a:rPr lang="en-US" sz="1200" dirty="0" err="1">
                 <a:latin typeface="Calibri" pitchFamily="34" charset="0"/>
                 <a:ea typeface="Calibri" pitchFamily="34" charset="-122"/>
                 <a:cs typeface="Calibri" pitchFamily="34" charset="-120"/>
@@ -4259,20 +3992,14 @@
             </a:r>
             <a:r>
               <a:rPr lang="en-US" sz="1200" dirty="0">
-                <a:solidFill>
-                  <a:srgbClr val="0F1B2D"/>
-                </a:solidFill>
-                <a:latin typeface="Calibri" pitchFamily="34" charset="0"/>
-                <a:ea typeface="Calibri" pitchFamily="34" charset="-122"/>
-                <a:cs typeface="Calibri" pitchFamily="34" charset="-120"/>
-              </a:rPr>
-              <a:t> </a:t>
-            </a:r>
-            <a:r>
-              <a:rPr lang="en-US" sz="1200" dirty="0" err="1">
-                <a:solidFill>
-                  <a:srgbClr val="0F1B2D"/>
-                </a:solidFill>
+                <a:latin typeface="Calibri" pitchFamily="34" charset="0"/>
+                <a:ea typeface="Calibri" pitchFamily="34" charset="-122"/>
+                <a:cs typeface="Calibri" pitchFamily="34" charset="-120"/>
+              </a:rPr>
+              <a:t> </a:t>
+            </a:r>
+            <a:r>
+              <a:rPr lang="en-US" sz="1200" dirty="0" err="1">
                 <a:latin typeface="Calibri" pitchFamily="34" charset="0"/>
                 <a:ea typeface="Calibri" pitchFamily="34" charset="-122"/>
                 <a:cs typeface="Calibri" pitchFamily="34" charset="-120"/>
@@ -4281,9 +4008,6 @@
             </a:r>
             <a:r>
               <a:rPr lang="en-US" sz="1200" dirty="0">
-                <a:solidFill>
-                  <a:srgbClr val="0F1B2D"/>
-                </a:solidFill>
                 <a:latin typeface="Calibri" pitchFamily="34" charset="0"/>
                 <a:ea typeface="Calibri" pitchFamily="34" charset="-122"/>
                 <a:cs typeface="Calibri" pitchFamily="34" charset="-120"/>
@@ -4292,9 +4016,6 @@
             </a:r>
             <a:r>
               <a:rPr lang="en-US" sz="1200" dirty="0" err="1">
-                <a:solidFill>
-                  <a:srgbClr val="0F1B2D"/>
-                </a:solidFill>
                 <a:latin typeface="Calibri" pitchFamily="34" charset="0"/>
                 <a:ea typeface="Calibri" pitchFamily="34" charset="-122"/>
                 <a:cs typeface="Calibri" pitchFamily="34" charset="-120"/>
@@ -4303,20 +4024,14 @@
             </a:r>
             <a:r>
               <a:rPr lang="en-US" sz="1200" dirty="0">
-                <a:solidFill>
-                  <a:srgbClr val="0F1B2D"/>
-                </a:solidFill>
-                <a:latin typeface="Calibri" pitchFamily="34" charset="0"/>
-                <a:ea typeface="Calibri" pitchFamily="34" charset="-122"/>
-                <a:cs typeface="Calibri" pitchFamily="34" charset="-120"/>
-              </a:rPr>
-              <a:t> </a:t>
-            </a:r>
-            <a:r>
-              <a:rPr lang="en-US" sz="1200" dirty="0" err="1">
-                <a:solidFill>
-                  <a:srgbClr val="0F1B2D"/>
-                </a:solidFill>
+                <a:latin typeface="Calibri" pitchFamily="34" charset="0"/>
+                <a:ea typeface="Calibri" pitchFamily="34" charset="-122"/>
+                <a:cs typeface="Calibri" pitchFamily="34" charset="-120"/>
+              </a:rPr>
+              <a:t> </a:t>
+            </a:r>
+            <a:r>
+              <a:rPr lang="en-US" sz="1200" dirty="0" err="1">
                 <a:latin typeface="Calibri" pitchFamily="34" charset="0"/>
                 <a:ea typeface="Calibri" pitchFamily="34" charset="-122"/>
                 <a:cs typeface="Calibri" pitchFamily="34" charset="-120"/>
@@ -4325,9 +4040,6 @@
             </a:r>
             <a:r>
               <a:rPr lang="en-US" sz="1200" dirty="0">
-                <a:solidFill>
-                  <a:srgbClr val="0F1B2D"/>
-                </a:solidFill>
                 <a:latin typeface="Calibri" pitchFamily="34" charset="0"/>
                 <a:ea typeface="Calibri" pitchFamily="34" charset="-122"/>
                 <a:cs typeface="Calibri" pitchFamily="34" charset="-120"/>
@@ -4336,9 +4048,6 @@
             </a:r>
             <a:r>
               <a:rPr lang="en-US" sz="1200" dirty="0" err="1">
-                <a:solidFill>
-                  <a:srgbClr val="0F1B2D"/>
-                </a:solidFill>
                 <a:latin typeface="Calibri" pitchFamily="34" charset="0"/>
                 <a:ea typeface="Calibri" pitchFamily="34" charset="-122"/>
                 <a:cs typeface="Calibri" pitchFamily="34" charset="-120"/>
@@ -4347,20 +4056,14 @@
             </a:r>
             <a:r>
               <a:rPr lang="en-US" sz="1200" dirty="0">
-                <a:solidFill>
-                  <a:srgbClr val="0F1B2D"/>
-                </a:solidFill>
-                <a:latin typeface="Calibri" pitchFamily="34" charset="0"/>
-                <a:ea typeface="Calibri" pitchFamily="34" charset="-122"/>
-                <a:cs typeface="Calibri" pitchFamily="34" charset="-120"/>
-              </a:rPr>
-              <a:t> </a:t>
-            </a:r>
-            <a:r>
-              <a:rPr lang="en-US" sz="1200" dirty="0" err="1">
-                <a:solidFill>
-                  <a:srgbClr val="0F1B2D"/>
-                </a:solidFill>
+                <a:latin typeface="Calibri" pitchFamily="34" charset="0"/>
+                <a:ea typeface="Calibri" pitchFamily="34" charset="-122"/>
+                <a:cs typeface="Calibri" pitchFamily="34" charset="-120"/>
+              </a:rPr>
+              <a:t> </a:t>
+            </a:r>
+            <a:r>
+              <a:rPr lang="en-US" sz="1200" dirty="0" err="1">
                 <a:latin typeface="Calibri" pitchFamily="34" charset="0"/>
                 <a:ea typeface="Calibri" pitchFamily="34" charset="-122"/>
                 <a:cs typeface="Calibri" pitchFamily="34" charset="-120"/>
@@ -4369,20 +4072,14 @@
             </a:r>
             <a:r>
               <a:rPr lang="en-US" sz="1200" dirty="0">
-                <a:solidFill>
-                  <a:srgbClr val="0F1B2D"/>
-                </a:solidFill>
-                <a:latin typeface="Calibri" pitchFamily="34" charset="0"/>
-                <a:ea typeface="Calibri" pitchFamily="34" charset="-122"/>
-                <a:cs typeface="Calibri" pitchFamily="34" charset="-120"/>
-              </a:rPr>
-              <a:t> </a:t>
-            </a:r>
-            <a:r>
-              <a:rPr lang="en-US" sz="1200" dirty="0" err="1">
-                <a:solidFill>
-                  <a:srgbClr val="0F1B2D"/>
-                </a:solidFill>
+                <a:latin typeface="Calibri" pitchFamily="34" charset="0"/>
+                <a:ea typeface="Calibri" pitchFamily="34" charset="-122"/>
+                <a:cs typeface="Calibri" pitchFamily="34" charset="-120"/>
+              </a:rPr>
+              <a:t> </a:t>
+            </a:r>
+            <a:r>
+              <a:rPr lang="en-US" sz="1200" dirty="0" err="1">
                 <a:latin typeface="Calibri" pitchFamily="34" charset="0"/>
                 <a:ea typeface="Calibri" pitchFamily="34" charset="-122"/>
                 <a:cs typeface="Calibri" pitchFamily="34" charset="-120"/>
@@ -4391,20 +4088,14 @@
             </a:r>
             <a:r>
               <a:rPr lang="en-US" sz="1200" dirty="0">
-                <a:solidFill>
-                  <a:srgbClr val="0F1B2D"/>
-                </a:solidFill>
-                <a:latin typeface="Calibri" pitchFamily="34" charset="0"/>
-                <a:ea typeface="Calibri" pitchFamily="34" charset="-122"/>
-                <a:cs typeface="Calibri" pitchFamily="34" charset="-120"/>
-              </a:rPr>
-              <a:t> </a:t>
-            </a:r>
-            <a:r>
-              <a:rPr lang="en-US" sz="1200" dirty="0" err="1">
-                <a:solidFill>
-                  <a:srgbClr val="0F1B2D"/>
-                </a:solidFill>
+                <a:latin typeface="Calibri" pitchFamily="34" charset="0"/>
+                <a:ea typeface="Calibri" pitchFamily="34" charset="-122"/>
+                <a:cs typeface="Calibri" pitchFamily="34" charset="-120"/>
+              </a:rPr>
+              <a:t> </a:t>
+            </a:r>
+            <a:r>
+              <a:rPr lang="en-US" sz="1200" dirty="0" err="1">
                 <a:latin typeface="Calibri" pitchFamily="34" charset="0"/>
                 <a:ea typeface="Calibri" pitchFamily="34" charset="-122"/>
                 <a:cs typeface="Calibri" pitchFamily="34" charset="-120"/>
@@ -4413,20 +4104,14 @@
             </a:r>
             <a:r>
               <a:rPr lang="en-US" sz="1200" dirty="0">
-                <a:solidFill>
-                  <a:srgbClr val="0F1B2D"/>
-                </a:solidFill>
-                <a:latin typeface="Calibri" pitchFamily="34" charset="0"/>
-                <a:ea typeface="Calibri" pitchFamily="34" charset="-122"/>
-                <a:cs typeface="Calibri" pitchFamily="34" charset="-120"/>
-              </a:rPr>
-              <a:t> </a:t>
-            </a:r>
-            <a:r>
-              <a:rPr lang="en-US" sz="1200" dirty="0" err="1">
-                <a:solidFill>
-                  <a:srgbClr val="0F1B2D"/>
-                </a:solidFill>
+                <a:latin typeface="Calibri" pitchFamily="34" charset="0"/>
+                <a:ea typeface="Calibri" pitchFamily="34" charset="-122"/>
+                <a:cs typeface="Calibri" pitchFamily="34" charset="-120"/>
+              </a:rPr>
+              <a:t> </a:t>
+            </a:r>
+            <a:r>
+              <a:rPr lang="en-US" sz="1200" dirty="0" err="1">
                 <a:latin typeface="Calibri" pitchFamily="34" charset="0"/>
                 <a:ea typeface="Calibri" pitchFamily="34" charset="-122"/>
                 <a:cs typeface="Calibri" pitchFamily="34" charset="-120"/>
@@ -8242,6 +7927,9 @@
           <a:lstStyle/>
           <a:p>
             <a:pPr marL="342900" indent="-342900">
+              <a:lnSpc>
+                <a:spcPct val="150000"/>
+              </a:lnSpc>
               <a:buSzPct val="100000"/>
               <a:buChar char="•"/>
             </a:pPr>
@@ -8251,7 +7939,7 @@
                 <a:ea typeface="Calibri" pitchFamily="34" charset="-122"/>
                 <a:cs typeface="Calibri" pitchFamily="34" charset="-120"/>
               </a:rPr>
-              <a:t>Aplikacija</a:t>
+              <a:t>Aplikaciji</a:t>
             </a:r>
             <a:r>
               <a:rPr lang="en-US" sz="1200" dirty="0">
@@ -8275,12 +7963,55 @@
                 <a:ea typeface="Calibri" pitchFamily="34" charset="-122"/>
                 <a:cs typeface="Calibri" pitchFamily="34" charset="-120"/>
               </a:rPr>
-              <a:t> ne treba originalnu lozinku</a:t>
+              <a:t> ne </a:t>
+            </a:r>
+            <a:r>
+              <a:rPr lang="en-US" sz="1200" dirty="0" err="1">
+                <a:latin typeface="Calibri" pitchFamily="34" charset="0"/>
+                <a:ea typeface="Calibri" pitchFamily="34" charset="-122"/>
+                <a:cs typeface="Calibri" pitchFamily="34" charset="-120"/>
+              </a:rPr>
+              <a:t>treba</a:t>
+            </a:r>
+            <a:r>
+              <a:rPr lang="en-US" sz="1200" dirty="0">
+                <a:latin typeface="Calibri" pitchFamily="34" charset="0"/>
+                <a:ea typeface="Calibri" pitchFamily="34" charset="-122"/>
+                <a:cs typeface="Calibri" pitchFamily="34" charset="-120"/>
+              </a:rPr>
+              <a:t> </a:t>
+            </a:r>
+            <a:r>
+              <a:rPr lang="en-US" sz="1200" dirty="0" err="1">
+                <a:latin typeface="Calibri" pitchFamily="34" charset="0"/>
+                <a:ea typeface="Calibri" pitchFamily="34" charset="-122"/>
+                <a:cs typeface="Calibri" pitchFamily="34" charset="-120"/>
+              </a:rPr>
+              <a:t>originalna</a:t>
+            </a:r>
+            <a:r>
+              <a:rPr lang="en-US" sz="1200" dirty="0">
+                <a:latin typeface="Calibri" pitchFamily="34" charset="0"/>
+                <a:ea typeface="Calibri" pitchFamily="34" charset="-122"/>
+                <a:cs typeface="Calibri" pitchFamily="34" charset="-120"/>
+              </a:rPr>
+              <a:t> </a:t>
+            </a:r>
+            <a:r>
+              <a:rPr lang="en-US" sz="1200" dirty="0" err="1">
+                <a:latin typeface="Calibri" pitchFamily="34" charset="0"/>
+                <a:ea typeface="Calibri" pitchFamily="34" charset="-122"/>
+                <a:cs typeface="Calibri" pitchFamily="34" charset="-120"/>
+              </a:rPr>
+              <a:t>lozinka</a:t>
             </a:r>
             <a:endParaRPr lang="en-US" sz="1200" dirty="0"/>
           </a:p>
           <a:p>
             <a:pPr marL="342900" indent="-342900">
+              <a:lnSpc>
+                <a:spcPct val="150000"/>
+              </a:lnSpc>
               <a:buSzPct val="100000"/>
               <a:buChar char="•"/>
             </a:pPr>
@@ -8296,16 +8027,27 @@
           </a:p>
           <a:p>
             <a:pPr marL="342900" indent="-342900">
+              <a:lnSpc>
+                <a:spcPct val="150000"/>
+              </a:lnSpc>
               <a:buSzPct val="100000"/>
               <a:buChar char="•"/>
             </a:pPr>
             <a:r>
-              <a:rPr lang="en-US" sz="1200" dirty="0" err="1">
-                <a:latin typeface="Calibri" pitchFamily="34" charset="0"/>
-                <a:ea typeface="Calibri" pitchFamily="34" charset="-122"/>
-                <a:cs typeface="Calibri" pitchFamily="34" charset="-120"/>
-              </a:rPr>
-              <a:t>Enkriptovana</a:t>
+              <a:rPr lang="en-US" sz="1200" dirty="0">
+                <a:latin typeface="Calibri" pitchFamily="34" charset="0"/>
+                <a:ea typeface="Calibri" pitchFamily="34" charset="-122"/>
+                <a:cs typeface="Calibri" pitchFamily="34" charset="-120"/>
+              </a:rPr>
+              <a:t>Ako je </a:t>
+            </a:r>
+            <a:r>
+              <a:rPr lang="en-US" sz="1200" dirty="0" err="1">
+                <a:latin typeface="Calibri" pitchFamily="34" charset="0"/>
+                <a:ea typeface="Calibri" pitchFamily="34" charset="-122"/>
+                <a:cs typeface="Calibri" pitchFamily="34" charset="-120"/>
+              </a:rPr>
+              <a:t>enkriptovana</a:t>
             </a:r>
             <a:r>
               <a:rPr lang="en-US" sz="1200" dirty="0">
@@ -8329,15 +8071,31 @@
                 <a:ea typeface="Calibri" pitchFamily="34" charset="-122"/>
                 <a:cs typeface="Calibri" pitchFamily="34" charset="-120"/>
               </a:rPr>
-              <a:t>. Ako </a:t>
-            </a:r>
-            <a:r>
-              <a:rPr lang="en-US" sz="1200" dirty="0" err="1">
-                <a:latin typeface="Calibri" pitchFamily="34" charset="0"/>
-                <a:ea typeface="Calibri" pitchFamily="34" charset="-122"/>
-                <a:cs typeface="Calibri" pitchFamily="34" charset="-120"/>
-              </a:rPr>
-              <a:t>postoji</a:t>
+              <a:t> </a:t>
+            </a:r>
+            <a:r>
+              <a:rPr lang="en-US" sz="1200" dirty="0" err="1">
+                <a:latin typeface="Calibri" pitchFamily="34" charset="0"/>
+                <a:ea typeface="Calibri" pitchFamily="34" charset="-122"/>
+                <a:cs typeface="Calibri" pitchFamily="34" charset="-120"/>
+              </a:rPr>
+              <a:t>i</a:t>
+            </a:r>
+            <a:r>
+              <a:rPr lang="en-US" sz="1200" dirty="0">
+                <a:latin typeface="Calibri" pitchFamily="34" charset="0"/>
+                <a:ea typeface="Calibri" pitchFamily="34" charset="-122"/>
+                <a:cs typeface="Calibri" pitchFamily="34" charset="-120"/>
+              </a:rPr>
+              <a:t> </a:t>
+            </a:r>
+            <a:r>
+              <a:rPr lang="sr-Latn-RS" sz="1200" dirty="0">
+                <a:latin typeface="Calibri" pitchFamily="34" charset="0"/>
+                <a:ea typeface="Calibri" pitchFamily="34" charset="-122"/>
+                <a:cs typeface="Calibri" pitchFamily="34" charset="-120"/>
+              </a:rPr>
+              <a:t>dostupan je</a:t>
             </a:r>
             <a:r>
               <a:rPr lang="en-US" sz="1200" dirty="0">
@@ -8383,6 +8141,9 @@
           </a:p>
           <a:p>
             <a:pPr marL="342900" indent="-342900">
+              <a:lnSpc>
+                <a:spcPct val="150000"/>
+              </a:lnSpc>
               <a:buSzPct val="100000"/>
               <a:buChar char="•"/>
             </a:pPr>
@@ -8470,6 +8231,9 @@
           </a:p>
           <a:p>
             <a:pPr marL="342900" indent="-342900">
+              <a:lnSpc>
+                <a:spcPct val="150000"/>
+              </a:lnSpc>
               <a:buSzPct val="100000"/>
               <a:buChar char="•"/>
             </a:pPr>
@@ -8787,10 +8551,7 @@
               <a:rPr lang="en-US" sz="1100" dirty="0" err="1"/>
               <a:t>milisekundi</a:t>
             </a:r>
-            <a:r>
-              <a:rPr lang="en-US" sz="1100" dirty="0"/>
-              <a:t>. </a:t>
-            </a:r>
+            <a:endParaRPr lang="en-US" sz="1100" dirty="0"/>
           </a:p>
         </p:txBody>
       </p:sp>
@@ -9902,9 +9663,6 @@
             </a:pPr>
             <a:r>
               <a:rPr lang="en-US" sz="1200" dirty="0" err="1">
-                <a:solidFill>
-                  <a:srgbClr val="0F1B2D"/>
-                </a:solidFill>
                 <a:latin typeface="Calibri" pitchFamily="34" charset="0"/>
                 <a:ea typeface="Calibri" pitchFamily="34" charset="-122"/>
                 <a:cs typeface="Calibri" pitchFamily="34" charset="-120"/>
@@ -9913,20 +9671,14 @@
             </a:r>
             <a:r>
               <a:rPr lang="en-US" sz="1200" dirty="0">
-                <a:solidFill>
-                  <a:srgbClr val="0F1B2D"/>
-                </a:solidFill>
-                <a:latin typeface="Calibri" pitchFamily="34" charset="0"/>
-                <a:ea typeface="Calibri" pitchFamily="34" charset="-122"/>
-                <a:cs typeface="Calibri" pitchFamily="34" charset="-120"/>
-              </a:rPr>
-              <a:t> </a:t>
-            </a:r>
-            <a:r>
-              <a:rPr lang="en-US" sz="1200" dirty="0" err="1">
-                <a:solidFill>
-                  <a:srgbClr val="0F1B2D"/>
-                </a:solidFill>
+                <a:latin typeface="Calibri" pitchFamily="34" charset="0"/>
+                <a:ea typeface="Calibri" pitchFamily="34" charset="-122"/>
+                <a:cs typeface="Calibri" pitchFamily="34" charset="-120"/>
+              </a:rPr>
+              <a:t> </a:t>
+            </a:r>
+            <a:r>
+              <a:rPr lang="en-US" sz="1200" dirty="0" err="1">
                 <a:latin typeface="Calibri" pitchFamily="34" charset="0"/>
                 <a:ea typeface="Calibri" pitchFamily="34" charset="-122"/>
                 <a:cs typeface="Calibri" pitchFamily="34" charset="-120"/>
@@ -9935,20 +9687,14 @@
             </a:r>
             <a:r>
               <a:rPr lang="en-US" sz="1200" dirty="0">
-                <a:solidFill>
-                  <a:srgbClr val="0F1B2D"/>
-                </a:solidFill>
-                <a:latin typeface="Calibri" pitchFamily="34" charset="0"/>
-                <a:ea typeface="Calibri" pitchFamily="34" charset="-122"/>
-                <a:cs typeface="Calibri" pitchFamily="34" charset="-120"/>
-              </a:rPr>
-              <a:t> </a:t>
-            </a:r>
-            <a:r>
-              <a:rPr lang="en-US" sz="1200" dirty="0" err="1">
-                <a:solidFill>
-                  <a:srgbClr val="0F1B2D"/>
-                </a:solidFill>
+                <a:latin typeface="Calibri" pitchFamily="34" charset="0"/>
+                <a:ea typeface="Calibri" pitchFamily="34" charset="-122"/>
+                <a:cs typeface="Calibri" pitchFamily="34" charset="-120"/>
+              </a:rPr>
+              <a:t> </a:t>
+            </a:r>
+            <a:r>
+              <a:rPr lang="en-US" sz="1200" dirty="0" err="1">
                 <a:latin typeface="Calibri" pitchFamily="34" charset="0"/>
                 <a:ea typeface="Calibri" pitchFamily="34" charset="-122"/>
                 <a:cs typeface="Calibri" pitchFamily="34" charset="-120"/>
@@ -9957,20 +9703,14 @@
             </a:r>
             <a:r>
               <a:rPr lang="en-US" sz="1200" dirty="0">
-                <a:solidFill>
-                  <a:srgbClr val="0F1B2D"/>
-                </a:solidFill>
-                <a:latin typeface="Calibri" pitchFamily="34" charset="0"/>
-                <a:ea typeface="Calibri" pitchFamily="34" charset="-122"/>
-                <a:cs typeface="Calibri" pitchFamily="34" charset="-120"/>
-              </a:rPr>
-              <a:t> </a:t>
-            </a:r>
-            <a:r>
-              <a:rPr lang="en-US" sz="1200" dirty="0" err="1">
-                <a:solidFill>
-                  <a:srgbClr val="0F1B2D"/>
-                </a:solidFill>
+                <a:latin typeface="Calibri" pitchFamily="34" charset="0"/>
+                <a:ea typeface="Calibri" pitchFamily="34" charset="-122"/>
+                <a:cs typeface="Calibri" pitchFamily="34" charset="-120"/>
+              </a:rPr>
+              <a:t> </a:t>
+            </a:r>
+            <a:r>
+              <a:rPr lang="en-US" sz="1200" dirty="0" err="1">
                 <a:latin typeface="Calibri" pitchFamily="34" charset="0"/>
                 <a:ea typeface="Calibri" pitchFamily="34" charset="-122"/>
                 <a:cs typeface="Calibri" pitchFamily="34" charset="-120"/>
@@ -9979,20 +9719,14 @@
             </a:r>
             <a:r>
               <a:rPr lang="en-US" sz="1200" dirty="0">
-                <a:solidFill>
-                  <a:srgbClr val="0F1B2D"/>
-                </a:solidFill>
-                <a:latin typeface="Calibri" pitchFamily="34" charset="0"/>
-                <a:ea typeface="Calibri" pitchFamily="34" charset="-122"/>
-                <a:cs typeface="Calibri" pitchFamily="34" charset="-120"/>
-              </a:rPr>
-              <a:t> </a:t>
-            </a:r>
-            <a:r>
-              <a:rPr lang="en-US" sz="1200" dirty="0" err="1">
-                <a:solidFill>
-                  <a:srgbClr val="0F1B2D"/>
-                </a:solidFill>
+                <a:latin typeface="Calibri" pitchFamily="34" charset="0"/>
+                <a:ea typeface="Calibri" pitchFamily="34" charset="-122"/>
+                <a:cs typeface="Calibri" pitchFamily="34" charset="-120"/>
+              </a:rPr>
+              <a:t> </a:t>
+            </a:r>
+            <a:r>
+              <a:rPr lang="en-US" sz="1200" dirty="0" err="1">
                 <a:latin typeface="Calibri" pitchFamily="34" charset="0"/>
                 <a:ea typeface="Calibri" pitchFamily="34" charset="-122"/>
                 <a:cs typeface="Calibri" pitchFamily="34" charset="-120"/>
@@ -10001,20 +9735,14 @@
             </a:r>
             <a:r>
               <a:rPr lang="en-US" sz="1200" dirty="0">
-                <a:solidFill>
-                  <a:srgbClr val="0F1B2D"/>
-                </a:solidFill>
-                <a:latin typeface="Calibri" pitchFamily="34" charset="0"/>
-                <a:ea typeface="Calibri" pitchFamily="34" charset="-122"/>
-                <a:cs typeface="Calibri" pitchFamily="34" charset="-120"/>
-              </a:rPr>
-              <a:t> </a:t>
-            </a:r>
-            <a:r>
-              <a:rPr lang="en-US" sz="1200" dirty="0" err="1">
-                <a:solidFill>
-                  <a:srgbClr val="0F1B2D"/>
-                </a:solidFill>
+                <a:latin typeface="Calibri" pitchFamily="34" charset="0"/>
+                <a:ea typeface="Calibri" pitchFamily="34" charset="-122"/>
+                <a:cs typeface="Calibri" pitchFamily="34" charset="-120"/>
+              </a:rPr>
+              <a:t> </a:t>
+            </a:r>
+            <a:r>
+              <a:rPr lang="en-US" sz="1200" dirty="0" err="1">
                 <a:latin typeface="Calibri" pitchFamily="34" charset="0"/>
                 <a:ea typeface="Calibri" pitchFamily="34" charset="-122"/>
                 <a:cs typeface="Calibri" pitchFamily="34" charset="-120"/>
@@ -10023,9 +9751,6 @@
             </a:r>
             <a:r>
               <a:rPr lang="en-US" sz="1200" dirty="0">
-                <a:solidFill>
-                  <a:srgbClr val="0F1B2D"/>
-                </a:solidFill>
                 <a:latin typeface="Calibri" pitchFamily="34" charset="0"/>
                 <a:ea typeface="Calibri" pitchFamily="34" charset="-122"/>
                 <a:cs typeface="Calibri" pitchFamily="34" charset="-120"/>
@@ -10034,9 +9759,6 @@
             </a:r>
             <a:r>
               <a:rPr lang="en-US" sz="1200" dirty="0" err="1">
-                <a:solidFill>
-                  <a:srgbClr val="0F1B2D"/>
-                </a:solidFill>
                 <a:latin typeface="Calibri" pitchFamily="34" charset="0"/>
                 <a:ea typeface="Calibri" pitchFamily="34" charset="-122"/>
                 <a:cs typeface="Calibri" pitchFamily="34" charset="-120"/>
@@ -10045,20 +9767,14 @@
             </a:r>
             <a:r>
               <a:rPr lang="en-US" sz="1200" dirty="0">
-                <a:solidFill>
-                  <a:srgbClr val="0F1B2D"/>
-                </a:solidFill>
-                <a:latin typeface="Calibri" pitchFamily="34" charset="0"/>
-                <a:ea typeface="Calibri" pitchFamily="34" charset="-122"/>
-                <a:cs typeface="Calibri" pitchFamily="34" charset="-120"/>
-              </a:rPr>
-              <a:t> </a:t>
-            </a:r>
-            <a:r>
-              <a:rPr lang="en-US" sz="1200" dirty="0" err="1">
-                <a:solidFill>
-                  <a:srgbClr val="0F1B2D"/>
-                </a:solidFill>
+                <a:latin typeface="Calibri" pitchFamily="34" charset="0"/>
+                <a:ea typeface="Calibri" pitchFamily="34" charset="-122"/>
+                <a:cs typeface="Calibri" pitchFamily="34" charset="-120"/>
+              </a:rPr>
+              <a:t> </a:t>
+            </a:r>
+            <a:r>
+              <a:rPr lang="en-US" sz="1200" dirty="0" err="1">
                 <a:latin typeface="Calibri" pitchFamily="34" charset="0"/>
                 <a:ea typeface="Calibri" pitchFamily="34" charset="-122"/>
                 <a:cs typeface="Calibri" pitchFamily="34" charset="-120"/>
@@ -10067,9 +9783,6 @@
             </a:r>
             <a:r>
               <a:rPr lang="en-US" sz="1200" dirty="0">
-                <a:solidFill>
-                  <a:srgbClr val="0F1B2D"/>
-                </a:solidFill>
                 <a:latin typeface="Calibri" pitchFamily="34" charset="0"/>
                 <a:ea typeface="Calibri" pitchFamily="34" charset="-122"/>
                 <a:cs typeface="Calibri" pitchFamily="34" charset="-120"/>
@@ -10078,9 +9791,6 @@
             </a:r>
             <a:r>
               <a:rPr lang="en-US" sz="1200" dirty="0" err="1">
-                <a:solidFill>
-                  <a:srgbClr val="0F1B2D"/>
-                </a:solidFill>
                 <a:latin typeface="Calibri" pitchFamily="34" charset="0"/>
                 <a:ea typeface="Calibri" pitchFamily="34" charset="-122"/>
                 <a:cs typeface="Calibri" pitchFamily="34" charset="-120"/>
@@ -10089,20 +9799,14 @@
             </a:r>
             <a:r>
               <a:rPr lang="en-US" sz="1200" dirty="0">
-                <a:solidFill>
-                  <a:srgbClr val="0F1B2D"/>
-                </a:solidFill>
-                <a:latin typeface="Calibri" pitchFamily="34" charset="0"/>
-                <a:ea typeface="Calibri" pitchFamily="34" charset="-122"/>
-                <a:cs typeface="Calibri" pitchFamily="34" charset="-120"/>
-              </a:rPr>
-              <a:t> </a:t>
-            </a:r>
-            <a:r>
-              <a:rPr lang="en-US" sz="1200" dirty="0" err="1">
-                <a:solidFill>
-                  <a:srgbClr val="0F1B2D"/>
-                </a:solidFill>
+                <a:latin typeface="Calibri" pitchFamily="34" charset="0"/>
+                <a:ea typeface="Calibri" pitchFamily="34" charset="-122"/>
+                <a:cs typeface="Calibri" pitchFamily="34" charset="-120"/>
+              </a:rPr>
+              <a:t> </a:t>
+            </a:r>
+            <a:r>
+              <a:rPr lang="en-US" sz="1200" dirty="0" err="1">
                 <a:latin typeface="Calibri" pitchFamily="34" charset="0"/>
                 <a:ea typeface="Calibri" pitchFamily="34" charset="-122"/>
                 <a:cs typeface="Calibri" pitchFamily="34" charset="-120"/>
@@ -10111,20 +9815,14 @@
             </a:r>
             <a:r>
               <a:rPr lang="en-US" sz="1200" dirty="0">
-                <a:solidFill>
-                  <a:srgbClr val="0F1B2D"/>
-                </a:solidFill>
-                <a:latin typeface="Calibri" pitchFamily="34" charset="0"/>
-                <a:ea typeface="Calibri" pitchFamily="34" charset="-122"/>
-                <a:cs typeface="Calibri" pitchFamily="34" charset="-120"/>
-              </a:rPr>
-              <a:t> </a:t>
-            </a:r>
-            <a:r>
-              <a:rPr lang="en-US" sz="1200" dirty="0" err="1">
-                <a:solidFill>
-                  <a:srgbClr val="0F1B2D"/>
-                </a:solidFill>
+                <a:latin typeface="Calibri" pitchFamily="34" charset="0"/>
+                <a:ea typeface="Calibri" pitchFamily="34" charset="-122"/>
+                <a:cs typeface="Calibri" pitchFamily="34" charset="-120"/>
+              </a:rPr>
+              <a:t> </a:t>
+            </a:r>
+            <a:r>
+              <a:rPr lang="en-US" sz="1200" dirty="0" err="1">
                 <a:latin typeface="Calibri" pitchFamily="34" charset="0"/>
                 <a:ea typeface="Calibri" pitchFamily="34" charset="-122"/>
                 <a:cs typeface="Calibri" pitchFamily="34" charset="-120"/>
@@ -10133,20 +9831,14 @@
             </a:r>
             <a:r>
               <a:rPr lang="en-US" sz="1200" dirty="0">
-                <a:solidFill>
-                  <a:srgbClr val="0F1B2D"/>
-                </a:solidFill>
-                <a:latin typeface="Calibri" pitchFamily="34" charset="0"/>
-                <a:ea typeface="Calibri" pitchFamily="34" charset="-122"/>
-                <a:cs typeface="Calibri" pitchFamily="34" charset="-120"/>
-              </a:rPr>
-              <a:t> </a:t>
-            </a:r>
-            <a:r>
-              <a:rPr lang="en-US" sz="1200" dirty="0" err="1">
-                <a:solidFill>
-                  <a:srgbClr val="0F1B2D"/>
-                </a:solidFill>
+                <a:latin typeface="Calibri" pitchFamily="34" charset="0"/>
+                <a:ea typeface="Calibri" pitchFamily="34" charset="-122"/>
+                <a:cs typeface="Calibri" pitchFamily="34" charset="-120"/>
+              </a:rPr>
+              <a:t> </a:t>
+            </a:r>
+            <a:r>
+              <a:rPr lang="en-US" sz="1200" dirty="0" err="1">
                 <a:latin typeface="Calibri" pitchFamily="34" charset="0"/>
                 <a:ea typeface="Calibri" pitchFamily="34" charset="-122"/>
                 <a:cs typeface="Calibri" pitchFamily="34" charset="-120"/>
@@ -10155,9 +9847,6 @@
             </a:r>
             <a:r>
               <a:rPr lang="en-US" sz="1200" dirty="0">
-                <a:solidFill>
-                  <a:srgbClr val="0F1B2D"/>
-                </a:solidFill>
                 <a:latin typeface="Calibri" pitchFamily="34" charset="0"/>
                 <a:ea typeface="Calibri" pitchFamily="34" charset="-122"/>
                 <a:cs typeface="Calibri" pitchFamily="34" charset="-120"/>
@@ -10166,9 +9855,6 @@
             </a:r>
             <a:r>
               <a:rPr lang="en-US" sz="1200" dirty="0" err="1">
-                <a:solidFill>
-                  <a:srgbClr val="0F1B2D"/>
-                </a:solidFill>
                 <a:latin typeface="Calibri" pitchFamily="34" charset="0"/>
                 <a:ea typeface="Calibri" pitchFamily="34" charset="-122"/>
                 <a:cs typeface="Calibri" pitchFamily="34" charset="-120"/>
@@ -10177,20 +9863,14 @@
             </a:r>
             <a:r>
               <a:rPr lang="en-US" sz="1200" dirty="0">
-                <a:solidFill>
-                  <a:srgbClr val="0F1B2D"/>
-                </a:solidFill>
-                <a:latin typeface="Calibri" pitchFamily="34" charset="0"/>
-                <a:ea typeface="Calibri" pitchFamily="34" charset="-122"/>
-                <a:cs typeface="Calibri" pitchFamily="34" charset="-120"/>
-              </a:rPr>
-              <a:t> </a:t>
-            </a:r>
-            <a:r>
-              <a:rPr lang="en-US" sz="1200" dirty="0" err="1">
-                <a:solidFill>
-                  <a:srgbClr val="0F1B2D"/>
-                </a:solidFill>
+                <a:latin typeface="Calibri" pitchFamily="34" charset="0"/>
+                <a:ea typeface="Calibri" pitchFamily="34" charset="-122"/>
+                <a:cs typeface="Calibri" pitchFamily="34" charset="-120"/>
+              </a:rPr>
+              <a:t> </a:t>
+            </a:r>
+            <a:r>
+              <a:rPr lang="en-US" sz="1200" dirty="0" err="1">
                 <a:latin typeface="Calibri" pitchFamily="34" charset="0"/>
                 <a:ea typeface="Calibri" pitchFamily="34" charset="-122"/>
                 <a:cs typeface="Calibri" pitchFamily="34" charset="-120"/>
@@ -10199,9 +9879,6 @@
             </a:r>
             <a:r>
               <a:rPr lang="en-US" sz="1200" dirty="0">
-                <a:solidFill>
-                  <a:srgbClr val="0F1B2D"/>
-                </a:solidFill>
                 <a:latin typeface="Calibri" pitchFamily="34" charset="0"/>
                 <a:ea typeface="Calibri" pitchFamily="34" charset="-122"/>
                 <a:cs typeface="Calibri" pitchFamily="34" charset="-120"/>
@@ -10210,9 +9887,6 @@
             </a:r>
             <a:r>
               <a:rPr lang="en-US" sz="1200" dirty="0" err="1">
-                <a:solidFill>
-                  <a:srgbClr val="0F1B2D"/>
-                </a:solidFill>
                 <a:latin typeface="Calibri" pitchFamily="34" charset="0"/>
                 <a:ea typeface="Calibri" pitchFamily="34" charset="-122"/>
                 <a:cs typeface="Calibri" pitchFamily="34" charset="-120"/>
@@ -10221,20 +9895,14 @@
             </a:r>
             <a:r>
               <a:rPr lang="en-US" sz="1200" dirty="0">
-                <a:solidFill>
-                  <a:srgbClr val="0F1B2D"/>
-                </a:solidFill>
-                <a:latin typeface="Calibri" pitchFamily="34" charset="0"/>
-                <a:ea typeface="Calibri" pitchFamily="34" charset="-122"/>
-                <a:cs typeface="Calibri" pitchFamily="34" charset="-120"/>
-              </a:rPr>
-              <a:t> </a:t>
-            </a:r>
-            <a:r>
-              <a:rPr lang="en-US" sz="1200" dirty="0" err="1">
-                <a:solidFill>
-                  <a:srgbClr val="0F1B2D"/>
-                </a:solidFill>
+                <a:latin typeface="Calibri" pitchFamily="34" charset="0"/>
+                <a:ea typeface="Calibri" pitchFamily="34" charset="-122"/>
+                <a:cs typeface="Calibri" pitchFamily="34" charset="-120"/>
+              </a:rPr>
+              <a:t> </a:t>
+            </a:r>
+            <a:r>
+              <a:rPr lang="en-US" sz="1200" dirty="0" err="1">
                 <a:latin typeface="Calibri" pitchFamily="34" charset="0"/>
                 <a:ea typeface="Calibri" pitchFamily="34" charset="-122"/>
                 <a:cs typeface="Calibri" pitchFamily="34" charset="-120"/>
@@ -10243,20 +9911,14 @@
             </a:r>
             <a:r>
               <a:rPr lang="en-US" sz="1200" dirty="0">
-                <a:solidFill>
-                  <a:srgbClr val="0F1B2D"/>
-                </a:solidFill>
-                <a:latin typeface="Calibri" pitchFamily="34" charset="0"/>
-                <a:ea typeface="Calibri" pitchFamily="34" charset="-122"/>
-                <a:cs typeface="Calibri" pitchFamily="34" charset="-120"/>
-              </a:rPr>
-              <a:t> </a:t>
-            </a:r>
-            <a:r>
-              <a:rPr lang="en-US" sz="1200" dirty="0" err="1">
-                <a:solidFill>
-                  <a:srgbClr val="0F1B2D"/>
-                </a:solidFill>
+                <a:latin typeface="Calibri" pitchFamily="34" charset="0"/>
+                <a:ea typeface="Calibri" pitchFamily="34" charset="-122"/>
+                <a:cs typeface="Calibri" pitchFamily="34" charset="-120"/>
+              </a:rPr>
+              <a:t> </a:t>
+            </a:r>
+            <a:r>
+              <a:rPr lang="en-US" sz="1200" dirty="0" err="1">
                 <a:latin typeface="Calibri" pitchFamily="34" charset="0"/>
                 <a:ea typeface="Calibri" pitchFamily="34" charset="-122"/>
                 <a:cs typeface="Calibri" pitchFamily="34" charset="-120"/>
@@ -10265,20 +9927,14 @@
             </a:r>
             <a:r>
               <a:rPr lang="en-US" sz="1200" dirty="0">
-                <a:solidFill>
-                  <a:srgbClr val="0F1B2D"/>
-                </a:solidFill>
-                <a:latin typeface="Calibri" pitchFamily="34" charset="0"/>
-                <a:ea typeface="Calibri" pitchFamily="34" charset="-122"/>
-                <a:cs typeface="Calibri" pitchFamily="34" charset="-120"/>
-              </a:rPr>
-              <a:t> </a:t>
-            </a:r>
-            <a:r>
-              <a:rPr lang="en-US" sz="1200" dirty="0" err="1">
-                <a:solidFill>
-                  <a:srgbClr val="0F1B2D"/>
-                </a:solidFill>
+                <a:latin typeface="Calibri" pitchFamily="34" charset="0"/>
+                <a:ea typeface="Calibri" pitchFamily="34" charset="-122"/>
+                <a:cs typeface="Calibri" pitchFamily="34" charset="-120"/>
+              </a:rPr>
+              <a:t> </a:t>
+            </a:r>
+            <a:r>
+              <a:rPr lang="en-US" sz="1200" dirty="0" err="1">
                 <a:latin typeface="Calibri" pitchFamily="34" charset="0"/>
                 <a:ea typeface="Calibri" pitchFamily="34" charset="-122"/>
                 <a:cs typeface="Calibri" pitchFamily="34" charset="-120"/>
@@ -10287,20 +9943,14 @@
             </a:r>
             <a:r>
               <a:rPr lang="en-US" sz="1200" dirty="0">
-                <a:solidFill>
-                  <a:srgbClr val="0F1B2D"/>
-                </a:solidFill>
-                <a:latin typeface="Calibri" pitchFamily="34" charset="0"/>
-                <a:ea typeface="Calibri" pitchFamily="34" charset="-122"/>
-                <a:cs typeface="Calibri" pitchFamily="34" charset="-120"/>
-              </a:rPr>
-              <a:t> </a:t>
-            </a:r>
-            <a:r>
-              <a:rPr lang="en-US" sz="1200" dirty="0" err="1">
-                <a:solidFill>
-                  <a:srgbClr val="0F1B2D"/>
-                </a:solidFill>
+                <a:latin typeface="Calibri" pitchFamily="34" charset="0"/>
+                <a:ea typeface="Calibri" pitchFamily="34" charset="-122"/>
+                <a:cs typeface="Calibri" pitchFamily="34" charset="-120"/>
+              </a:rPr>
+              <a:t> </a:t>
+            </a:r>
+            <a:r>
+              <a:rPr lang="en-US" sz="1200" dirty="0" err="1">
                 <a:latin typeface="Calibri" pitchFamily="34" charset="0"/>
                 <a:ea typeface="Calibri" pitchFamily="34" charset="-122"/>
                 <a:cs typeface="Calibri" pitchFamily="34" charset="-120"/>
@@ -10309,9 +9959,6 @@
             </a:r>
             <a:r>
               <a:rPr lang="en-US" sz="1200" dirty="0">
-                <a:solidFill>
-                  <a:srgbClr val="0F1B2D"/>
-                </a:solidFill>
                 <a:latin typeface="Calibri" pitchFamily="34" charset="0"/>
                 <a:ea typeface="Calibri" pitchFamily="34" charset="-122"/>
                 <a:cs typeface="Calibri" pitchFamily="34" charset="-120"/>
@@ -10320,9 +9967,6 @@
             </a:r>
             <a:r>
               <a:rPr lang="en-US" sz="1200" dirty="0" err="1">
-                <a:solidFill>
-                  <a:srgbClr val="0F1B2D"/>
-                </a:solidFill>
                 <a:latin typeface="Calibri" pitchFamily="34" charset="0"/>
                 <a:ea typeface="Calibri" pitchFamily="34" charset="-122"/>
                 <a:cs typeface="Calibri" pitchFamily="34" charset="-120"/>
@@ -10331,9 +9975,6 @@
             </a:r>
             <a:r>
               <a:rPr lang="en-US" sz="1200" dirty="0">
-                <a:solidFill>
-                  <a:srgbClr val="0F1B2D"/>
-                </a:solidFill>
                 <a:latin typeface="Calibri" pitchFamily="34" charset="0"/>
                 <a:ea typeface="Calibri" pitchFamily="34" charset="-122"/>
                 <a:cs typeface="Calibri" pitchFamily="34" charset="-120"/>
@@ -10537,9 +10178,6 @@
             </a:pPr>
             <a:r>
               <a:rPr lang="en-US" sz="1200" dirty="0" err="1">
-                <a:solidFill>
-                  <a:srgbClr val="0F1B2D"/>
-                </a:solidFill>
                 <a:latin typeface="Calibri" pitchFamily="34" charset="0"/>
                 <a:ea typeface="Calibri" pitchFamily="34" charset="-122"/>
                 <a:cs typeface="Calibri" pitchFamily="34" charset="-120"/>
@@ -10548,20 +10186,14 @@
             </a:r>
             <a:r>
               <a:rPr lang="en-US" sz="1200" dirty="0">
-                <a:solidFill>
-                  <a:srgbClr val="0F1B2D"/>
-                </a:solidFill>
-                <a:latin typeface="Calibri" pitchFamily="34" charset="0"/>
-                <a:ea typeface="Calibri" pitchFamily="34" charset="-122"/>
-                <a:cs typeface="Calibri" pitchFamily="34" charset="-120"/>
-              </a:rPr>
-              <a:t> </a:t>
-            </a:r>
-            <a:r>
-              <a:rPr lang="en-US" sz="1200" dirty="0" err="1">
-                <a:solidFill>
-                  <a:srgbClr val="0F1B2D"/>
-                </a:solidFill>
+                <a:latin typeface="Calibri" pitchFamily="34" charset="0"/>
+                <a:ea typeface="Calibri" pitchFamily="34" charset="-122"/>
+                <a:cs typeface="Calibri" pitchFamily="34" charset="-120"/>
+              </a:rPr>
+              <a:t> </a:t>
+            </a:r>
+            <a:r>
+              <a:rPr lang="en-US" sz="1200" dirty="0" err="1">
                 <a:latin typeface="Calibri" pitchFamily="34" charset="0"/>
                 <a:ea typeface="Calibri" pitchFamily="34" charset="-122"/>
                 <a:cs typeface="Calibri" pitchFamily="34" charset="-120"/>
@@ -10570,20 +10202,14 @@
             </a:r>
             <a:r>
               <a:rPr lang="en-US" sz="1200" dirty="0">
-                <a:solidFill>
-                  <a:srgbClr val="0F1B2D"/>
-                </a:solidFill>
-                <a:latin typeface="Calibri" pitchFamily="34" charset="0"/>
-                <a:ea typeface="Calibri" pitchFamily="34" charset="-122"/>
-                <a:cs typeface="Calibri" pitchFamily="34" charset="-120"/>
-              </a:rPr>
-              <a:t> </a:t>
-            </a:r>
-            <a:r>
-              <a:rPr lang="en-US" sz="1200" dirty="0" err="1">
-                <a:solidFill>
-                  <a:srgbClr val="0F1B2D"/>
-                </a:solidFill>
+                <a:latin typeface="Calibri" pitchFamily="34" charset="0"/>
+                <a:ea typeface="Calibri" pitchFamily="34" charset="-122"/>
+                <a:cs typeface="Calibri" pitchFamily="34" charset="-120"/>
+              </a:rPr>
+              <a:t> </a:t>
+            </a:r>
+            <a:r>
+              <a:rPr lang="en-US" sz="1200" dirty="0" err="1">
                 <a:latin typeface="Calibri" pitchFamily="34" charset="0"/>
                 <a:ea typeface="Calibri" pitchFamily="34" charset="-122"/>
                 <a:cs typeface="Calibri" pitchFamily="34" charset="-120"/>
@@ -10592,9 +10218,6 @@
             </a:r>
             <a:r>
               <a:rPr lang="en-US" sz="1200" dirty="0">
-                <a:solidFill>
-                  <a:srgbClr val="0F1B2D"/>
-                </a:solidFill>
                 <a:latin typeface="Calibri" pitchFamily="34" charset="0"/>
                 <a:ea typeface="Calibri" pitchFamily="34" charset="-122"/>
                 <a:cs typeface="Calibri" pitchFamily="34" charset="-120"/>
@@ -10603,9 +10226,6 @@
             </a:r>
             <a:r>
               <a:rPr lang="en-US" sz="1200" dirty="0" err="1">
-                <a:solidFill>
-                  <a:srgbClr val="0F1B2D"/>
-                </a:solidFill>
                 <a:latin typeface="Calibri" pitchFamily="34" charset="0"/>
                 <a:ea typeface="Calibri" pitchFamily="34" charset="-122"/>
                 <a:cs typeface="Calibri" pitchFamily="34" charset="-120"/>
@@ -10614,9 +10234,6 @@
             </a:r>
             <a:r>
               <a:rPr lang="en-US" sz="1200" dirty="0">
-                <a:solidFill>
-                  <a:srgbClr val="0F1B2D"/>
-                </a:solidFill>
                 <a:latin typeface="Calibri" pitchFamily="34" charset="0"/>
                 <a:ea typeface="Calibri" pitchFamily="34" charset="-122"/>
                 <a:cs typeface="Calibri" pitchFamily="34" charset="-120"/>
@@ -10625,9 +10242,6 @@
             </a:r>
             <a:r>
               <a:rPr lang="en-US" sz="1200" dirty="0" err="1">
-                <a:solidFill>
-                  <a:srgbClr val="0F1B2D"/>
-                </a:solidFill>
                 <a:latin typeface="Calibri" pitchFamily="34" charset="0"/>
                 <a:ea typeface="Calibri" pitchFamily="34" charset="-122"/>
                 <a:cs typeface="Calibri" pitchFamily="34" charset="-120"/>
@@ -10636,9 +10250,6 @@
             </a:r>
             <a:r>
               <a:rPr lang="en-US" sz="1200" dirty="0">
-                <a:solidFill>
-                  <a:srgbClr val="0F1B2D"/>
-                </a:solidFill>
                 <a:latin typeface="Calibri" pitchFamily="34" charset="0"/>
                 <a:ea typeface="Calibri" pitchFamily="34" charset="-122"/>
                 <a:cs typeface="Calibri" pitchFamily="34" charset="-120"/>
@@ -10647,9 +10258,6 @@
             </a:r>
             <a:r>
               <a:rPr lang="en-US" sz="1200" dirty="0" err="1">
-                <a:solidFill>
-                  <a:srgbClr val="0F1B2D"/>
-                </a:solidFill>
                 <a:latin typeface="Calibri" pitchFamily="34" charset="0"/>
                 <a:ea typeface="Calibri" pitchFamily="34" charset="-122"/>
                 <a:cs typeface="Calibri" pitchFamily="34" charset="-120"/>
@@ -10658,20 +10266,14 @@
             </a:r>
             <a:r>
               <a:rPr lang="en-US" sz="1200" dirty="0">
-                <a:solidFill>
-                  <a:srgbClr val="0F1B2D"/>
-                </a:solidFill>
-                <a:latin typeface="Calibri" pitchFamily="34" charset="0"/>
-                <a:ea typeface="Calibri" pitchFamily="34" charset="-122"/>
-                <a:cs typeface="Calibri" pitchFamily="34" charset="-120"/>
-              </a:rPr>
-              <a:t> </a:t>
-            </a:r>
-            <a:r>
-              <a:rPr lang="en-US" sz="1200" dirty="0" err="1">
-                <a:solidFill>
-                  <a:srgbClr val="0F1B2D"/>
-                </a:solidFill>
+                <a:latin typeface="Calibri" pitchFamily="34" charset="0"/>
+                <a:ea typeface="Calibri" pitchFamily="34" charset="-122"/>
+                <a:cs typeface="Calibri" pitchFamily="34" charset="-120"/>
+              </a:rPr>
+              <a:t> </a:t>
+            </a:r>
+            <a:r>
+              <a:rPr lang="en-US" sz="1200" dirty="0" err="1">
                 <a:latin typeface="Calibri" pitchFamily="34" charset="0"/>
                 <a:ea typeface="Calibri" pitchFamily="34" charset="-122"/>
                 <a:cs typeface="Calibri" pitchFamily="34" charset="-120"/>
@@ -10680,20 +10282,14 @@
             </a:r>
             <a:r>
               <a:rPr lang="en-US" sz="1200" dirty="0">
-                <a:solidFill>
-                  <a:srgbClr val="0F1B2D"/>
-                </a:solidFill>
-                <a:latin typeface="Calibri" pitchFamily="34" charset="0"/>
-                <a:ea typeface="Calibri" pitchFamily="34" charset="-122"/>
-                <a:cs typeface="Calibri" pitchFamily="34" charset="-120"/>
-              </a:rPr>
-              <a:t> </a:t>
-            </a:r>
-            <a:r>
-              <a:rPr lang="en-US" sz="1200" dirty="0" err="1">
-                <a:solidFill>
-                  <a:srgbClr val="0F1B2D"/>
-                </a:solidFill>
+                <a:latin typeface="Calibri" pitchFamily="34" charset="0"/>
+                <a:ea typeface="Calibri" pitchFamily="34" charset="-122"/>
+                <a:cs typeface="Calibri" pitchFamily="34" charset="-120"/>
+              </a:rPr>
+              <a:t> </a:t>
+            </a:r>
+            <a:r>
+              <a:rPr lang="en-US" sz="1200" dirty="0" err="1">
                 <a:latin typeface="Calibri" pitchFamily="34" charset="0"/>
                 <a:ea typeface="Calibri" pitchFamily="34" charset="-122"/>
                 <a:cs typeface="Calibri" pitchFamily="34" charset="-120"/>
@@ -10702,20 +10298,14 @@
             </a:r>
             <a:r>
               <a:rPr lang="en-US" sz="1200" dirty="0">
-                <a:solidFill>
-                  <a:srgbClr val="0F1B2D"/>
-                </a:solidFill>
-                <a:latin typeface="Calibri" pitchFamily="34" charset="0"/>
-                <a:ea typeface="Calibri" pitchFamily="34" charset="-122"/>
-                <a:cs typeface="Calibri" pitchFamily="34" charset="-120"/>
-              </a:rPr>
-              <a:t> </a:t>
-            </a:r>
-            <a:r>
-              <a:rPr lang="en-US" sz="1200" dirty="0" err="1">
-                <a:solidFill>
-                  <a:srgbClr val="0F1B2D"/>
-                </a:solidFill>
+                <a:latin typeface="Calibri" pitchFamily="34" charset="0"/>
+                <a:ea typeface="Calibri" pitchFamily="34" charset="-122"/>
+                <a:cs typeface="Calibri" pitchFamily="34" charset="-120"/>
+              </a:rPr>
+              <a:t> </a:t>
+            </a:r>
+            <a:r>
+              <a:rPr lang="en-US" sz="1200" dirty="0" err="1">
                 <a:latin typeface="Calibri" pitchFamily="34" charset="0"/>
                 <a:ea typeface="Calibri" pitchFamily="34" charset="-122"/>
                 <a:cs typeface="Calibri" pitchFamily="34" charset="-120"/>
@@ -10724,9 +10314,6 @@
             </a:r>
             <a:r>
               <a:rPr lang="en-US" sz="1200" dirty="0">
-                <a:solidFill>
-                  <a:srgbClr val="0F1B2D"/>
-                </a:solidFill>
                 <a:latin typeface="Calibri" pitchFamily="34" charset="0"/>
                 <a:ea typeface="Calibri" pitchFamily="34" charset="-122"/>
                 <a:cs typeface="Calibri" pitchFamily="34" charset="-120"/>
@@ -10735,9 +10322,6 @@
             </a:r>
             <a:r>
               <a:rPr lang="en-US" sz="1200" dirty="0" err="1">
-                <a:solidFill>
-                  <a:srgbClr val="0F1B2D"/>
-                </a:solidFill>
                 <a:latin typeface="Calibri" pitchFamily="34" charset="0"/>
                 <a:ea typeface="Calibri" pitchFamily="34" charset="-122"/>
                 <a:cs typeface="Calibri" pitchFamily="34" charset="-120"/>
@@ -10746,9 +10330,6 @@
             </a:r>
             <a:r>
               <a:rPr lang="en-US" sz="1200" dirty="0">
-                <a:solidFill>
-                  <a:srgbClr val="0F1B2D"/>
-                </a:solidFill>
                 <a:latin typeface="Calibri" pitchFamily="34" charset="0"/>
                 <a:ea typeface="Calibri" pitchFamily="34" charset="-122"/>
                 <a:cs typeface="Calibri" pitchFamily="34" charset="-120"/>
@@ -10757,9 +10338,6 @@
             </a:r>
             <a:r>
               <a:rPr lang="en-US" sz="1200" dirty="0" err="1">
-                <a:solidFill>
-                  <a:srgbClr val="0F1B2D"/>
-                </a:solidFill>
                 <a:latin typeface="Calibri" pitchFamily="34" charset="0"/>
                 <a:ea typeface="Calibri" pitchFamily="34" charset="-122"/>
                 <a:cs typeface="Calibri" pitchFamily="34" charset="-120"/>
@@ -10768,20 +10346,14 @@
             </a:r>
             <a:r>
               <a:rPr lang="en-US" sz="1200" dirty="0">
-                <a:solidFill>
-                  <a:srgbClr val="0F1B2D"/>
-                </a:solidFill>
-                <a:latin typeface="Calibri" pitchFamily="34" charset="0"/>
-                <a:ea typeface="Calibri" pitchFamily="34" charset="-122"/>
-                <a:cs typeface="Calibri" pitchFamily="34" charset="-120"/>
-              </a:rPr>
-              <a:t> </a:t>
-            </a:r>
-            <a:r>
-              <a:rPr lang="en-US" sz="1200" dirty="0" err="1">
-                <a:solidFill>
-                  <a:srgbClr val="0F1B2D"/>
-                </a:solidFill>
+                <a:latin typeface="Calibri" pitchFamily="34" charset="0"/>
+                <a:ea typeface="Calibri" pitchFamily="34" charset="-122"/>
+                <a:cs typeface="Calibri" pitchFamily="34" charset="-120"/>
+              </a:rPr>
+              <a:t> </a:t>
+            </a:r>
+            <a:r>
+              <a:rPr lang="en-US" sz="1200" dirty="0" err="1">
                 <a:latin typeface="Calibri" pitchFamily="34" charset="0"/>
                 <a:ea typeface="Calibri" pitchFamily="34" charset="-122"/>
                 <a:cs typeface="Calibri" pitchFamily="34" charset="-120"/>
@@ -10790,20 +10362,14 @@
             </a:r>
             <a:r>
               <a:rPr lang="en-US" sz="1200" dirty="0">
-                <a:solidFill>
-                  <a:srgbClr val="0F1B2D"/>
-                </a:solidFill>
-                <a:latin typeface="Calibri" pitchFamily="34" charset="0"/>
-                <a:ea typeface="Calibri" pitchFamily="34" charset="-122"/>
-                <a:cs typeface="Calibri" pitchFamily="34" charset="-120"/>
-              </a:rPr>
-              <a:t> </a:t>
-            </a:r>
-            <a:r>
-              <a:rPr lang="en-US" sz="1200" dirty="0" err="1">
-                <a:solidFill>
-                  <a:srgbClr val="0F1B2D"/>
-                </a:solidFill>
+                <a:latin typeface="Calibri" pitchFamily="34" charset="0"/>
+                <a:ea typeface="Calibri" pitchFamily="34" charset="-122"/>
+                <a:cs typeface="Calibri" pitchFamily="34" charset="-120"/>
+              </a:rPr>
+              <a:t> </a:t>
+            </a:r>
+            <a:r>
+              <a:rPr lang="en-US" sz="1200" dirty="0" err="1">
                 <a:latin typeface="Calibri" pitchFamily="34" charset="0"/>
                 <a:ea typeface="Calibri" pitchFamily="34" charset="-122"/>
                 <a:cs typeface="Calibri" pitchFamily="34" charset="-120"/>
@@ -10812,9 +10378,6 @@
             </a:r>
             <a:r>
               <a:rPr lang="en-US" sz="1200" dirty="0">
-                <a:solidFill>
-                  <a:srgbClr val="0F1B2D"/>
-                </a:solidFill>
                 <a:latin typeface="Calibri" pitchFamily="34" charset="0"/>
                 <a:ea typeface="Calibri" pitchFamily="34" charset="-122"/>
                 <a:cs typeface="Calibri" pitchFamily="34" charset="-120"/>
@@ -10823,9 +10386,6 @@
             </a:r>
             <a:r>
               <a:rPr lang="en-US" sz="1200" dirty="0" err="1">
-                <a:solidFill>
-                  <a:srgbClr val="0F1B2D"/>
-                </a:solidFill>
                 <a:latin typeface="Calibri" pitchFamily="34" charset="0"/>
                 <a:ea typeface="Calibri" pitchFamily="34" charset="-122"/>
                 <a:cs typeface="Calibri" pitchFamily="34" charset="-120"/>
@@ -10834,20 +10394,14 @@
             </a:r>
             <a:r>
               <a:rPr lang="en-US" sz="1200" dirty="0">
-                <a:solidFill>
-                  <a:srgbClr val="0F1B2D"/>
-                </a:solidFill>
-                <a:latin typeface="Calibri" pitchFamily="34" charset="0"/>
-                <a:ea typeface="Calibri" pitchFamily="34" charset="-122"/>
-                <a:cs typeface="Calibri" pitchFamily="34" charset="-120"/>
-              </a:rPr>
-              <a:t> </a:t>
-            </a:r>
-            <a:r>
-              <a:rPr lang="en-US" sz="1200" dirty="0" err="1">
-                <a:solidFill>
-                  <a:srgbClr val="0F1B2D"/>
-                </a:solidFill>
+                <a:latin typeface="Calibri" pitchFamily="34" charset="0"/>
+                <a:ea typeface="Calibri" pitchFamily="34" charset="-122"/>
+                <a:cs typeface="Calibri" pitchFamily="34" charset="-120"/>
+              </a:rPr>
+              <a:t> </a:t>
+            </a:r>
+            <a:r>
+              <a:rPr lang="en-US" sz="1200" dirty="0" err="1">
                 <a:latin typeface="Calibri" pitchFamily="34" charset="0"/>
                 <a:ea typeface="Calibri" pitchFamily="34" charset="-122"/>
                 <a:cs typeface="Calibri" pitchFamily="34" charset="-120"/>
@@ -10856,20 +10410,14 @@
             </a:r>
             <a:r>
               <a:rPr lang="en-US" sz="1200" dirty="0">
-                <a:solidFill>
-                  <a:srgbClr val="0F1B2D"/>
-                </a:solidFill>
-                <a:latin typeface="Calibri" pitchFamily="34" charset="0"/>
-                <a:ea typeface="Calibri" pitchFamily="34" charset="-122"/>
-                <a:cs typeface="Calibri" pitchFamily="34" charset="-120"/>
-              </a:rPr>
-              <a:t> </a:t>
-            </a:r>
-            <a:r>
-              <a:rPr lang="en-US" sz="1200" dirty="0" err="1">
-                <a:solidFill>
-                  <a:srgbClr val="0F1B2D"/>
-                </a:solidFill>
+                <a:latin typeface="Calibri" pitchFamily="34" charset="0"/>
+                <a:ea typeface="Calibri" pitchFamily="34" charset="-122"/>
+                <a:cs typeface="Calibri" pitchFamily="34" charset="-120"/>
+              </a:rPr>
+              <a:t> </a:t>
+            </a:r>
+            <a:r>
+              <a:rPr lang="en-US" sz="1200" dirty="0" err="1">
                 <a:latin typeface="Calibri" pitchFamily="34" charset="0"/>
                 <a:ea typeface="Calibri" pitchFamily="34" charset="-122"/>
                 <a:cs typeface="Calibri" pitchFamily="34" charset="-120"/>
@@ -10878,9 +10426,6 @@
             </a:r>
             <a:r>
               <a:rPr lang="en-US" sz="1200" dirty="0">
-                <a:solidFill>
-                  <a:srgbClr val="0F1B2D"/>
-                </a:solidFill>
                 <a:latin typeface="Calibri" pitchFamily="34" charset="0"/>
                 <a:ea typeface="Calibri" pitchFamily="34" charset="-122"/>
                 <a:cs typeface="Calibri" pitchFamily="34" charset="-120"/>
@@ -10889,9 +10434,6 @@
             </a:r>
             <a:r>
               <a:rPr lang="en-US" sz="1200" dirty="0" err="1">
-                <a:solidFill>
-                  <a:srgbClr val="0F1B2D"/>
-                </a:solidFill>
                 <a:latin typeface="Calibri" pitchFamily="34" charset="0"/>
                 <a:ea typeface="Calibri" pitchFamily="34" charset="-122"/>
                 <a:cs typeface="Calibri" pitchFamily="34" charset="-120"/>
@@ -10900,20 +10442,14 @@
             </a:r>
             <a:r>
               <a:rPr lang="en-US" sz="1200" dirty="0">
-                <a:solidFill>
-                  <a:srgbClr val="0F1B2D"/>
-                </a:solidFill>
-                <a:latin typeface="Calibri" pitchFamily="34" charset="0"/>
-                <a:ea typeface="Calibri" pitchFamily="34" charset="-122"/>
-                <a:cs typeface="Calibri" pitchFamily="34" charset="-120"/>
-              </a:rPr>
-              <a:t> </a:t>
-            </a:r>
-            <a:r>
-              <a:rPr lang="en-US" sz="1200" dirty="0" err="1">
-                <a:solidFill>
-                  <a:srgbClr val="0F1B2D"/>
-                </a:solidFill>
+                <a:latin typeface="Calibri" pitchFamily="34" charset="0"/>
+                <a:ea typeface="Calibri" pitchFamily="34" charset="-122"/>
+                <a:cs typeface="Calibri" pitchFamily="34" charset="-120"/>
+              </a:rPr>
+              <a:t> </a:t>
+            </a:r>
+            <a:r>
+              <a:rPr lang="en-US" sz="1200" dirty="0" err="1">
                 <a:latin typeface="Calibri" pitchFamily="34" charset="0"/>
                 <a:ea typeface="Calibri" pitchFamily="34" charset="-122"/>
                 <a:cs typeface="Calibri" pitchFamily="34" charset="-120"/>
@@ -10922,9 +10458,6 @@
             </a:r>
             <a:r>
               <a:rPr lang="en-US" sz="1200" dirty="0">
-                <a:solidFill>
-                  <a:srgbClr val="0F1B2D"/>
-                </a:solidFill>
                 <a:latin typeface="Calibri" pitchFamily="34" charset="0"/>
                 <a:ea typeface="Calibri" pitchFamily="34" charset="-122"/>
                 <a:cs typeface="Calibri" pitchFamily="34" charset="-120"/>
@@ -10933,9 +10466,6 @@
             </a:r>
             <a:r>
               <a:rPr lang="en-US" sz="1200" dirty="0" err="1">
-                <a:solidFill>
-                  <a:srgbClr val="0F1B2D"/>
-                </a:solidFill>
                 <a:latin typeface="Calibri" pitchFamily="34" charset="0"/>
                 <a:ea typeface="Calibri" pitchFamily="34" charset="-122"/>
                 <a:cs typeface="Calibri" pitchFamily="34" charset="-120"/>
@@ -10944,9 +10474,6 @@
             </a:r>
             <a:r>
               <a:rPr lang="en-US" sz="1200" dirty="0">
-                <a:solidFill>
-                  <a:srgbClr val="0F1B2D"/>
-                </a:solidFill>
                 <a:latin typeface="Calibri" pitchFamily="34" charset="0"/>
                 <a:ea typeface="Calibri" pitchFamily="34" charset="-122"/>
                 <a:cs typeface="Calibri" pitchFamily="34" charset="-120"/>
@@ -10955,9 +10482,6 @@
             </a:r>
             <a:r>
               <a:rPr lang="en-US" sz="1200" dirty="0" err="1">
-                <a:solidFill>
-                  <a:srgbClr val="0F1B2D"/>
-                </a:solidFill>
                 <a:latin typeface="Calibri" pitchFamily="34" charset="0"/>
                 <a:ea typeface="Calibri" pitchFamily="34" charset="-122"/>
                 <a:cs typeface="Calibri" pitchFamily="34" charset="-120"/>
@@ -10966,9 +10490,6 @@
             </a:r>
             <a:r>
               <a:rPr lang="en-US" sz="1200" dirty="0">
-                <a:solidFill>
-                  <a:srgbClr val="0F1B2D"/>
-                </a:solidFill>
                 <a:latin typeface="Calibri" pitchFamily="34" charset="0"/>
                 <a:ea typeface="Calibri" pitchFamily="34" charset="-122"/>
                 <a:cs typeface="Calibri" pitchFamily="34" charset="-120"/>
@@ -10977,9 +10498,6 @@
             </a:r>
             <a:r>
               <a:rPr lang="en-US" sz="1200" dirty="0" err="1">
-                <a:solidFill>
-                  <a:srgbClr val="0F1B2D"/>
-                </a:solidFill>
                 <a:latin typeface="Calibri" pitchFamily="34" charset="0"/>
                 <a:ea typeface="Calibri" pitchFamily="34" charset="-122"/>
                 <a:cs typeface="Calibri" pitchFamily="34" charset="-120"/>
@@ -10988,20 +10506,14 @@
             </a:r>
             <a:r>
               <a:rPr lang="en-US" sz="1200" dirty="0">
-                <a:solidFill>
-                  <a:srgbClr val="0F1B2D"/>
-                </a:solidFill>
-                <a:latin typeface="Calibri" pitchFamily="34" charset="0"/>
-                <a:ea typeface="Calibri" pitchFamily="34" charset="-122"/>
-                <a:cs typeface="Calibri" pitchFamily="34" charset="-120"/>
-              </a:rPr>
-              <a:t> </a:t>
-            </a:r>
-            <a:r>
-              <a:rPr lang="en-US" sz="1200" dirty="0" err="1">
-                <a:solidFill>
-                  <a:srgbClr val="0F1B2D"/>
-                </a:solidFill>
+                <a:latin typeface="Calibri" pitchFamily="34" charset="0"/>
+                <a:ea typeface="Calibri" pitchFamily="34" charset="-122"/>
+                <a:cs typeface="Calibri" pitchFamily="34" charset="-120"/>
+              </a:rPr>
+              <a:t> </a:t>
+            </a:r>
+            <a:r>
+              <a:rPr lang="en-US" sz="1200" dirty="0" err="1">
                 <a:latin typeface="Calibri" pitchFamily="34" charset="0"/>
                 <a:ea typeface="Calibri" pitchFamily="34" charset="-122"/>
                 <a:cs typeface="Calibri" pitchFamily="34" charset="-120"/>
@@ -11010,20 +10522,14 @@
             </a:r>
             <a:r>
               <a:rPr lang="en-US" sz="1200" dirty="0">
-                <a:solidFill>
-                  <a:srgbClr val="0F1B2D"/>
-                </a:solidFill>
-                <a:latin typeface="Calibri" pitchFamily="34" charset="0"/>
-                <a:ea typeface="Calibri" pitchFamily="34" charset="-122"/>
-                <a:cs typeface="Calibri" pitchFamily="34" charset="-120"/>
-              </a:rPr>
-              <a:t> </a:t>
-            </a:r>
-            <a:r>
-              <a:rPr lang="en-US" sz="1200" dirty="0" err="1">
-                <a:solidFill>
-                  <a:srgbClr val="0F1B2D"/>
-                </a:solidFill>
+                <a:latin typeface="Calibri" pitchFamily="34" charset="0"/>
+                <a:ea typeface="Calibri" pitchFamily="34" charset="-122"/>
+                <a:cs typeface="Calibri" pitchFamily="34" charset="-120"/>
+              </a:rPr>
+              <a:t> </a:t>
+            </a:r>
+            <a:r>
+              <a:rPr lang="en-US" sz="1200" dirty="0" err="1">
                 <a:latin typeface="Calibri" pitchFamily="34" charset="0"/>
                 <a:ea typeface="Calibri" pitchFamily="34" charset="-122"/>
                 <a:cs typeface="Calibri" pitchFamily="34" charset="-120"/>
@@ -11032,20 +10538,14 @@
             </a:r>
             <a:r>
               <a:rPr lang="en-US" sz="1200" dirty="0">
-                <a:solidFill>
-                  <a:srgbClr val="0F1B2D"/>
-                </a:solidFill>
-                <a:latin typeface="Calibri" pitchFamily="34" charset="0"/>
-                <a:ea typeface="Calibri" pitchFamily="34" charset="-122"/>
-                <a:cs typeface="Calibri" pitchFamily="34" charset="-120"/>
-              </a:rPr>
-              <a:t> </a:t>
-            </a:r>
-            <a:r>
-              <a:rPr lang="en-US" sz="1200" dirty="0" err="1">
-                <a:solidFill>
-                  <a:srgbClr val="0F1B2D"/>
-                </a:solidFill>
+                <a:latin typeface="Calibri" pitchFamily="34" charset="0"/>
+                <a:ea typeface="Calibri" pitchFamily="34" charset="-122"/>
+                <a:cs typeface="Calibri" pitchFamily="34" charset="-120"/>
+              </a:rPr>
+              <a:t> </a:t>
+            </a:r>
+            <a:r>
+              <a:rPr lang="en-US" sz="1200" dirty="0" err="1">
                 <a:latin typeface="Calibri" pitchFamily="34" charset="0"/>
                 <a:ea typeface="Calibri" pitchFamily="34" charset="-122"/>
                 <a:cs typeface="Calibri" pitchFamily="34" charset="-120"/>
@@ -11054,20 +10554,14 @@
             </a:r>
             <a:r>
               <a:rPr lang="en-US" sz="1200" dirty="0">
-                <a:solidFill>
-                  <a:srgbClr val="0F1B2D"/>
-                </a:solidFill>
-                <a:latin typeface="Calibri" pitchFamily="34" charset="0"/>
-                <a:ea typeface="Calibri" pitchFamily="34" charset="-122"/>
-                <a:cs typeface="Calibri" pitchFamily="34" charset="-120"/>
-              </a:rPr>
-              <a:t> </a:t>
-            </a:r>
-            <a:r>
-              <a:rPr lang="en-US" sz="1200" dirty="0" err="1">
-                <a:solidFill>
-                  <a:srgbClr val="0F1B2D"/>
-                </a:solidFill>
+                <a:latin typeface="Calibri" pitchFamily="34" charset="0"/>
+                <a:ea typeface="Calibri" pitchFamily="34" charset="-122"/>
+                <a:cs typeface="Calibri" pitchFamily="34" charset="-120"/>
+              </a:rPr>
+              <a:t> </a:t>
+            </a:r>
+            <a:r>
+              <a:rPr lang="en-US" sz="1200" dirty="0" err="1">
                 <a:latin typeface="Calibri" pitchFamily="34" charset="0"/>
                 <a:ea typeface="Calibri" pitchFamily="34" charset="-122"/>
                 <a:cs typeface="Calibri" pitchFamily="34" charset="-120"/>

--- a/P2/pgcrypto_prezentacija.pptx
+++ b/P2/pgcrypto_prezentacija.pptx
@@ -5,7 +5,7 @@
     <p:sldMasterId id="2147483648" r:id="rId1"/>
   </p:sldMasterIdLst>
   <p:notesMasterIdLst>
-    <p:notesMasterId r:id="rId15"/>
+    <p:notesMasterId r:id="rId16"/>
   </p:notesMasterIdLst>
   <p:sldIdLst>
     <p:sldId id="256" r:id="rId2"/>
@@ -15,12 +15,13 @@
     <p:sldId id="260" r:id="rId6"/>
     <p:sldId id="261" r:id="rId7"/>
     <p:sldId id="262" r:id="rId8"/>
-    <p:sldId id="263" r:id="rId9"/>
-    <p:sldId id="265" r:id="rId10"/>
-    <p:sldId id="266" r:id="rId11"/>
-    <p:sldId id="267" r:id="rId12"/>
-    <p:sldId id="268" r:id="rId13"/>
-    <p:sldId id="269" r:id="rId14"/>
+    <p:sldId id="270" r:id="rId9"/>
+    <p:sldId id="263" r:id="rId10"/>
+    <p:sldId id="265" r:id="rId11"/>
+    <p:sldId id="266" r:id="rId12"/>
+    <p:sldId id="267" r:id="rId13"/>
+    <p:sldId id="268" r:id="rId14"/>
+    <p:sldId id="269" r:id="rId15"/>
   </p:sldIdLst>
   <p:sldSz cx="9144000" cy="5143500" type="screen16x9"/>
   <p:notesSz cx="5143500" cy="9144000"/>
@@ -341,6 +342,114 @@
         <p:cNvPr id="1" name="">
           <a:extLst>
             <a:ext uri="{FF2B5EF4-FFF2-40B4-BE49-F238E27FC236}">
+              <a16:creationId xmlns:a16="http://schemas.microsoft.com/office/drawing/2014/main" id="{3770FDBB-ED28-D0C5-748A-1B34994B8349}"/>
+            </a:ext>
+          </a:extLst>
+        </p:cNvPr>
+        <p:cNvGrpSpPr/>
+        <p:nvPr/>
+      </p:nvGrpSpPr>
+      <p:grpSpPr>
+        <a:xfrm>
+          <a:off x="0" y="0"/>
+          <a:ext cx="0" cy="0"/>
+          <a:chOff x="0" y="0"/>
+          <a:chExt cx="0" cy="0"/>
+        </a:xfrm>
+      </p:grpSpPr>
+      <p:sp>
+        <p:nvSpPr>
+          <p:cNvPr id="2" name="Slide Image Placeholder 1">
+            <a:extLst>
+              <a:ext uri="{FF2B5EF4-FFF2-40B4-BE49-F238E27FC236}">
+                <a16:creationId xmlns:a16="http://schemas.microsoft.com/office/drawing/2014/main" id="{3FF1C9BD-5ADC-2E80-A99F-E9DF391CC556}"/>
+              </a:ext>
+            </a:extLst>
+          </p:cNvPr>
+          <p:cNvSpPr>
+            <a:spLocks noGrp="1" noRot="1" noChangeAspect="1"/>
+          </p:cNvSpPr>
+          <p:nvPr>
+            <p:ph type="sldImg"/>
+          </p:nvPr>
+        </p:nvSpPr>
+        <p:spPr/>
+      </p:sp>
+      <p:sp>
+        <p:nvSpPr>
+          <p:cNvPr id="3" name="Notes Placeholder 2">
+            <a:extLst>
+              <a:ext uri="{FF2B5EF4-FFF2-40B4-BE49-F238E27FC236}">
+                <a16:creationId xmlns:a16="http://schemas.microsoft.com/office/drawing/2014/main" id="{BE663F48-7E71-08A1-E58E-7DCF1EEE5E9B}"/>
+              </a:ext>
+            </a:extLst>
+          </p:cNvPr>
+          <p:cNvSpPr>
+            <a:spLocks noGrp="1"/>
+          </p:cNvSpPr>
+          <p:nvPr>
+            <p:ph type="body" idx="1"/>
+          </p:nvPr>
+        </p:nvSpPr>
+        <p:spPr/>
+        <p:txBody>
+          <a:bodyPr/>
+          <a:lstStyle/>
+          <a:p>
+            <a:endParaRPr lang="en-US" dirty="0"/>
+          </a:p>
+        </p:txBody>
+      </p:sp>
+      <p:sp>
+        <p:nvSpPr>
+          <p:cNvPr id="4" name="Slide Number Placeholder 3">
+            <a:extLst>
+              <a:ext uri="{FF2B5EF4-FFF2-40B4-BE49-F238E27FC236}">
+                <a16:creationId xmlns:a16="http://schemas.microsoft.com/office/drawing/2014/main" id="{5E3EAF3A-072C-9237-6246-EA224CD40E26}"/>
+              </a:ext>
+            </a:extLst>
+          </p:cNvPr>
+          <p:cNvSpPr>
+            <a:spLocks noGrp="1"/>
+          </p:cNvSpPr>
+          <p:nvPr>
+            <p:ph type="sldNum" sz="quarter" idx="10"/>
+          </p:nvPr>
+        </p:nvSpPr>
+        <p:spPr/>
+        <p:txBody>
+          <a:bodyPr/>
+          <a:lstStyle/>
+          <a:p>
+            <a:fld id="{F7021451-1387-4CA6-816F-3879F97B5CBC}" type="slidenum">
+              <a:rPr lang="en-US"/>
+              <a:t>10</a:t>
+            </a:fld>
+            <a:endParaRPr lang="en-US"/>
+          </a:p>
+        </p:txBody>
+      </p:sp>
+    </p:spTree>
+    <p:extLst>
+      <p:ext uri="{BB962C8B-B14F-4D97-AF65-F5344CB8AC3E}">
+        <p14:creationId xmlns:p14="http://schemas.microsoft.com/office/powerpoint/2010/main" val="2893462076"/>
+      </p:ext>
+    </p:extLst>
+  </p:cSld>
+  <p:clrMapOvr>
+    <a:masterClrMapping/>
+  </p:clrMapOvr>
+</p:notes>
+</file>
+
+<file path=ppt/notesSlides/notesSlide11.xml><?xml version="1.0" encoding="utf-8"?>
+<p:notes xmlns:a="http://schemas.openxmlformats.org/drawingml/2006/main" xmlns:r="http://schemas.openxmlformats.org/officeDocument/2006/relationships" xmlns:p="http://schemas.openxmlformats.org/presentationml/2006/main">
+  <p:cSld>
+    <p:spTree>
+      <p:nvGrpSpPr>
+        <p:cNvPr id="1" name="">
+          <a:extLst>
+            <a:ext uri="{FF2B5EF4-FFF2-40B4-BE49-F238E27FC236}">
               <a16:creationId xmlns:a16="http://schemas.microsoft.com/office/drawing/2014/main" id="{1CD31987-8A33-84AD-6F9F-5E287BB8221B}"/>
             </a:ext>
           </a:extLst>
@@ -422,7 +531,7 @@
           <a:p>
             <a:fld id="{F7021451-1387-4CA6-816F-3879F97B5CBC}" type="slidenum">
               <a:rPr lang="en-US"/>
-              <a:t>10</a:t>
+              <a:t>11</a:t>
             </a:fld>
             <a:endParaRPr lang="en-US"/>
           </a:p>
@@ -441,7 +550,7 @@
 </p:notes>
 </file>
 
-<file path=ppt/notesSlides/notesSlide11.xml><?xml version="1.0" encoding="utf-8"?>
+<file path=ppt/notesSlides/notesSlide12.xml><?xml version="1.0" encoding="utf-8"?>
 <p:notes xmlns:a="http://schemas.openxmlformats.org/drawingml/2006/main" xmlns:r="http://schemas.openxmlformats.org/officeDocument/2006/relationships" xmlns:p="http://schemas.openxmlformats.org/presentationml/2006/main">
   <p:cSld>
     <p:spTree>
@@ -530,7 +639,7 @@
           <a:p>
             <a:fld id="{F7021451-1387-4CA6-816F-3879F97B5CBC}" type="slidenum">
               <a:rPr lang="en-US"/>
-              <a:t>11</a:t>
+              <a:t>12</a:t>
             </a:fld>
             <a:endParaRPr lang="en-US"/>
           </a:p>
@@ -549,7 +658,7 @@
 </p:notes>
 </file>
 
-<file path=ppt/notesSlides/notesSlide12.xml><?xml version="1.0" encoding="utf-8"?>
+<file path=ppt/notesSlides/notesSlide13.xml><?xml version="1.0" encoding="utf-8"?>
 <p:notes xmlns:a="http://schemas.openxmlformats.org/drawingml/2006/main" xmlns:r="http://schemas.openxmlformats.org/officeDocument/2006/relationships" xmlns:p="http://schemas.openxmlformats.org/presentationml/2006/main">
   <p:cSld>
     <p:spTree>
@@ -638,7 +747,7 @@
           <a:p>
             <a:fld id="{F7021451-1387-4CA6-816F-3879F97B5CBC}" type="slidenum">
               <a:rPr lang="en-US"/>
-              <a:t>12</a:t>
+              <a:t>13</a:t>
             </a:fld>
             <a:endParaRPr lang="en-US"/>
           </a:p>
@@ -1166,7 +1275,13 @@
   <p:cSld>
     <p:spTree>
       <p:nvGrpSpPr>
-        <p:cNvPr id="1" name=""/>
+        <p:cNvPr id="1" name="">
+          <a:extLst>
+            <a:ext uri="{FF2B5EF4-FFF2-40B4-BE49-F238E27FC236}">
+              <a16:creationId xmlns:a16="http://schemas.microsoft.com/office/drawing/2014/main" id="{22A17762-6D21-14A4-0AB4-C760C87ED709}"/>
+            </a:ext>
+          </a:extLst>
+        </p:cNvPr>
         <p:cNvGrpSpPr/>
         <p:nvPr/>
       </p:nvGrpSpPr>
@@ -1180,7 +1295,13 @@
       </p:grpSpPr>
       <p:sp>
         <p:nvSpPr>
-          <p:cNvPr id="2" name="Slide Image Placeholder 1"/>
+          <p:cNvPr id="2" name="Slide Image Placeholder 1">
+            <a:extLst>
+              <a:ext uri="{FF2B5EF4-FFF2-40B4-BE49-F238E27FC236}">
+                <a16:creationId xmlns:a16="http://schemas.microsoft.com/office/drawing/2014/main" id="{87FBB26F-2A3E-95D2-5F2F-20FED36CB336}"/>
+              </a:ext>
+            </a:extLst>
+          </p:cNvPr>
           <p:cNvSpPr>
             <a:spLocks noGrp="1" noRot="1" noChangeAspect="1"/>
           </p:cNvSpPr>
@@ -1192,7 +1313,13 @@
       </p:sp>
       <p:sp>
         <p:nvSpPr>
-          <p:cNvPr id="3" name="Notes Placeholder 2"/>
+          <p:cNvPr id="3" name="Notes Placeholder 2">
+            <a:extLst>
+              <a:ext uri="{FF2B5EF4-FFF2-40B4-BE49-F238E27FC236}">
+                <a16:creationId xmlns:a16="http://schemas.microsoft.com/office/drawing/2014/main" id="{7F34BB14-D65D-4B86-852E-DE5D2474DB8D}"/>
+              </a:ext>
+            </a:extLst>
+          </p:cNvPr>
           <p:cNvSpPr>
             <a:spLocks noGrp="1"/>
           </p:cNvSpPr>
@@ -1211,7 +1338,13 @@
       </p:sp>
       <p:sp>
         <p:nvSpPr>
-          <p:cNvPr id="4" name="Slide Number Placeholder 3"/>
+          <p:cNvPr id="4" name="Slide Number Placeholder 3">
+            <a:extLst>
+              <a:ext uri="{FF2B5EF4-FFF2-40B4-BE49-F238E27FC236}">
+                <a16:creationId xmlns:a16="http://schemas.microsoft.com/office/drawing/2014/main" id="{7000A6C7-C656-0BC1-CDA5-B0A6544FC43C}"/>
+              </a:ext>
+            </a:extLst>
+          </p:cNvPr>
           <p:cNvSpPr>
             <a:spLocks noGrp="1"/>
           </p:cNvSpPr>
@@ -1235,7 +1368,7 @@
     </p:spTree>
     <p:extLst>
       <p:ext uri="{BB962C8B-B14F-4D97-AF65-F5344CB8AC3E}">
-        <p14:creationId xmlns:p14="http://schemas.microsoft.com/office/powerpoint/2010/main" val="1024086991"/>
+        <p14:creationId xmlns:p14="http://schemas.microsoft.com/office/powerpoint/2010/main" val="1476273457"/>
       </p:ext>
     </p:extLst>
   </p:cSld>
@@ -1250,13 +1383,7 @@
   <p:cSld>
     <p:spTree>
       <p:nvGrpSpPr>
-        <p:cNvPr id="1" name="">
-          <a:extLst>
-            <a:ext uri="{FF2B5EF4-FFF2-40B4-BE49-F238E27FC236}">
-              <a16:creationId xmlns:a16="http://schemas.microsoft.com/office/drawing/2014/main" id="{3770FDBB-ED28-D0C5-748A-1B34994B8349}"/>
-            </a:ext>
-          </a:extLst>
-        </p:cNvPr>
+        <p:cNvPr id="1" name=""/>
         <p:cNvGrpSpPr/>
         <p:nvPr/>
       </p:nvGrpSpPr>
@@ -1270,13 +1397,7 @@
       </p:grpSpPr>
       <p:sp>
         <p:nvSpPr>
-          <p:cNvPr id="2" name="Slide Image Placeholder 1">
-            <a:extLst>
-              <a:ext uri="{FF2B5EF4-FFF2-40B4-BE49-F238E27FC236}">
-                <a16:creationId xmlns:a16="http://schemas.microsoft.com/office/drawing/2014/main" id="{3FF1C9BD-5ADC-2E80-A99F-E9DF391CC556}"/>
-              </a:ext>
-            </a:extLst>
-          </p:cNvPr>
+          <p:cNvPr id="2" name="Slide Image Placeholder 1"/>
           <p:cNvSpPr>
             <a:spLocks noGrp="1" noRot="1" noChangeAspect="1"/>
           </p:cNvSpPr>
@@ -1288,13 +1409,7 @@
       </p:sp>
       <p:sp>
         <p:nvSpPr>
-          <p:cNvPr id="3" name="Notes Placeholder 2">
-            <a:extLst>
-              <a:ext uri="{FF2B5EF4-FFF2-40B4-BE49-F238E27FC236}">
-                <a16:creationId xmlns:a16="http://schemas.microsoft.com/office/drawing/2014/main" id="{BE663F48-7E71-08A1-E58E-7DCF1EEE5E9B}"/>
-              </a:ext>
-            </a:extLst>
-          </p:cNvPr>
+          <p:cNvPr id="3" name="Notes Placeholder 2"/>
           <p:cNvSpPr>
             <a:spLocks noGrp="1"/>
           </p:cNvSpPr>
@@ -1313,13 +1428,7 @@
       </p:sp>
       <p:sp>
         <p:nvSpPr>
-          <p:cNvPr id="4" name="Slide Number Placeholder 3">
-            <a:extLst>
-              <a:ext uri="{FF2B5EF4-FFF2-40B4-BE49-F238E27FC236}">
-                <a16:creationId xmlns:a16="http://schemas.microsoft.com/office/drawing/2014/main" id="{5E3EAF3A-072C-9237-6246-EA224CD40E26}"/>
-              </a:ext>
-            </a:extLst>
-          </p:cNvPr>
+          <p:cNvPr id="4" name="Slide Number Placeholder 3"/>
           <p:cNvSpPr>
             <a:spLocks noGrp="1"/>
           </p:cNvSpPr>
@@ -1343,7 +1452,7 @@
     </p:spTree>
     <p:extLst>
       <p:ext uri="{BB962C8B-B14F-4D97-AF65-F5344CB8AC3E}">
-        <p14:creationId xmlns:p14="http://schemas.microsoft.com/office/powerpoint/2010/main" val="2893462076"/>
+        <p14:creationId xmlns:p14="http://schemas.microsoft.com/office/powerpoint/2010/main" val="1024086991"/>
       </p:ext>
     </p:extLst>
   </p:cSld>
@@ -1825,6 +1934,639 @@
         <p:cNvPr id="1" name="">
           <a:extLst>
             <a:ext uri="{FF2B5EF4-FFF2-40B4-BE49-F238E27FC236}">
+              <a16:creationId xmlns:a16="http://schemas.microsoft.com/office/drawing/2014/main" id="{9A3D99D9-6C50-8E24-30F1-B91882191818}"/>
+            </a:ext>
+          </a:extLst>
+        </p:cNvPr>
+        <p:cNvGrpSpPr/>
+        <p:nvPr/>
+      </p:nvGrpSpPr>
+      <p:grpSpPr>
+        <a:xfrm>
+          <a:off x="0" y="0"/>
+          <a:ext cx="0" cy="0"/>
+          <a:chOff x="0" y="0"/>
+          <a:chExt cx="0" cy="0"/>
+        </a:xfrm>
+      </p:grpSpPr>
+      <p:sp>
+        <p:nvSpPr>
+          <p:cNvPr id="2" name="Shape 0">
+            <a:extLst>
+              <a:ext uri="{FF2B5EF4-FFF2-40B4-BE49-F238E27FC236}">
+                <a16:creationId xmlns:a16="http://schemas.microsoft.com/office/drawing/2014/main" id="{457E0A0C-9B78-B496-6B2B-41473E110A19}"/>
+              </a:ext>
+            </a:extLst>
+          </p:cNvPr>
+          <p:cNvSpPr/>
+          <p:nvPr/>
+        </p:nvSpPr>
+        <p:spPr>
+          <a:xfrm>
+            <a:off x="0" y="0"/>
+            <a:ext cx="9144000" cy="713232"/>
+          </a:xfrm>
+          <a:prstGeom prst="rect">
+            <a:avLst/>
+          </a:prstGeom>
+          <a:noFill/>
+          <a:ln w="12700">
+            <a:solidFill>
+              <a:schemeClr val="bg1"/>
+            </a:solidFill>
+            <a:prstDash val="solid"/>
+          </a:ln>
+        </p:spPr>
+      </p:sp>
+      <p:sp>
+        <p:nvSpPr>
+          <p:cNvPr id="3" name="Text 1">
+            <a:extLst>
+              <a:ext uri="{FF2B5EF4-FFF2-40B4-BE49-F238E27FC236}">
+                <a16:creationId xmlns:a16="http://schemas.microsoft.com/office/drawing/2014/main" id="{1DC965D8-4CB6-E3B2-B330-649A594711C3}"/>
+              </a:ext>
+            </a:extLst>
+          </p:cNvPr>
+          <p:cNvSpPr/>
+          <p:nvPr/>
+        </p:nvSpPr>
+        <p:spPr>
+          <a:xfrm>
+            <a:off x="320040" y="0"/>
+            <a:ext cx="8503920" cy="713232"/>
+          </a:xfrm>
+          <a:prstGeom prst="rect">
+            <a:avLst/>
+          </a:prstGeom>
+          <a:noFill/>
+          <a:ln/>
+        </p:spPr>
+        <p:txBody>
+          <a:bodyPr wrap="square" lIns="0" tIns="0" rIns="0" bIns="0" rtlCol="0" anchor="ctr"/>
+          <a:lstStyle/>
+          <a:p>
+            <a:pPr marL="0" indent="0">
+              <a:buNone/>
+            </a:pPr>
+            <a:r>
+              <a:rPr lang="es-ES" sz="2200" b="1" dirty="0" err="1">
+                <a:solidFill>
+                  <a:schemeClr val="accent5">
+                    <a:lumMod val="75000"/>
+                  </a:schemeClr>
+                </a:solidFill>
+                <a:latin typeface="Calibri" pitchFamily="34" charset="0"/>
+                <a:cs typeface="Calibri" pitchFamily="34" charset="-120"/>
+              </a:rPr>
+              <a:t>Scenario</a:t>
+            </a:r>
+            <a:r>
+              <a:rPr lang="es-ES" sz="2200" b="1" dirty="0">
+                <a:solidFill>
+                  <a:schemeClr val="accent5">
+                    <a:lumMod val="75000"/>
+                  </a:schemeClr>
+                </a:solidFill>
+                <a:latin typeface="Calibri" pitchFamily="34" charset="0"/>
+                <a:cs typeface="Calibri" pitchFamily="34" charset="-120"/>
+              </a:rPr>
+              <a:t> 2 – SELECT </a:t>
+            </a:r>
+            <a:r>
+              <a:rPr lang="es-ES" sz="2200" b="1" dirty="0" err="1">
+                <a:solidFill>
+                  <a:schemeClr val="accent5">
+                    <a:lumMod val="75000"/>
+                  </a:schemeClr>
+                </a:solidFill>
+                <a:latin typeface="Calibri" pitchFamily="34" charset="0"/>
+                <a:cs typeface="Calibri" pitchFamily="34" charset="-120"/>
+              </a:rPr>
+              <a:t>sa</a:t>
+            </a:r>
+            <a:r>
+              <a:rPr lang="es-ES" sz="2200" b="1" dirty="0">
+                <a:solidFill>
+                  <a:schemeClr val="accent5">
+                    <a:lumMod val="75000"/>
+                  </a:schemeClr>
+                </a:solidFill>
+                <a:latin typeface="Calibri" pitchFamily="34" charset="0"/>
+                <a:cs typeface="Calibri" pitchFamily="34" charset="-120"/>
+              </a:rPr>
+              <a:t> </a:t>
+            </a:r>
+            <a:r>
+              <a:rPr lang="es-ES" sz="2200" b="1" dirty="0" err="1">
+                <a:solidFill>
+                  <a:schemeClr val="accent5">
+                    <a:lumMod val="75000"/>
+                  </a:schemeClr>
+                </a:solidFill>
+                <a:latin typeface="Calibri" pitchFamily="34" charset="0"/>
+                <a:cs typeface="Calibri" pitchFamily="34" charset="-120"/>
+              </a:rPr>
+              <a:t>dekripcijom</a:t>
+            </a:r>
+            <a:endParaRPr lang="en-US" sz="2200" dirty="0">
+              <a:solidFill>
+                <a:schemeClr val="accent5">
+                  <a:lumMod val="75000"/>
+                </a:schemeClr>
+              </a:solidFill>
+            </a:endParaRPr>
+          </a:p>
+        </p:txBody>
+      </p:sp>
+      <p:sp>
+        <p:nvSpPr>
+          <p:cNvPr id="32" name="Text 3">
+            <a:extLst>
+              <a:ext uri="{FF2B5EF4-FFF2-40B4-BE49-F238E27FC236}">
+                <a16:creationId xmlns:a16="http://schemas.microsoft.com/office/drawing/2014/main" id="{44FBA081-64E2-AA5F-6952-264D5CBC2667}"/>
+              </a:ext>
+            </a:extLst>
+          </p:cNvPr>
+          <p:cNvSpPr/>
+          <p:nvPr/>
+        </p:nvSpPr>
+        <p:spPr>
+          <a:xfrm>
+            <a:off x="241606" y="4118883"/>
+            <a:ext cx="8660787" cy="457200"/>
+          </a:xfrm>
+          <a:prstGeom prst="rect">
+            <a:avLst/>
+          </a:prstGeom>
+          <a:noFill/>
+          <a:ln/>
+        </p:spPr>
+        <p:txBody>
+          <a:bodyPr wrap="square" lIns="0" tIns="0" rIns="0" bIns="0" rtlCol="0" anchor="ctr"/>
+          <a:lstStyle/>
+          <a:p>
+            <a:pPr marL="171450" indent="-171450">
+              <a:buFont typeface="Arial" panose="020B0604020202020204" pitchFamily="34" charset="0"/>
+              <a:buChar char="•"/>
+            </a:pPr>
+            <a:r>
+              <a:rPr lang="en-US" sz="1200" dirty="0" err="1">
+                <a:latin typeface="Calibri" pitchFamily="34" charset="0"/>
+                <a:ea typeface="Calibri" pitchFamily="34" charset="-122"/>
+                <a:cs typeface="Calibri" pitchFamily="34" charset="-120"/>
+              </a:rPr>
+              <a:t>Rezultat</a:t>
+            </a:r>
+            <a:r>
+              <a:rPr lang="en-US" sz="1200" dirty="0">
+                <a:latin typeface="Calibri" pitchFamily="34" charset="0"/>
+                <a:ea typeface="Calibri" pitchFamily="34" charset="-122"/>
+                <a:cs typeface="Calibri" pitchFamily="34" charset="-120"/>
+              </a:rPr>
+              <a:t> </a:t>
+            </a:r>
+            <a:r>
+              <a:rPr lang="en-US" sz="1200" dirty="0" err="1">
+                <a:latin typeface="Calibri" pitchFamily="34" charset="0"/>
+                <a:ea typeface="Calibri" pitchFamily="34" charset="-122"/>
+                <a:cs typeface="Calibri" pitchFamily="34" charset="-120"/>
+              </a:rPr>
+              <a:t>prikazuje</a:t>
+            </a:r>
+            <a:r>
+              <a:rPr lang="en-US" sz="1200" dirty="0">
+                <a:latin typeface="Calibri" pitchFamily="34" charset="0"/>
+                <a:ea typeface="Calibri" pitchFamily="34" charset="-122"/>
+                <a:cs typeface="Calibri" pitchFamily="34" charset="-120"/>
+              </a:rPr>
+              <a:t> </a:t>
+            </a:r>
+            <a:r>
+              <a:rPr lang="en-US" sz="1200" dirty="0" err="1">
+                <a:latin typeface="Calibri" pitchFamily="34" charset="0"/>
+                <a:ea typeface="Calibri" pitchFamily="34" charset="-122"/>
+                <a:cs typeface="Calibri" pitchFamily="34" charset="-120"/>
+              </a:rPr>
+              <a:t>sve</a:t>
+            </a:r>
+            <a:r>
+              <a:rPr lang="en-US" sz="1200" dirty="0">
+                <a:latin typeface="Calibri" pitchFamily="34" charset="0"/>
+                <a:ea typeface="Calibri" pitchFamily="34" charset="-122"/>
+                <a:cs typeface="Calibri" pitchFamily="34" charset="-120"/>
+              </a:rPr>
+              <a:t> tri </a:t>
+            </a:r>
+            <a:r>
+              <a:rPr lang="en-US" sz="1200" dirty="0" err="1">
+                <a:latin typeface="Calibri" pitchFamily="34" charset="0"/>
+                <a:ea typeface="Calibri" pitchFamily="34" charset="-122"/>
+                <a:cs typeface="Calibri" pitchFamily="34" charset="-120"/>
+              </a:rPr>
+              <a:t>vrednosti</a:t>
+            </a:r>
+            <a:r>
+              <a:rPr lang="en-US" sz="1200" dirty="0">
+                <a:latin typeface="Calibri" pitchFamily="34" charset="0"/>
+                <a:ea typeface="Calibri" pitchFamily="34" charset="-122"/>
+                <a:cs typeface="Calibri" pitchFamily="34" charset="-120"/>
+              </a:rPr>
+              <a:t> u plaintext </a:t>
+            </a:r>
+            <a:r>
+              <a:rPr lang="en-US" sz="1200" dirty="0" err="1">
+                <a:latin typeface="Calibri" pitchFamily="34" charset="0"/>
+                <a:ea typeface="Calibri" pitchFamily="34" charset="-122"/>
+                <a:cs typeface="Calibri" pitchFamily="34" charset="-120"/>
+              </a:rPr>
+              <a:t>obliku</a:t>
+            </a:r>
+            <a:r>
+              <a:rPr lang="en-US" sz="1200" dirty="0">
+                <a:latin typeface="Calibri" pitchFamily="34" charset="0"/>
+                <a:ea typeface="Calibri" pitchFamily="34" charset="-122"/>
+                <a:cs typeface="Calibri" pitchFamily="34" charset="-120"/>
+              </a:rPr>
+              <a:t> - JMBG, </a:t>
+            </a:r>
+            <a:r>
+              <a:rPr lang="en-US" sz="1200" dirty="0" err="1">
+                <a:latin typeface="Calibri" pitchFamily="34" charset="0"/>
+                <a:ea typeface="Calibri" pitchFamily="34" charset="-122"/>
+                <a:cs typeface="Calibri" pitchFamily="34" charset="-120"/>
+              </a:rPr>
+              <a:t>broj</a:t>
+            </a:r>
+            <a:r>
+              <a:rPr lang="en-US" sz="1200" dirty="0">
+                <a:latin typeface="Calibri" pitchFamily="34" charset="0"/>
+                <a:ea typeface="Calibri" pitchFamily="34" charset="-122"/>
+                <a:cs typeface="Calibri" pitchFamily="34" charset="-120"/>
+              </a:rPr>
+              <a:t> </a:t>
+            </a:r>
+            <a:r>
+              <a:rPr lang="en-US" sz="1200" dirty="0" err="1">
+                <a:latin typeface="Calibri" pitchFamily="34" charset="0"/>
+                <a:ea typeface="Calibri" pitchFamily="34" charset="-122"/>
+                <a:cs typeface="Calibri" pitchFamily="34" charset="-120"/>
+              </a:rPr>
+              <a:t>kartice</a:t>
+            </a:r>
+            <a:r>
+              <a:rPr lang="en-US" sz="1200" dirty="0">
+                <a:latin typeface="Calibri" pitchFamily="34" charset="0"/>
+                <a:ea typeface="Calibri" pitchFamily="34" charset="-122"/>
+                <a:cs typeface="Calibri" pitchFamily="34" charset="-120"/>
+              </a:rPr>
+              <a:t> </a:t>
+            </a:r>
+            <a:r>
+              <a:rPr lang="en-US" sz="1200" dirty="0" err="1">
+                <a:latin typeface="Calibri" pitchFamily="34" charset="0"/>
+                <a:ea typeface="Calibri" pitchFamily="34" charset="-122"/>
+                <a:cs typeface="Calibri" pitchFamily="34" charset="-120"/>
+              </a:rPr>
+              <a:t>i</a:t>
+            </a:r>
+            <a:r>
+              <a:rPr lang="en-US" sz="1200" dirty="0">
+                <a:latin typeface="Calibri" pitchFamily="34" charset="0"/>
+                <a:ea typeface="Calibri" pitchFamily="34" charset="-122"/>
+                <a:cs typeface="Calibri" pitchFamily="34" charset="-120"/>
+              </a:rPr>
+              <a:t> </a:t>
+            </a:r>
+            <a:r>
+              <a:rPr lang="en-US" sz="1200" dirty="0" err="1">
+                <a:latin typeface="Calibri" pitchFamily="34" charset="0"/>
+                <a:ea typeface="Calibri" pitchFamily="34" charset="-122"/>
+                <a:cs typeface="Calibri" pitchFamily="34" charset="-120"/>
+              </a:rPr>
+              <a:t>bcrypt</a:t>
+            </a:r>
+            <a:r>
+              <a:rPr lang="en-US" sz="1200" dirty="0">
+                <a:latin typeface="Calibri" pitchFamily="34" charset="0"/>
+                <a:ea typeface="Calibri" pitchFamily="34" charset="-122"/>
+                <a:cs typeface="Calibri" pitchFamily="34" charset="-120"/>
+              </a:rPr>
+              <a:t> hash </a:t>
+            </a:r>
+            <a:r>
+              <a:rPr lang="en-US" sz="1200" dirty="0" err="1">
+                <a:latin typeface="Calibri" pitchFamily="34" charset="0"/>
+                <a:ea typeface="Calibri" pitchFamily="34" charset="-122"/>
+                <a:cs typeface="Calibri" pitchFamily="34" charset="-120"/>
+              </a:rPr>
+              <a:t>lozinke</a:t>
+            </a:r>
+            <a:r>
+              <a:rPr lang="en-US" sz="1200" dirty="0">
+                <a:latin typeface="Calibri" pitchFamily="34" charset="0"/>
+                <a:ea typeface="Calibri" pitchFamily="34" charset="-122"/>
+                <a:cs typeface="Calibri" pitchFamily="34" charset="-120"/>
+              </a:rPr>
+              <a:t>. </a:t>
+            </a:r>
+            <a:r>
+              <a:rPr lang="en-US" sz="1200" dirty="0" err="1">
+                <a:latin typeface="Calibri" pitchFamily="34" charset="0"/>
+                <a:ea typeface="Calibri" pitchFamily="34" charset="-122"/>
+                <a:cs typeface="Calibri" pitchFamily="34" charset="-120"/>
+              </a:rPr>
+              <a:t>Lozinka_hash</a:t>
+            </a:r>
+            <a:r>
+              <a:rPr lang="en-US" sz="1200" dirty="0">
+                <a:latin typeface="Calibri" pitchFamily="34" charset="0"/>
+                <a:ea typeface="Calibri" pitchFamily="34" charset="-122"/>
+                <a:cs typeface="Calibri" pitchFamily="34" charset="-120"/>
+              </a:rPr>
+              <a:t> </a:t>
+            </a:r>
+            <a:r>
+              <a:rPr lang="en-US" sz="1200" dirty="0" err="1">
+                <a:latin typeface="Calibri" pitchFamily="34" charset="0"/>
+                <a:ea typeface="Calibri" pitchFamily="34" charset="-122"/>
+                <a:cs typeface="Calibri" pitchFamily="34" charset="-120"/>
+              </a:rPr>
+              <a:t>kolona</a:t>
+            </a:r>
+            <a:r>
+              <a:rPr lang="en-US" sz="1200" dirty="0">
+                <a:latin typeface="Calibri" pitchFamily="34" charset="0"/>
+                <a:ea typeface="Calibri" pitchFamily="34" charset="-122"/>
+                <a:cs typeface="Calibri" pitchFamily="34" charset="-120"/>
+              </a:rPr>
+              <a:t> </a:t>
+            </a:r>
+            <a:r>
+              <a:rPr lang="en-US" sz="1200" dirty="0" err="1">
+                <a:latin typeface="Calibri" pitchFamily="34" charset="0"/>
+                <a:ea typeface="Calibri" pitchFamily="34" charset="-122"/>
+                <a:cs typeface="Calibri" pitchFamily="34" charset="-120"/>
+              </a:rPr>
+              <a:t>ostaje</a:t>
+            </a:r>
+            <a:r>
+              <a:rPr lang="en-US" sz="1200" dirty="0">
+                <a:latin typeface="Calibri" pitchFamily="34" charset="0"/>
+                <a:ea typeface="Calibri" pitchFamily="34" charset="-122"/>
+                <a:cs typeface="Calibri" pitchFamily="34" charset="-120"/>
+              </a:rPr>
+              <a:t> u </a:t>
+            </a:r>
+            <a:r>
+              <a:rPr lang="en-US" sz="1200" dirty="0" err="1">
+                <a:latin typeface="Calibri" pitchFamily="34" charset="0"/>
+                <a:ea typeface="Calibri" pitchFamily="34" charset="-122"/>
+                <a:cs typeface="Calibri" pitchFamily="34" charset="-120"/>
+              </a:rPr>
+              <a:t>heš</a:t>
+            </a:r>
+            <a:r>
+              <a:rPr lang="en-US" sz="1200" dirty="0">
+                <a:latin typeface="Calibri" pitchFamily="34" charset="0"/>
+                <a:ea typeface="Calibri" pitchFamily="34" charset="-122"/>
+                <a:cs typeface="Calibri" pitchFamily="34" charset="-120"/>
+              </a:rPr>
+              <a:t> </a:t>
+            </a:r>
+            <a:r>
+              <a:rPr lang="en-US" sz="1200" dirty="0" err="1">
+                <a:latin typeface="Calibri" pitchFamily="34" charset="0"/>
+                <a:ea typeface="Calibri" pitchFamily="34" charset="-122"/>
+                <a:cs typeface="Calibri" pitchFamily="34" charset="-120"/>
+              </a:rPr>
+              <a:t>obliku</a:t>
+            </a:r>
+            <a:r>
+              <a:rPr lang="en-US" sz="1200" dirty="0">
+                <a:latin typeface="Calibri" pitchFamily="34" charset="0"/>
+                <a:ea typeface="Calibri" pitchFamily="34" charset="-122"/>
+                <a:cs typeface="Calibri" pitchFamily="34" charset="-120"/>
+              </a:rPr>
+              <a:t> </a:t>
+            </a:r>
+            <a:r>
+              <a:rPr lang="en-US" sz="1200" dirty="0" err="1">
+                <a:latin typeface="Calibri" pitchFamily="34" charset="0"/>
+                <a:ea typeface="Calibri" pitchFamily="34" charset="-122"/>
+                <a:cs typeface="Calibri" pitchFamily="34" charset="-120"/>
+              </a:rPr>
+              <a:t>jer</a:t>
+            </a:r>
+            <a:r>
+              <a:rPr lang="en-US" sz="1200" dirty="0">
+                <a:latin typeface="Calibri" pitchFamily="34" charset="0"/>
+                <a:ea typeface="Calibri" pitchFamily="34" charset="-122"/>
+                <a:cs typeface="Calibri" pitchFamily="34" charset="-120"/>
+              </a:rPr>
+              <a:t> se </a:t>
+            </a:r>
+            <a:r>
+              <a:rPr lang="en-US" sz="1200" dirty="0" err="1">
+                <a:latin typeface="Calibri" pitchFamily="34" charset="0"/>
+                <a:ea typeface="Calibri" pitchFamily="34" charset="-122"/>
+                <a:cs typeface="Calibri" pitchFamily="34" charset="-120"/>
+              </a:rPr>
+              <a:t>lozinka</a:t>
+            </a:r>
+            <a:r>
+              <a:rPr lang="en-US" sz="1200" dirty="0">
+                <a:latin typeface="Calibri" pitchFamily="34" charset="0"/>
+                <a:ea typeface="Calibri" pitchFamily="34" charset="-122"/>
+                <a:cs typeface="Calibri" pitchFamily="34" charset="-120"/>
+              </a:rPr>
+              <a:t> </a:t>
+            </a:r>
+            <a:r>
+              <a:rPr lang="en-US" sz="1200" dirty="0" err="1">
+                <a:latin typeface="Calibri" pitchFamily="34" charset="0"/>
+                <a:ea typeface="Calibri" pitchFamily="34" charset="-122"/>
+                <a:cs typeface="Calibri" pitchFamily="34" charset="-120"/>
+              </a:rPr>
+              <a:t>nikada</a:t>
+            </a:r>
+            <a:r>
+              <a:rPr lang="en-US" sz="1200" dirty="0">
+                <a:latin typeface="Calibri" pitchFamily="34" charset="0"/>
+                <a:ea typeface="Calibri" pitchFamily="34" charset="-122"/>
+                <a:cs typeface="Calibri" pitchFamily="34" charset="-120"/>
+              </a:rPr>
+              <a:t> ne </a:t>
+            </a:r>
+            <a:r>
+              <a:rPr lang="en-US" sz="1200" dirty="0" err="1">
+                <a:latin typeface="Calibri" pitchFamily="34" charset="0"/>
+                <a:ea typeface="Calibri" pitchFamily="34" charset="-122"/>
+                <a:cs typeface="Calibri" pitchFamily="34" charset="-120"/>
+              </a:rPr>
+              <a:t>dekriptuje</a:t>
+            </a:r>
+            <a:r>
+              <a:rPr lang="en-US" sz="1200" dirty="0">
+                <a:latin typeface="Calibri" pitchFamily="34" charset="0"/>
+                <a:ea typeface="Calibri" pitchFamily="34" charset="-122"/>
+                <a:cs typeface="Calibri" pitchFamily="34" charset="-120"/>
+              </a:rPr>
+              <a:t>, </a:t>
+            </a:r>
+            <a:r>
+              <a:rPr lang="en-US" sz="1200" dirty="0" err="1">
+                <a:latin typeface="Calibri" pitchFamily="34" charset="0"/>
+                <a:ea typeface="Calibri" pitchFamily="34" charset="-122"/>
+                <a:cs typeface="Calibri" pitchFamily="34" charset="-120"/>
+              </a:rPr>
+              <a:t>već</a:t>
+            </a:r>
+            <a:r>
+              <a:rPr lang="en-US" sz="1200" dirty="0">
+                <a:latin typeface="Calibri" pitchFamily="34" charset="0"/>
+                <a:ea typeface="Calibri" pitchFamily="34" charset="-122"/>
+                <a:cs typeface="Calibri" pitchFamily="34" charset="-120"/>
+              </a:rPr>
+              <a:t> se </a:t>
+            </a:r>
+            <a:r>
+              <a:rPr lang="en-US" sz="1200" dirty="0" err="1">
+                <a:latin typeface="Calibri" pitchFamily="34" charset="0"/>
+                <a:ea typeface="Calibri" pitchFamily="34" charset="-122"/>
+                <a:cs typeface="Calibri" pitchFamily="34" charset="-120"/>
+              </a:rPr>
+              <a:t>samo</a:t>
+            </a:r>
+            <a:r>
+              <a:rPr lang="en-US" sz="1200" dirty="0">
+                <a:latin typeface="Calibri" pitchFamily="34" charset="0"/>
+                <a:ea typeface="Calibri" pitchFamily="34" charset="-122"/>
+                <a:cs typeface="Calibri" pitchFamily="34" charset="-120"/>
+              </a:rPr>
+              <a:t> </a:t>
+            </a:r>
+            <a:r>
+              <a:rPr lang="en-US" sz="1200" dirty="0" err="1">
+                <a:latin typeface="Calibri" pitchFamily="34" charset="0"/>
+                <a:ea typeface="Calibri" pitchFamily="34" charset="-122"/>
+                <a:cs typeface="Calibri" pitchFamily="34" charset="-120"/>
+              </a:rPr>
+              <a:t>poredi</a:t>
+            </a:r>
+            <a:r>
+              <a:rPr lang="en-US" sz="1200" dirty="0">
+                <a:latin typeface="Calibri" pitchFamily="34" charset="0"/>
+                <a:ea typeface="Calibri" pitchFamily="34" charset="-122"/>
+                <a:cs typeface="Calibri" pitchFamily="34" charset="-120"/>
+              </a:rPr>
+              <a:t> </a:t>
+            </a:r>
+            <a:r>
+              <a:rPr lang="en-US" sz="1200" dirty="0" err="1">
+                <a:latin typeface="Calibri" pitchFamily="34" charset="0"/>
+                <a:ea typeface="Calibri" pitchFamily="34" charset="-122"/>
+                <a:cs typeface="Calibri" pitchFamily="34" charset="-120"/>
+              </a:rPr>
+              <a:t>sa</a:t>
+            </a:r>
+            <a:r>
+              <a:rPr lang="en-US" sz="1200" dirty="0">
+                <a:latin typeface="Calibri" pitchFamily="34" charset="0"/>
+                <a:ea typeface="Calibri" pitchFamily="34" charset="-122"/>
+                <a:cs typeface="Calibri" pitchFamily="34" charset="-120"/>
+              </a:rPr>
+              <a:t> </a:t>
+            </a:r>
+            <a:r>
+              <a:rPr lang="en-US" sz="1200" dirty="0" err="1">
+                <a:latin typeface="Calibri" pitchFamily="34" charset="0"/>
+                <a:ea typeface="Calibri" pitchFamily="34" charset="-122"/>
+                <a:cs typeface="Calibri" pitchFamily="34" charset="-120"/>
+              </a:rPr>
+              <a:t>novim</a:t>
+            </a:r>
+            <a:r>
+              <a:rPr lang="en-US" sz="1200" dirty="0">
+                <a:latin typeface="Calibri" pitchFamily="34" charset="0"/>
+                <a:ea typeface="Calibri" pitchFamily="34" charset="-122"/>
+                <a:cs typeface="Calibri" pitchFamily="34" charset="-120"/>
+              </a:rPr>
+              <a:t> </a:t>
+            </a:r>
+            <a:r>
+              <a:rPr lang="en-US" sz="1200" dirty="0" err="1">
+                <a:latin typeface="Calibri" pitchFamily="34" charset="0"/>
+                <a:ea typeface="Calibri" pitchFamily="34" charset="-122"/>
+                <a:cs typeface="Calibri" pitchFamily="34" charset="-120"/>
+              </a:rPr>
+              <a:t>hashom</a:t>
+            </a:r>
+            <a:endParaRPr lang="en-US" sz="1200" dirty="0"/>
+          </a:p>
+        </p:txBody>
+      </p:sp>
+      <p:pic>
+        <p:nvPicPr>
+          <p:cNvPr id="4" name="Picture 3">
+            <a:extLst>
+              <a:ext uri="{FF2B5EF4-FFF2-40B4-BE49-F238E27FC236}">
+                <a16:creationId xmlns:a16="http://schemas.microsoft.com/office/drawing/2014/main" id="{13540218-0717-DA7C-BE17-6F561F0A4E2D}"/>
+              </a:ext>
+            </a:extLst>
+          </p:cNvPr>
+          <p:cNvPicPr>
+            <a:picLocks noChangeAspect="1"/>
+          </p:cNvPicPr>
+          <p:nvPr/>
+        </p:nvPicPr>
+        <p:blipFill>
+          <a:blip r:embed="rId3" cstate="print">
+            <a:extLst>
+              <a:ext uri="{28A0092B-C50C-407E-A947-70E740481C1C}">
+                <a14:useLocalDpi xmlns:a14="http://schemas.microsoft.com/office/drawing/2010/main" val="0"/>
+              </a:ext>
+            </a:extLst>
+          </a:blip>
+          <a:srcRect/>
+          <a:stretch>
+            <a:fillRect/>
+          </a:stretch>
+        </p:blipFill>
+        <p:spPr bwMode="auto">
+          <a:xfrm>
+            <a:off x="320040" y="939799"/>
+            <a:ext cx="8503920" cy="2949629"/>
+          </a:xfrm>
+          <a:prstGeom prst="rect">
+            <a:avLst/>
+          </a:prstGeom>
+          <a:noFill/>
+          <a:ln>
+            <a:noFill/>
+          </a:ln>
+        </p:spPr>
+      </p:pic>
+    </p:spTree>
+    <p:extLst>
+      <p:ext uri="{BB962C8B-B14F-4D97-AF65-F5344CB8AC3E}">
+        <p14:creationId xmlns:p14="http://schemas.microsoft.com/office/powerpoint/2010/main" val="2525910856"/>
+      </p:ext>
+    </p:extLst>
+  </p:cSld>
+  <p:clrMapOvr>
+    <a:masterClrMapping/>
+  </p:clrMapOvr>
+</p:sld>
+</file>
+
+<file path=ppt/slides/slide11.xml><?xml version="1.0" encoding="utf-8"?>
+<p:sld xmlns:a="http://schemas.openxmlformats.org/drawingml/2006/main" xmlns:r="http://schemas.openxmlformats.org/officeDocument/2006/relationships" xmlns:p="http://schemas.openxmlformats.org/presentationml/2006/main">
+  <p:cSld>
+    <p:spTree>
+      <p:nvGrpSpPr>
+        <p:cNvPr id="1" name="">
+          <a:extLst>
+            <a:ext uri="{FF2B5EF4-FFF2-40B4-BE49-F238E27FC236}">
               <a16:creationId xmlns:a16="http://schemas.microsoft.com/office/drawing/2014/main" id="{89512B16-A63A-70CF-FD24-1585E4690E0C}"/>
             </a:ext>
           </a:extLst>
@@ -2950,7 +3692,7 @@
 </p:sld>
 </file>
 
-<file path=ppt/slides/slide11.xml><?xml version="1.0" encoding="utf-8"?>
+<file path=ppt/slides/slide12.xml><?xml version="1.0" encoding="utf-8"?>
 <p:sld xmlns:a="http://schemas.openxmlformats.org/drawingml/2006/main" xmlns:r="http://schemas.openxmlformats.org/officeDocument/2006/relationships" xmlns:p="http://schemas.openxmlformats.org/presentationml/2006/main">
   <p:cSld>
     <p:spTree>
@@ -3687,7 +4429,7 @@
 </p:sld>
 </file>
 
-<file path=ppt/slides/slide12.xml><?xml version="1.0" encoding="utf-8"?>
+<file path=ppt/slides/slide13.xml><?xml version="1.0" encoding="utf-8"?>
 <p:sld xmlns:a="http://schemas.openxmlformats.org/drawingml/2006/main" xmlns:r="http://schemas.openxmlformats.org/officeDocument/2006/relationships" xmlns:p="http://schemas.openxmlformats.org/presentationml/2006/main">
   <p:cSld>
     <p:spTree>
@@ -4176,7 +4918,7 @@
 </p:sld>
 </file>
 
-<file path=ppt/slides/slide13.xml><?xml version="1.0" encoding="utf-8"?>
+<file path=ppt/slides/slide14.xml><?xml version="1.0" encoding="utf-8"?>
 <p:sld xmlns:a="http://schemas.openxmlformats.org/drawingml/2006/main" xmlns:r="http://schemas.openxmlformats.org/officeDocument/2006/relationships" xmlns:p="http://schemas.openxmlformats.org/presentationml/2006/main">
   <p:cSld>
     <p:spTree>
@@ -9445,6 +10187,1247 @@
 
 <file path=ppt/slides/slide8.xml><?xml version="1.0" encoding="utf-8"?>
 <p:sld xmlns:a="http://schemas.openxmlformats.org/drawingml/2006/main" xmlns:r="http://schemas.openxmlformats.org/officeDocument/2006/relationships" xmlns:p="http://schemas.openxmlformats.org/presentationml/2006/main">
+  <p:cSld>
+    <p:spTree>
+      <p:nvGrpSpPr>
+        <p:cNvPr id="1" name="">
+          <a:extLst>
+            <a:ext uri="{FF2B5EF4-FFF2-40B4-BE49-F238E27FC236}">
+              <a16:creationId xmlns:a16="http://schemas.microsoft.com/office/drawing/2014/main" id="{6E007B2D-E404-D453-5BE3-FBED1E00BBA6}"/>
+            </a:ext>
+          </a:extLst>
+        </p:cNvPr>
+        <p:cNvGrpSpPr/>
+        <p:nvPr/>
+      </p:nvGrpSpPr>
+      <p:grpSpPr>
+        <a:xfrm>
+          <a:off x="0" y="0"/>
+          <a:ext cx="0" cy="0"/>
+          <a:chOff x="0" y="0"/>
+          <a:chExt cx="0" cy="0"/>
+        </a:xfrm>
+      </p:grpSpPr>
+      <p:sp>
+        <p:nvSpPr>
+          <p:cNvPr id="3" name="Text 1">
+            <a:extLst>
+              <a:ext uri="{FF2B5EF4-FFF2-40B4-BE49-F238E27FC236}">
+                <a16:creationId xmlns:a16="http://schemas.microsoft.com/office/drawing/2014/main" id="{23F64B52-5D9B-FDA4-0A68-3D90585F1EF5}"/>
+              </a:ext>
+            </a:extLst>
+          </p:cNvPr>
+          <p:cNvSpPr/>
+          <p:nvPr/>
+        </p:nvSpPr>
+        <p:spPr>
+          <a:xfrm>
+            <a:off x="320040" y="0"/>
+            <a:ext cx="8503920" cy="713232"/>
+          </a:xfrm>
+          <a:prstGeom prst="rect">
+            <a:avLst/>
+          </a:prstGeom>
+          <a:noFill/>
+          <a:ln/>
+        </p:spPr>
+        <p:txBody>
+          <a:bodyPr wrap="square" lIns="0" tIns="0" rIns="0" bIns="0" rtlCol="0" anchor="ctr"/>
+          <a:lstStyle/>
+          <a:p>
+            <a:pPr marL="0" indent="0">
+              <a:buNone/>
+            </a:pPr>
+            <a:r>
+              <a:rPr lang="en-US" sz="2200" b="1" dirty="0" err="1">
+                <a:solidFill>
+                  <a:schemeClr val="accent5">
+                    <a:lumMod val="75000"/>
+                  </a:schemeClr>
+                </a:solidFill>
+                <a:latin typeface="Calibri" pitchFamily="34" charset="0"/>
+                <a:ea typeface="Calibri" pitchFamily="34" charset="-122"/>
+                <a:cs typeface="Calibri" pitchFamily="34" charset="-120"/>
+              </a:rPr>
+              <a:t>Priprema</a:t>
+            </a:r>
+            <a:r>
+              <a:rPr lang="en-US" sz="2200" b="1" dirty="0">
+                <a:solidFill>
+                  <a:schemeClr val="accent5">
+                    <a:lumMod val="75000"/>
+                  </a:schemeClr>
+                </a:solidFill>
+                <a:latin typeface="Calibri" pitchFamily="34" charset="0"/>
+                <a:ea typeface="Calibri" pitchFamily="34" charset="-122"/>
+                <a:cs typeface="Calibri" pitchFamily="34" charset="-120"/>
+              </a:rPr>
+              <a:t> </a:t>
+            </a:r>
+            <a:r>
+              <a:rPr lang="en-US" sz="2200" b="1" dirty="0" err="1">
+                <a:solidFill>
+                  <a:schemeClr val="accent5">
+                    <a:lumMod val="75000"/>
+                  </a:schemeClr>
+                </a:solidFill>
+                <a:latin typeface="Calibri" pitchFamily="34" charset="0"/>
+                <a:ea typeface="Calibri" pitchFamily="34" charset="-122"/>
+                <a:cs typeface="Calibri" pitchFamily="34" charset="-120"/>
+              </a:rPr>
+              <a:t>okruzenja</a:t>
+            </a:r>
+            <a:endParaRPr lang="en-US" sz="2200" dirty="0">
+              <a:solidFill>
+                <a:schemeClr val="accent5">
+                  <a:lumMod val="75000"/>
+                </a:schemeClr>
+              </a:solidFill>
+            </a:endParaRPr>
+          </a:p>
+        </p:txBody>
+      </p:sp>
+      <p:sp>
+        <p:nvSpPr>
+          <p:cNvPr id="4" name="Shape 2">
+            <a:extLst>
+              <a:ext uri="{FF2B5EF4-FFF2-40B4-BE49-F238E27FC236}">
+                <a16:creationId xmlns:a16="http://schemas.microsoft.com/office/drawing/2014/main" id="{4DE4D00F-448E-243B-F657-55FA7EBC28D7}"/>
+              </a:ext>
+            </a:extLst>
+          </p:cNvPr>
+          <p:cNvSpPr/>
+          <p:nvPr/>
+        </p:nvSpPr>
+        <p:spPr>
+          <a:xfrm>
+            <a:off x="182880" y="914400"/>
+            <a:ext cx="8705088" cy="2789927"/>
+          </a:xfrm>
+          <a:prstGeom prst="rect">
+            <a:avLst/>
+          </a:prstGeom>
+          <a:solidFill>
+            <a:srgbClr val="FFFFFF"/>
+          </a:solidFill>
+          <a:ln w="12700">
+            <a:solidFill>
+              <a:schemeClr val="bg1"/>
+            </a:solidFill>
+            <a:prstDash val="solid"/>
+          </a:ln>
+          <a:effectLst/>
+        </p:spPr>
+      </p:sp>
+      <p:sp>
+        <p:nvSpPr>
+          <p:cNvPr id="5" name="Shape 3">
+            <a:extLst>
+              <a:ext uri="{FF2B5EF4-FFF2-40B4-BE49-F238E27FC236}">
+                <a16:creationId xmlns:a16="http://schemas.microsoft.com/office/drawing/2014/main" id="{03924C07-E4A2-97E9-417D-01A2DA96A8FD}"/>
+              </a:ext>
+            </a:extLst>
+          </p:cNvPr>
+          <p:cNvSpPr/>
+          <p:nvPr/>
+        </p:nvSpPr>
+        <p:spPr>
+          <a:xfrm>
+            <a:off x="182880" y="914400"/>
+            <a:ext cx="8705088" cy="163916"/>
+          </a:xfrm>
+          <a:prstGeom prst="rect">
+            <a:avLst/>
+          </a:prstGeom>
+          <a:solidFill>
+            <a:schemeClr val="accent5">
+              <a:lumMod val="75000"/>
+            </a:schemeClr>
+          </a:solidFill>
+          <a:ln w="12700">
+            <a:solidFill>
+              <a:schemeClr val="accent5">
+                <a:lumMod val="75000"/>
+              </a:schemeClr>
+            </a:solidFill>
+            <a:prstDash val="solid"/>
+          </a:ln>
+        </p:spPr>
+        <p:txBody>
+          <a:bodyPr/>
+          <a:lstStyle/>
+          <a:p>
+            <a:endParaRPr lang="sr-Latn-RS" dirty="0"/>
+          </a:p>
+        </p:txBody>
+      </p:sp>
+      <p:sp>
+        <p:nvSpPr>
+          <p:cNvPr id="7" name="Text 4">
+            <a:extLst>
+              <a:ext uri="{FF2B5EF4-FFF2-40B4-BE49-F238E27FC236}">
+                <a16:creationId xmlns:a16="http://schemas.microsoft.com/office/drawing/2014/main" id="{E0423628-8042-0239-01B0-6ADA1D025964}"/>
+              </a:ext>
+            </a:extLst>
+          </p:cNvPr>
+          <p:cNvSpPr/>
+          <p:nvPr/>
+        </p:nvSpPr>
+        <p:spPr>
+          <a:xfrm>
+            <a:off x="640079" y="914400"/>
+            <a:ext cx="6993579" cy="163916"/>
+          </a:xfrm>
+          <a:prstGeom prst="rect">
+            <a:avLst/>
+          </a:prstGeom>
+          <a:noFill/>
+          <a:ln/>
+        </p:spPr>
+        <p:txBody>
+          <a:bodyPr wrap="square" lIns="0" tIns="0" rIns="0" bIns="0" rtlCol="0" anchor="ctr"/>
+          <a:lstStyle/>
+          <a:p>
+            <a:pPr marL="0" indent="0">
+              <a:buNone/>
+            </a:pPr>
+            <a:r>
+              <a:rPr lang="en-US" sz="1200" b="1" dirty="0" err="1">
+                <a:solidFill>
+                  <a:srgbClr val="FFFFFF"/>
+                </a:solidFill>
+                <a:latin typeface="Calibri" pitchFamily="34" charset="0"/>
+                <a:ea typeface="Calibri" pitchFamily="34" charset="-122"/>
+                <a:cs typeface="Calibri" pitchFamily="34" charset="-120"/>
+              </a:rPr>
+              <a:t>Kreiranje</a:t>
+            </a:r>
+            <a:r>
+              <a:rPr lang="en-US" sz="1200" b="1" dirty="0">
+                <a:solidFill>
+                  <a:srgbClr val="FFFFFF"/>
+                </a:solidFill>
+                <a:latin typeface="Calibri" pitchFamily="34" charset="0"/>
+                <a:ea typeface="Calibri" pitchFamily="34" charset="-122"/>
+                <a:cs typeface="Calibri" pitchFamily="34" charset="-120"/>
+              </a:rPr>
+              <a:t> </a:t>
+            </a:r>
+            <a:r>
+              <a:rPr lang="en-US" sz="1200" b="1" dirty="0" err="1">
+                <a:solidFill>
+                  <a:srgbClr val="FFFFFF"/>
+                </a:solidFill>
+                <a:latin typeface="Calibri" pitchFamily="34" charset="0"/>
+                <a:ea typeface="Calibri" pitchFamily="34" charset="-122"/>
+                <a:cs typeface="Calibri" pitchFamily="34" charset="-120"/>
+              </a:rPr>
+              <a:t>tabele</a:t>
+            </a:r>
+            <a:r>
+              <a:rPr lang="en-US" sz="1200" b="1" dirty="0">
+                <a:solidFill>
+                  <a:srgbClr val="FFFFFF"/>
+                </a:solidFill>
+                <a:latin typeface="Calibri" pitchFamily="34" charset="0"/>
+                <a:ea typeface="Calibri" pitchFamily="34" charset="-122"/>
+                <a:cs typeface="Calibri" pitchFamily="34" charset="-120"/>
+              </a:rPr>
+              <a:t> </a:t>
+            </a:r>
+            <a:r>
+              <a:rPr lang="en-US" sz="1200" b="1" dirty="0" err="1">
+                <a:solidFill>
+                  <a:srgbClr val="FFFFFF"/>
+                </a:solidFill>
+                <a:latin typeface="Calibri" pitchFamily="34" charset="0"/>
+                <a:ea typeface="Calibri" pitchFamily="34" charset="-122"/>
+                <a:cs typeface="Calibri" pitchFamily="34" charset="-120"/>
+              </a:rPr>
+              <a:t>i</a:t>
+            </a:r>
+            <a:r>
+              <a:rPr lang="en-US" sz="1200" b="1" dirty="0">
+                <a:solidFill>
+                  <a:srgbClr val="FFFFFF"/>
+                </a:solidFill>
+                <a:latin typeface="Calibri" pitchFamily="34" charset="0"/>
+                <a:ea typeface="Calibri" pitchFamily="34" charset="-122"/>
+                <a:cs typeface="Calibri" pitchFamily="34" charset="-120"/>
+              </a:rPr>
+              <a:t> </a:t>
+            </a:r>
+            <a:r>
+              <a:rPr lang="en-US" sz="1200" b="1" dirty="0" err="1">
+                <a:solidFill>
+                  <a:srgbClr val="FFFFFF"/>
+                </a:solidFill>
+                <a:latin typeface="Calibri" pitchFamily="34" charset="0"/>
+                <a:ea typeface="Calibri" pitchFamily="34" charset="-122"/>
+                <a:cs typeface="Calibri" pitchFamily="34" charset="-120"/>
+              </a:rPr>
+              <a:t>unos</a:t>
+            </a:r>
+            <a:r>
+              <a:rPr lang="en-US" sz="1200" b="1" dirty="0">
+                <a:solidFill>
+                  <a:srgbClr val="FFFFFF"/>
+                </a:solidFill>
+                <a:latin typeface="Calibri" pitchFamily="34" charset="0"/>
+                <a:ea typeface="Calibri" pitchFamily="34" charset="-122"/>
+                <a:cs typeface="Calibri" pitchFamily="34" charset="-120"/>
+              </a:rPr>
+              <a:t> </a:t>
+            </a:r>
+            <a:r>
+              <a:rPr lang="en-US" sz="1200" b="1" dirty="0" err="1">
+                <a:solidFill>
+                  <a:srgbClr val="FFFFFF"/>
+                </a:solidFill>
+                <a:latin typeface="Calibri" pitchFamily="34" charset="0"/>
+                <a:ea typeface="Calibri" pitchFamily="34" charset="-122"/>
+                <a:cs typeface="Calibri" pitchFamily="34" charset="-120"/>
+              </a:rPr>
+              <a:t>podataka</a:t>
+            </a:r>
+            <a:endParaRPr lang="en-US" sz="1200" dirty="0"/>
+          </a:p>
+        </p:txBody>
+      </p:sp>
+      <p:sp>
+        <p:nvSpPr>
+          <p:cNvPr id="8" name="Text 5">
+            <a:extLst>
+              <a:ext uri="{FF2B5EF4-FFF2-40B4-BE49-F238E27FC236}">
+                <a16:creationId xmlns:a16="http://schemas.microsoft.com/office/drawing/2014/main" id="{1B7FFA66-8F97-E65B-951B-8432DFA37B04}"/>
+              </a:ext>
+            </a:extLst>
+          </p:cNvPr>
+          <p:cNvSpPr/>
+          <p:nvPr/>
+        </p:nvSpPr>
+        <p:spPr>
+          <a:xfrm>
+            <a:off x="256033" y="1136469"/>
+            <a:ext cx="4138686" cy="3463523"/>
+          </a:xfrm>
+          <a:prstGeom prst="rect">
+            <a:avLst/>
+          </a:prstGeom>
+          <a:noFill/>
+          <a:ln/>
+        </p:spPr>
+        <p:txBody>
+          <a:bodyPr wrap="square" rtlCol="0" anchor="ctr"/>
+          <a:lstStyle/>
+          <a:p>
+            <a:pPr marL="342900" indent="-342900">
+              <a:spcAft>
+                <a:spcPts val="500"/>
+              </a:spcAft>
+              <a:buSzPct val="100000"/>
+              <a:buChar char="•"/>
+            </a:pPr>
+            <a:r>
+              <a:rPr lang="sr-Latn-RS" sz="1100" dirty="0">
+                <a:solidFill>
+                  <a:srgbClr val="CC7BF4"/>
+                </a:solidFill>
+                <a:effectLst/>
+              </a:rPr>
+              <a:t>CREATE</a:t>
+            </a:r>
+            <a:r>
+              <a:rPr lang="sr-Latn-RS" sz="1100" dirty="0"/>
+              <a:t> </a:t>
+            </a:r>
+            <a:r>
+              <a:rPr lang="sr-Latn-RS" sz="1100" dirty="0">
+                <a:solidFill>
+                  <a:srgbClr val="CC7BF4"/>
+                </a:solidFill>
+                <a:effectLst/>
+              </a:rPr>
+              <a:t>TABLE</a:t>
+            </a:r>
+            <a:r>
+              <a:rPr lang="sr-Latn-RS" sz="1100" dirty="0"/>
+              <a:t> korisnici </a:t>
+            </a:r>
+            <a:r>
+              <a:rPr lang="sr-Latn-RS" sz="1100" dirty="0">
+                <a:solidFill>
+                  <a:srgbClr val="D3D7DE"/>
+                </a:solidFill>
+                <a:effectLst/>
+              </a:rPr>
+              <a:t>(</a:t>
+            </a:r>
+            <a:r>
+              <a:rPr lang="sr-Latn-RS" sz="1100" dirty="0"/>
+              <a:t> </a:t>
+            </a:r>
+            <a:endParaRPr lang="en-US" sz="1100" dirty="0"/>
+          </a:p>
+          <a:p>
+            <a:pPr>
+              <a:spcAft>
+                <a:spcPts val="500"/>
+              </a:spcAft>
+              <a:buSzPct val="100000"/>
+            </a:pPr>
+            <a:r>
+              <a:rPr lang="en-US" sz="1100" dirty="0"/>
+              <a:t>	</a:t>
+            </a:r>
+            <a:r>
+              <a:rPr lang="sr-Latn-RS" sz="1100" dirty="0"/>
+              <a:t>id </a:t>
+            </a:r>
+            <a:r>
+              <a:rPr lang="sr-Latn-RS" sz="1100" dirty="0">
+                <a:solidFill>
+                  <a:srgbClr val="CC7BF4"/>
+                </a:solidFill>
+                <a:effectLst/>
+              </a:rPr>
+              <a:t>SERIAL</a:t>
+            </a:r>
+            <a:r>
+              <a:rPr lang="sr-Latn-RS" sz="1100" dirty="0"/>
+              <a:t> </a:t>
+            </a:r>
+            <a:r>
+              <a:rPr lang="sr-Latn-RS" sz="1100" dirty="0">
+                <a:solidFill>
+                  <a:srgbClr val="CC7BF4"/>
+                </a:solidFill>
+                <a:effectLst/>
+              </a:rPr>
+              <a:t>PRIMARY</a:t>
+            </a:r>
+            <a:r>
+              <a:rPr lang="sr-Latn-RS" sz="1100" dirty="0"/>
+              <a:t> </a:t>
+            </a:r>
+            <a:r>
+              <a:rPr lang="sr-Latn-RS" sz="1100" dirty="0">
+                <a:solidFill>
+                  <a:srgbClr val="CC7BF4"/>
+                </a:solidFill>
+                <a:effectLst/>
+              </a:rPr>
+              <a:t>KEY</a:t>
+            </a:r>
+            <a:r>
+              <a:rPr lang="sr-Latn-RS" sz="1100" dirty="0">
+                <a:solidFill>
+                  <a:srgbClr val="D3D7DE"/>
+                </a:solidFill>
+                <a:effectLst/>
+              </a:rPr>
+              <a:t>,</a:t>
+            </a:r>
+            <a:r>
+              <a:rPr lang="en-US" sz="1100" dirty="0">
+                <a:solidFill>
+                  <a:srgbClr val="D3D7DE"/>
+                </a:solidFill>
+                <a:effectLst/>
+              </a:rPr>
+              <a:t> </a:t>
+            </a:r>
+          </a:p>
+          <a:p>
+            <a:pPr>
+              <a:spcAft>
+                <a:spcPts val="500"/>
+              </a:spcAft>
+              <a:buSzPct val="100000"/>
+            </a:pPr>
+            <a:r>
+              <a:rPr lang="en-US" sz="1100" dirty="0">
+                <a:solidFill>
+                  <a:srgbClr val="D3D7DE"/>
+                </a:solidFill>
+              </a:rPr>
+              <a:t>	</a:t>
+            </a:r>
+            <a:r>
+              <a:rPr lang="sr-Latn-RS" sz="1100" dirty="0"/>
+              <a:t>ime </a:t>
+            </a:r>
+            <a:r>
+              <a:rPr lang="sr-Latn-RS" sz="1100" dirty="0">
+                <a:solidFill>
+                  <a:srgbClr val="CC7BF4"/>
+                </a:solidFill>
+                <a:effectLst/>
+              </a:rPr>
+              <a:t>VARCHAR</a:t>
+            </a:r>
+            <a:r>
+              <a:rPr lang="sr-Latn-RS" sz="1100" dirty="0">
+                <a:solidFill>
+                  <a:srgbClr val="D3D7DE"/>
+                </a:solidFill>
+                <a:effectLst/>
+              </a:rPr>
+              <a:t>(</a:t>
+            </a:r>
+            <a:r>
+              <a:rPr lang="sr-Latn-RS" sz="1100" dirty="0">
+                <a:solidFill>
+                  <a:srgbClr val="5EEDED"/>
+                </a:solidFill>
+                <a:effectLst/>
+              </a:rPr>
+              <a:t>50</a:t>
+            </a:r>
+            <a:r>
+              <a:rPr lang="sr-Latn-RS" sz="1100" dirty="0">
+                <a:solidFill>
+                  <a:srgbClr val="D3D7DE"/>
+                </a:solidFill>
+                <a:effectLst/>
+              </a:rPr>
+              <a:t>),</a:t>
+            </a:r>
+            <a:r>
+              <a:rPr lang="sr-Latn-RS" sz="1100" dirty="0"/>
+              <a:t> </a:t>
+            </a:r>
+            <a:endParaRPr lang="en-US" sz="1100" dirty="0"/>
+          </a:p>
+          <a:p>
+            <a:pPr>
+              <a:spcAft>
+                <a:spcPts val="500"/>
+              </a:spcAft>
+              <a:buSzPct val="100000"/>
+            </a:pPr>
+            <a:r>
+              <a:rPr lang="en-US" sz="1100" dirty="0"/>
+              <a:t>	</a:t>
+            </a:r>
+            <a:r>
+              <a:rPr lang="sr-Latn-RS" sz="1100" dirty="0"/>
+              <a:t>prezime </a:t>
+            </a:r>
+            <a:r>
+              <a:rPr lang="sr-Latn-RS" sz="1100" dirty="0">
+                <a:solidFill>
+                  <a:srgbClr val="CC7BF4"/>
+                </a:solidFill>
+                <a:effectLst/>
+              </a:rPr>
+              <a:t>VARCHAR</a:t>
+            </a:r>
+            <a:r>
+              <a:rPr lang="sr-Latn-RS" sz="1100" dirty="0">
+                <a:solidFill>
+                  <a:srgbClr val="D3D7DE"/>
+                </a:solidFill>
+                <a:effectLst/>
+              </a:rPr>
+              <a:t>(</a:t>
+            </a:r>
+            <a:r>
+              <a:rPr lang="sr-Latn-RS" sz="1100" dirty="0">
+                <a:solidFill>
+                  <a:srgbClr val="5EEDED"/>
+                </a:solidFill>
+                <a:effectLst/>
+              </a:rPr>
+              <a:t>50</a:t>
+            </a:r>
+            <a:r>
+              <a:rPr lang="sr-Latn-RS" sz="1100" dirty="0">
+                <a:solidFill>
+                  <a:srgbClr val="D3D7DE"/>
+                </a:solidFill>
+                <a:effectLst/>
+              </a:rPr>
+              <a:t>),</a:t>
+            </a:r>
+            <a:endParaRPr lang="en-US" sz="1100" dirty="0">
+              <a:solidFill>
+                <a:srgbClr val="D3D7DE"/>
+              </a:solidFill>
+              <a:effectLst/>
+            </a:endParaRPr>
+          </a:p>
+          <a:p>
+            <a:pPr>
+              <a:spcAft>
+                <a:spcPts val="500"/>
+              </a:spcAft>
+              <a:buSzPct val="100000"/>
+            </a:pPr>
+            <a:r>
+              <a:rPr lang="en-US" sz="1100" dirty="0"/>
+              <a:t>	</a:t>
+            </a:r>
+            <a:r>
+              <a:rPr lang="sr-Latn-RS" sz="1100" dirty="0"/>
+              <a:t>jmbg_enc BYTEA</a:t>
+            </a:r>
+            <a:r>
+              <a:rPr lang="sr-Latn-RS" sz="1100" dirty="0">
+                <a:solidFill>
+                  <a:srgbClr val="D3D7DE"/>
+                </a:solidFill>
+                <a:effectLst/>
+              </a:rPr>
+              <a:t>,</a:t>
+            </a:r>
+            <a:r>
+              <a:rPr lang="sr-Latn-RS" sz="1100" dirty="0"/>
+              <a:t> </a:t>
+            </a:r>
+            <a:endParaRPr lang="en-US" sz="1100" dirty="0"/>
+          </a:p>
+          <a:p>
+            <a:pPr>
+              <a:spcAft>
+                <a:spcPts val="500"/>
+              </a:spcAft>
+              <a:buSzPct val="100000"/>
+            </a:pPr>
+            <a:r>
+              <a:rPr lang="en-US" sz="1100" dirty="0"/>
+              <a:t>	</a:t>
+            </a:r>
+            <a:r>
+              <a:rPr lang="sr-Latn-RS" sz="1100" dirty="0"/>
+              <a:t>broj_kartice_enc BYTEA</a:t>
+            </a:r>
+            <a:r>
+              <a:rPr lang="sr-Latn-RS" sz="1100" dirty="0">
+                <a:solidFill>
+                  <a:srgbClr val="D3D7DE"/>
+                </a:solidFill>
+                <a:effectLst/>
+              </a:rPr>
+              <a:t>,</a:t>
+            </a:r>
+            <a:r>
+              <a:rPr lang="sr-Latn-RS" sz="1100" dirty="0"/>
+              <a:t> </a:t>
+            </a:r>
+            <a:endParaRPr lang="en-US" sz="1100" dirty="0"/>
+          </a:p>
+          <a:p>
+            <a:pPr>
+              <a:spcAft>
+                <a:spcPts val="500"/>
+              </a:spcAft>
+              <a:buSzPct val="100000"/>
+            </a:pPr>
+            <a:r>
+              <a:rPr lang="en-US" sz="1100" dirty="0"/>
+              <a:t>	</a:t>
+            </a:r>
+            <a:r>
+              <a:rPr lang="sr-Latn-RS" sz="1100" dirty="0"/>
+              <a:t>lozinka_hash </a:t>
+            </a:r>
+            <a:r>
+              <a:rPr lang="sr-Latn-RS" sz="1100" dirty="0">
+                <a:solidFill>
+                  <a:srgbClr val="CC7BF4"/>
+                </a:solidFill>
+                <a:effectLst/>
+              </a:rPr>
+              <a:t>TEXT</a:t>
+            </a:r>
+            <a:r>
+              <a:rPr lang="sr-Latn-RS" sz="1100" dirty="0"/>
+              <a:t> </a:t>
+            </a:r>
+            <a:r>
+              <a:rPr lang="sr-Latn-RS" sz="1100" dirty="0">
+                <a:solidFill>
+                  <a:srgbClr val="D3D7DE"/>
+                </a:solidFill>
+                <a:effectLst/>
+              </a:rPr>
+              <a:t>);</a:t>
+            </a:r>
+            <a:endParaRPr lang="en-US" sz="1100" dirty="0"/>
+          </a:p>
+        </p:txBody>
+      </p:sp>
+      <p:sp>
+        <p:nvSpPr>
+          <p:cNvPr id="14" name="Shape 10">
+            <a:extLst>
+              <a:ext uri="{FF2B5EF4-FFF2-40B4-BE49-F238E27FC236}">
+                <a16:creationId xmlns:a16="http://schemas.microsoft.com/office/drawing/2014/main" id="{669C4853-F931-1190-5D87-C2F05F44BE5A}"/>
+              </a:ext>
+            </a:extLst>
+          </p:cNvPr>
+          <p:cNvSpPr/>
+          <p:nvPr/>
+        </p:nvSpPr>
+        <p:spPr>
+          <a:xfrm>
+            <a:off x="182880" y="3704327"/>
+            <a:ext cx="8705088" cy="1049546"/>
+          </a:xfrm>
+          <a:prstGeom prst="rect">
+            <a:avLst/>
+          </a:prstGeom>
+          <a:solidFill>
+            <a:srgbClr val="FFFFFF"/>
+          </a:solidFill>
+          <a:ln w="12700">
+            <a:solidFill>
+              <a:schemeClr val="bg1"/>
+            </a:solidFill>
+            <a:prstDash val="solid"/>
+          </a:ln>
+          <a:effectLst/>
+        </p:spPr>
+      </p:sp>
+      <p:sp>
+        <p:nvSpPr>
+          <p:cNvPr id="2" name="Text 5">
+            <a:extLst>
+              <a:ext uri="{FF2B5EF4-FFF2-40B4-BE49-F238E27FC236}">
+                <a16:creationId xmlns:a16="http://schemas.microsoft.com/office/drawing/2014/main" id="{004F8C75-0E65-B0F0-9942-7733F8E6D2C2}"/>
+              </a:ext>
+            </a:extLst>
+          </p:cNvPr>
+          <p:cNvSpPr/>
+          <p:nvPr/>
+        </p:nvSpPr>
+        <p:spPr>
+          <a:xfrm>
+            <a:off x="4467872" y="1137714"/>
+            <a:ext cx="4138686" cy="3463523"/>
+          </a:xfrm>
+          <a:prstGeom prst="rect">
+            <a:avLst/>
+          </a:prstGeom>
+          <a:noFill/>
+          <a:ln/>
+        </p:spPr>
+        <p:txBody>
+          <a:bodyPr wrap="square" rtlCol="0" anchor="ctr"/>
+          <a:lstStyle/>
+          <a:p>
+            <a:pPr marL="342900" indent="-342900">
+              <a:spcAft>
+                <a:spcPts val="500"/>
+              </a:spcAft>
+              <a:buSzPct val="100000"/>
+              <a:buChar char="•"/>
+            </a:pPr>
+            <a:endParaRPr lang="en-US" sz="1100" dirty="0">
+              <a:solidFill>
+                <a:srgbClr val="CC7BF4"/>
+              </a:solidFill>
+              <a:effectLst/>
+            </a:endParaRPr>
+          </a:p>
+          <a:p>
+            <a:pPr marL="342900" indent="-342900">
+              <a:spcAft>
+                <a:spcPts val="500"/>
+              </a:spcAft>
+              <a:buSzPct val="100000"/>
+              <a:buChar char="•"/>
+            </a:pPr>
+            <a:r>
+              <a:rPr lang="en-US" sz="1100" dirty="0">
+                <a:solidFill>
+                  <a:srgbClr val="CC7BF4"/>
+                </a:solidFill>
+                <a:effectLst/>
+              </a:rPr>
+              <a:t>SET</a:t>
+            </a:r>
+            <a:r>
+              <a:rPr lang="en-US" sz="1100" dirty="0"/>
+              <a:t> </a:t>
+            </a:r>
+            <a:r>
+              <a:rPr lang="en-US" sz="1100" dirty="0" err="1"/>
+              <a:t>app</a:t>
+            </a:r>
+            <a:r>
+              <a:rPr lang="en-US" sz="1100" dirty="0" err="1">
+                <a:solidFill>
+                  <a:srgbClr val="D3D7DE"/>
+                </a:solidFill>
+                <a:effectLst/>
+              </a:rPr>
+              <a:t>.</a:t>
+            </a:r>
+            <a:r>
+              <a:rPr lang="en-US" sz="1100" dirty="0" err="1"/>
+              <a:t>enc_key</a:t>
+            </a:r>
+            <a:r>
+              <a:rPr lang="en-US" sz="1100" dirty="0"/>
+              <a:t> </a:t>
+            </a:r>
+            <a:r>
+              <a:rPr lang="en-US" sz="1100" dirty="0">
+                <a:solidFill>
+                  <a:srgbClr val="EAECF0"/>
+                </a:solidFill>
+                <a:effectLst/>
+              </a:rPr>
+              <a:t>=</a:t>
+            </a:r>
+            <a:r>
+              <a:rPr lang="en-US" sz="1100" dirty="0"/>
+              <a:t> </a:t>
+            </a:r>
+            <a:r>
+              <a:rPr lang="en-US" sz="1100" dirty="0">
+                <a:solidFill>
+                  <a:srgbClr val="9BE963"/>
+                </a:solidFill>
+                <a:effectLst/>
+              </a:rPr>
+              <a:t>'MojTajniKljuc2026!'</a:t>
+            </a:r>
+            <a:r>
+              <a:rPr lang="en-US" sz="1100" dirty="0">
+                <a:solidFill>
+                  <a:srgbClr val="D3D7DE"/>
+                </a:solidFill>
+                <a:effectLst/>
+              </a:rPr>
+              <a:t>;</a:t>
+            </a:r>
+            <a:endParaRPr lang="en-US" sz="1100" dirty="0">
+              <a:solidFill>
+                <a:srgbClr val="CC7BF4"/>
+              </a:solidFill>
+            </a:endParaRPr>
+          </a:p>
+          <a:p>
+            <a:pPr marL="342900" indent="-342900">
+              <a:spcAft>
+                <a:spcPts val="500"/>
+              </a:spcAft>
+              <a:buSzPct val="100000"/>
+              <a:buChar char="•"/>
+            </a:pPr>
+            <a:r>
+              <a:rPr lang="sr-Latn-RS" sz="1100" dirty="0">
+                <a:solidFill>
+                  <a:srgbClr val="CC7BF4"/>
+                </a:solidFill>
+                <a:effectLst/>
+              </a:rPr>
+              <a:t>INSERT</a:t>
+            </a:r>
+            <a:r>
+              <a:rPr lang="sr-Latn-RS" sz="1100" dirty="0"/>
+              <a:t> </a:t>
+            </a:r>
+            <a:r>
+              <a:rPr lang="sr-Latn-RS" sz="1100" dirty="0">
+                <a:solidFill>
+                  <a:srgbClr val="CC7BF4"/>
+                </a:solidFill>
+                <a:effectLst/>
+              </a:rPr>
+              <a:t>INTO</a:t>
+            </a:r>
+            <a:r>
+              <a:rPr lang="sr-Latn-RS" sz="1100" dirty="0"/>
+              <a:t> korisnici </a:t>
+            </a:r>
+            <a:r>
+              <a:rPr lang="sr-Latn-RS" sz="1100" dirty="0">
+                <a:solidFill>
+                  <a:srgbClr val="D3D7DE"/>
+                </a:solidFill>
+                <a:effectLst/>
+              </a:rPr>
+              <a:t>(</a:t>
+            </a:r>
+            <a:r>
+              <a:rPr lang="sr-Latn-RS" sz="1100" dirty="0"/>
+              <a:t>ime</a:t>
+            </a:r>
+            <a:r>
+              <a:rPr lang="sr-Latn-RS" sz="1100" dirty="0">
+                <a:solidFill>
+                  <a:srgbClr val="D3D7DE"/>
+                </a:solidFill>
+                <a:effectLst/>
+              </a:rPr>
+              <a:t>,</a:t>
+            </a:r>
+            <a:r>
+              <a:rPr lang="sr-Latn-RS" sz="1100" dirty="0"/>
+              <a:t> prezime</a:t>
+            </a:r>
+            <a:r>
+              <a:rPr lang="sr-Latn-RS" sz="1100" dirty="0">
+                <a:solidFill>
+                  <a:srgbClr val="D3D7DE"/>
+                </a:solidFill>
+                <a:effectLst/>
+              </a:rPr>
+              <a:t>,</a:t>
+            </a:r>
+            <a:r>
+              <a:rPr lang="sr-Latn-RS" sz="1100" dirty="0"/>
+              <a:t> jmbg_enc</a:t>
+            </a:r>
+            <a:r>
+              <a:rPr lang="sr-Latn-RS" sz="1100" dirty="0">
+                <a:solidFill>
+                  <a:srgbClr val="D3D7DE"/>
+                </a:solidFill>
+                <a:effectLst/>
+              </a:rPr>
+              <a:t>,</a:t>
+            </a:r>
+            <a:r>
+              <a:rPr lang="sr-Latn-RS" sz="1100" dirty="0"/>
+              <a:t> broj_kartice_enc</a:t>
+            </a:r>
+            <a:r>
+              <a:rPr lang="sr-Latn-RS" sz="1100" dirty="0">
+                <a:solidFill>
+                  <a:srgbClr val="D3D7DE"/>
+                </a:solidFill>
+                <a:effectLst/>
+              </a:rPr>
+              <a:t>,</a:t>
+            </a:r>
+            <a:r>
+              <a:rPr lang="sr-Latn-RS" sz="1100" dirty="0"/>
+              <a:t> lozinka_hash</a:t>
+            </a:r>
+            <a:r>
+              <a:rPr lang="sr-Latn-RS" sz="1100" dirty="0">
+                <a:solidFill>
+                  <a:srgbClr val="D3D7DE"/>
+                </a:solidFill>
+                <a:effectLst/>
+              </a:rPr>
+              <a:t>)</a:t>
+            </a:r>
+            <a:r>
+              <a:rPr lang="sr-Latn-RS" sz="1100" dirty="0"/>
+              <a:t> </a:t>
+            </a:r>
+            <a:r>
+              <a:rPr lang="sr-Latn-RS" sz="1100" dirty="0">
+                <a:solidFill>
+                  <a:srgbClr val="CC7BF4"/>
+                </a:solidFill>
+                <a:effectLst/>
+              </a:rPr>
+              <a:t>VALUES</a:t>
+            </a:r>
+            <a:r>
+              <a:rPr lang="sr-Latn-RS" sz="1100" dirty="0"/>
+              <a:t> </a:t>
+            </a:r>
+            <a:r>
+              <a:rPr lang="sr-Latn-RS" sz="1100" dirty="0">
+                <a:solidFill>
+                  <a:srgbClr val="D3D7DE"/>
+                </a:solidFill>
+                <a:effectLst/>
+              </a:rPr>
+              <a:t>(</a:t>
+            </a:r>
+            <a:r>
+              <a:rPr lang="sr-Latn-RS" sz="1100" dirty="0"/>
+              <a:t> </a:t>
+            </a:r>
+            <a:r>
+              <a:rPr lang="sr-Latn-RS" sz="1100" dirty="0">
+                <a:solidFill>
+                  <a:srgbClr val="9BE963"/>
+                </a:solidFill>
+                <a:effectLst/>
+              </a:rPr>
+              <a:t>'Marko'</a:t>
+            </a:r>
+            <a:r>
+              <a:rPr lang="sr-Latn-RS" sz="1100" dirty="0">
+                <a:solidFill>
+                  <a:srgbClr val="D3D7DE"/>
+                </a:solidFill>
+                <a:effectLst/>
+              </a:rPr>
+              <a:t>,</a:t>
+            </a:r>
+            <a:r>
+              <a:rPr lang="sr-Latn-RS" sz="1100" dirty="0"/>
+              <a:t> </a:t>
+            </a:r>
+            <a:r>
+              <a:rPr lang="sr-Latn-RS" sz="1100" dirty="0">
+                <a:solidFill>
+                  <a:srgbClr val="9BE963"/>
+                </a:solidFill>
+                <a:effectLst/>
+              </a:rPr>
+              <a:t>'Petrovic'</a:t>
+            </a:r>
+            <a:r>
+              <a:rPr lang="sr-Latn-RS" sz="1100" dirty="0">
+                <a:solidFill>
+                  <a:srgbClr val="D3D7DE"/>
+                </a:solidFill>
+                <a:effectLst/>
+              </a:rPr>
+              <a:t>,</a:t>
+            </a:r>
+            <a:r>
+              <a:rPr lang="sr-Latn-RS" sz="1100" dirty="0"/>
+              <a:t> pgp_sym_encrypt</a:t>
+            </a:r>
+            <a:r>
+              <a:rPr lang="sr-Latn-RS" sz="1100" dirty="0">
+                <a:solidFill>
+                  <a:srgbClr val="D3D7DE"/>
+                </a:solidFill>
+                <a:effectLst/>
+              </a:rPr>
+              <a:t>(</a:t>
+            </a:r>
+            <a:r>
+              <a:rPr lang="sr-Latn-RS" sz="1100" dirty="0">
+                <a:solidFill>
+                  <a:srgbClr val="9BE963"/>
+                </a:solidFill>
+                <a:effectLst/>
+              </a:rPr>
+              <a:t>'1234567890123'</a:t>
+            </a:r>
+            <a:r>
+              <a:rPr lang="sr-Latn-RS" sz="1100" dirty="0">
+                <a:solidFill>
+                  <a:srgbClr val="D3D7DE"/>
+                </a:solidFill>
+                <a:effectLst/>
+              </a:rPr>
+              <a:t>,</a:t>
+            </a:r>
+            <a:r>
+              <a:rPr lang="sr-Latn-RS" sz="1100" dirty="0"/>
+              <a:t> current_setting</a:t>
+            </a:r>
+            <a:r>
+              <a:rPr lang="sr-Latn-RS" sz="1100" dirty="0">
+                <a:solidFill>
+                  <a:srgbClr val="D3D7DE"/>
+                </a:solidFill>
+                <a:effectLst/>
+              </a:rPr>
+              <a:t>(</a:t>
+            </a:r>
+            <a:r>
+              <a:rPr lang="sr-Latn-RS" sz="1100" dirty="0">
+                <a:solidFill>
+                  <a:srgbClr val="9BE963"/>
+                </a:solidFill>
+                <a:effectLst/>
+              </a:rPr>
+              <a:t>'app.enc_key'</a:t>
+            </a:r>
+            <a:r>
+              <a:rPr lang="sr-Latn-RS" sz="1100" dirty="0">
+                <a:solidFill>
+                  <a:srgbClr val="D3D7DE"/>
+                </a:solidFill>
+                <a:effectLst/>
+              </a:rPr>
+              <a:t>)),</a:t>
+            </a:r>
+            <a:r>
+              <a:rPr lang="sr-Latn-RS" sz="1100" dirty="0"/>
+              <a:t> pgp_sym_encrypt</a:t>
+            </a:r>
+            <a:r>
+              <a:rPr lang="sr-Latn-RS" sz="1100" dirty="0">
+                <a:solidFill>
+                  <a:srgbClr val="D3D7DE"/>
+                </a:solidFill>
+                <a:effectLst/>
+              </a:rPr>
+              <a:t>(</a:t>
+            </a:r>
+            <a:r>
+              <a:rPr lang="sr-Latn-RS" sz="1100" dirty="0">
+                <a:solidFill>
+                  <a:srgbClr val="9BE963"/>
+                </a:solidFill>
+                <a:effectLst/>
+              </a:rPr>
+              <a:t>'1234567812345678'</a:t>
+            </a:r>
+            <a:r>
+              <a:rPr lang="sr-Latn-RS" sz="1100" dirty="0">
+                <a:solidFill>
+                  <a:srgbClr val="D3D7DE"/>
+                </a:solidFill>
+                <a:effectLst/>
+              </a:rPr>
+              <a:t>,</a:t>
+            </a:r>
+            <a:r>
+              <a:rPr lang="sr-Latn-RS" sz="1100" dirty="0"/>
+              <a:t> current_setting</a:t>
+            </a:r>
+            <a:r>
+              <a:rPr lang="sr-Latn-RS" sz="1100" dirty="0">
+                <a:solidFill>
+                  <a:srgbClr val="D3D7DE"/>
+                </a:solidFill>
+                <a:effectLst/>
+              </a:rPr>
+              <a:t>(</a:t>
+            </a:r>
+            <a:r>
+              <a:rPr lang="sr-Latn-RS" sz="1100" dirty="0">
+                <a:solidFill>
+                  <a:srgbClr val="9BE963"/>
+                </a:solidFill>
+                <a:effectLst/>
+              </a:rPr>
+              <a:t>'app.enc_key'</a:t>
+            </a:r>
+            <a:r>
+              <a:rPr lang="sr-Latn-RS" sz="1100" dirty="0">
+                <a:solidFill>
+                  <a:srgbClr val="D3D7DE"/>
+                </a:solidFill>
+                <a:effectLst/>
+              </a:rPr>
+              <a:t>)),</a:t>
+            </a:r>
+            <a:r>
+              <a:rPr lang="sr-Latn-RS" sz="1100" dirty="0"/>
+              <a:t> crypt</a:t>
+            </a:r>
+            <a:r>
+              <a:rPr lang="sr-Latn-RS" sz="1100" dirty="0">
+                <a:solidFill>
+                  <a:srgbClr val="D3D7DE"/>
+                </a:solidFill>
+                <a:effectLst/>
+              </a:rPr>
+              <a:t>(</a:t>
+            </a:r>
+            <a:r>
+              <a:rPr lang="sr-Latn-RS" sz="1100" dirty="0">
+                <a:solidFill>
+                  <a:srgbClr val="9BE963"/>
+                </a:solidFill>
+                <a:effectLst/>
+              </a:rPr>
+              <a:t>'moja_lozinka'</a:t>
+            </a:r>
+            <a:r>
+              <a:rPr lang="sr-Latn-RS" sz="1100" dirty="0">
+                <a:solidFill>
+                  <a:srgbClr val="D3D7DE"/>
+                </a:solidFill>
+                <a:effectLst/>
+              </a:rPr>
+              <a:t>,</a:t>
+            </a:r>
+            <a:r>
+              <a:rPr lang="sr-Latn-RS" sz="1100" dirty="0"/>
+              <a:t> gen_salt</a:t>
+            </a:r>
+            <a:r>
+              <a:rPr lang="sr-Latn-RS" sz="1100" dirty="0">
+                <a:solidFill>
+                  <a:srgbClr val="D3D7DE"/>
+                </a:solidFill>
+                <a:effectLst/>
+              </a:rPr>
+              <a:t>(</a:t>
+            </a:r>
+            <a:r>
+              <a:rPr lang="sr-Latn-RS" sz="1100" dirty="0">
+                <a:solidFill>
+                  <a:srgbClr val="9BE963"/>
+                </a:solidFill>
+                <a:effectLst/>
+              </a:rPr>
+              <a:t>'bf'</a:t>
+            </a:r>
+            <a:r>
+              <a:rPr lang="sr-Latn-RS" sz="1100" dirty="0">
+                <a:solidFill>
+                  <a:srgbClr val="D3D7DE"/>
+                </a:solidFill>
+                <a:effectLst/>
+              </a:rPr>
+              <a:t>,</a:t>
+            </a:r>
+            <a:r>
+              <a:rPr lang="sr-Latn-RS" sz="1100" dirty="0"/>
+              <a:t> </a:t>
+            </a:r>
+            <a:r>
+              <a:rPr lang="sr-Latn-RS" sz="1100" dirty="0">
+                <a:solidFill>
+                  <a:srgbClr val="5EEDED"/>
+                </a:solidFill>
+                <a:effectLst/>
+              </a:rPr>
+              <a:t>12</a:t>
+            </a:r>
+            <a:r>
+              <a:rPr lang="sr-Latn-RS" sz="1100" dirty="0">
+                <a:solidFill>
+                  <a:srgbClr val="D3D7DE"/>
+                </a:solidFill>
+                <a:effectLst/>
+              </a:rPr>
+              <a:t>))</a:t>
+            </a:r>
+            <a:r>
+              <a:rPr lang="sr-Latn-RS" sz="1100" dirty="0"/>
+              <a:t> </a:t>
+            </a:r>
+            <a:r>
+              <a:rPr lang="sr-Latn-RS" sz="1100" dirty="0">
+                <a:solidFill>
+                  <a:srgbClr val="D3D7DE"/>
+                </a:solidFill>
+                <a:effectLst/>
+              </a:rPr>
+              <a:t>);</a:t>
+            </a:r>
+            <a:endParaRPr lang="en-US" sz="1100" dirty="0"/>
+          </a:p>
+        </p:txBody>
+      </p:sp>
+    </p:spTree>
+    <p:extLst>
+      <p:ext uri="{BB962C8B-B14F-4D97-AF65-F5344CB8AC3E}">
+        <p14:creationId xmlns:p14="http://schemas.microsoft.com/office/powerpoint/2010/main" val="949286562"/>
+      </p:ext>
+    </p:extLst>
+  </p:cSld>
+  <p:clrMapOvr>
+    <a:masterClrMapping/>
+  </p:clrMapOvr>
+</p:sld>
+</file>
+
+<file path=ppt/slides/slide9.xml><?xml version="1.0" encoding="utf-8"?>
+<p:sld xmlns:a="http://schemas.openxmlformats.org/drawingml/2006/main" xmlns:r="http://schemas.openxmlformats.org/officeDocument/2006/relationships" xmlns:p="http://schemas.openxmlformats.org/presentationml/2006/main">
   <p:cSld name="Slide 8">
     <p:spTree>
       <p:nvGrpSpPr>
@@ -9986,639 +11969,6 @@
         </p:txBody>
       </p:sp>
     </p:spTree>
-  </p:cSld>
-  <p:clrMapOvr>
-    <a:masterClrMapping/>
-  </p:clrMapOvr>
-</p:sld>
-</file>
-
-<file path=ppt/slides/slide9.xml><?xml version="1.0" encoding="utf-8"?>
-<p:sld xmlns:a="http://schemas.openxmlformats.org/drawingml/2006/main" xmlns:r="http://schemas.openxmlformats.org/officeDocument/2006/relationships" xmlns:p="http://schemas.openxmlformats.org/presentationml/2006/main">
-  <p:cSld>
-    <p:spTree>
-      <p:nvGrpSpPr>
-        <p:cNvPr id="1" name="">
-          <a:extLst>
-            <a:ext uri="{FF2B5EF4-FFF2-40B4-BE49-F238E27FC236}">
-              <a16:creationId xmlns:a16="http://schemas.microsoft.com/office/drawing/2014/main" id="{9A3D99D9-6C50-8E24-30F1-B91882191818}"/>
-            </a:ext>
-          </a:extLst>
-        </p:cNvPr>
-        <p:cNvGrpSpPr/>
-        <p:nvPr/>
-      </p:nvGrpSpPr>
-      <p:grpSpPr>
-        <a:xfrm>
-          <a:off x="0" y="0"/>
-          <a:ext cx="0" cy="0"/>
-          <a:chOff x="0" y="0"/>
-          <a:chExt cx="0" cy="0"/>
-        </a:xfrm>
-      </p:grpSpPr>
-      <p:sp>
-        <p:nvSpPr>
-          <p:cNvPr id="2" name="Shape 0">
-            <a:extLst>
-              <a:ext uri="{FF2B5EF4-FFF2-40B4-BE49-F238E27FC236}">
-                <a16:creationId xmlns:a16="http://schemas.microsoft.com/office/drawing/2014/main" id="{457E0A0C-9B78-B496-6B2B-41473E110A19}"/>
-              </a:ext>
-            </a:extLst>
-          </p:cNvPr>
-          <p:cNvSpPr/>
-          <p:nvPr/>
-        </p:nvSpPr>
-        <p:spPr>
-          <a:xfrm>
-            <a:off x="0" y="0"/>
-            <a:ext cx="9144000" cy="713232"/>
-          </a:xfrm>
-          <a:prstGeom prst="rect">
-            <a:avLst/>
-          </a:prstGeom>
-          <a:noFill/>
-          <a:ln w="12700">
-            <a:solidFill>
-              <a:schemeClr val="bg1"/>
-            </a:solidFill>
-            <a:prstDash val="solid"/>
-          </a:ln>
-        </p:spPr>
-      </p:sp>
-      <p:sp>
-        <p:nvSpPr>
-          <p:cNvPr id="3" name="Text 1">
-            <a:extLst>
-              <a:ext uri="{FF2B5EF4-FFF2-40B4-BE49-F238E27FC236}">
-                <a16:creationId xmlns:a16="http://schemas.microsoft.com/office/drawing/2014/main" id="{1DC965D8-4CB6-E3B2-B330-649A594711C3}"/>
-              </a:ext>
-            </a:extLst>
-          </p:cNvPr>
-          <p:cNvSpPr/>
-          <p:nvPr/>
-        </p:nvSpPr>
-        <p:spPr>
-          <a:xfrm>
-            <a:off x="320040" y="0"/>
-            <a:ext cx="8503920" cy="713232"/>
-          </a:xfrm>
-          <a:prstGeom prst="rect">
-            <a:avLst/>
-          </a:prstGeom>
-          <a:noFill/>
-          <a:ln/>
-        </p:spPr>
-        <p:txBody>
-          <a:bodyPr wrap="square" lIns="0" tIns="0" rIns="0" bIns="0" rtlCol="0" anchor="ctr"/>
-          <a:lstStyle/>
-          <a:p>
-            <a:pPr marL="0" indent="0">
-              <a:buNone/>
-            </a:pPr>
-            <a:r>
-              <a:rPr lang="es-ES" sz="2200" b="1" dirty="0" err="1">
-                <a:solidFill>
-                  <a:schemeClr val="accent5">
-                    <a:lumMod val="75000"/>
-                  </a:schemeClr>
-                </a:solidFill>
-                <a:latin typeface="Calibri" pitchFamily="34" charset="0"/>
-                <a:cs typeface="Calibri" pitchFamily="34" charset="-120"/>
-              </a:rPr>
-              <a:t>Scenario</a:t>
-            </a:r>
-            <a:r>
-              <a:rPr lang="es-ES" sz="2200" b="1" dirty="0">
-                <a:solidFill>
-                  <a:schemeClr val="accent5">
-                    <a:lumMod val="75000"/>
-                  </a:schemeClr>
-                </a:solidFill>
-                <a:latin typeface="Calibri" pitchFamily="34" charset="0"/>
-                <a:cs typeface="Calibri" pitchFamily="34" charset="-120"/>
-              </a:rPr>
-              <a:t> 2 – SELECT </a:t>
-            </a:r>
-            <a:r>
-              <a:rPr lang="es-ES" sz="2200" b="1" dirty="0" err="1">
-                <a:solidFill>
-                  <a:schemeClr val="accent5">
-                    <a:lumMod val="75000"/>
-                  </a:schemeClr>
-                </a:solidFill>
-                <a:latin typeface="Calibri" pitchFamily="34" charset="0"/>
-                <a:cs typeface="Calibri" pitchFamily="34" charset="-120"/>
-              </a:rPr>
-              <a:t>sa</a:t>
-            </a:r>
-            <a:r>
-              <a:rPr lang="es-ES" sz="2200" b="1" dirty="0">
-                <a:solidFill>
-                  <a:schemeClr val="accent5">
-                    <a:lumMod val="75000"/>
-                  </a:schemeClr>
-                </a:solidFill>
-                <a:latin typeface="Calibri" pitchFamily="34" charset="0"/>
-                <a:cs typeface="Calibri" pitchFamily="34" charset="-120"/>
-              </a:rPr>
-              <a:t> </a:t>
-            </a:r>
-            <a:r>
-              <a:rPr lang="es-ES" sz="2200" b="1" dirty="0" err="1">
-                <a:solidFill>
-                  <a:schemeClr val="accent5">
-                    <a:lumMod val="75000"/>
-                  </a:schemeClr>
-                </a:solidFill>
-                <a:latin typeface="Calibri" pitchFamily="34" charset="0"/>
-                <a:cs typeface="Calibri" pitchFamily="34" charset="-120"/>
-              </a:rPr>
-              <a:t>dekripcijom</a:t>
-            </a:r>
-            <a:endParaRPr lang="en-US" sz="2200" dirty="0">
-              <a:solidFill>
-                <a:schemeClr val="accent5">
-                  <a:lumMod val="75000"/>
-                </a:schemeClr>
-              </a:solidFill>
-            </a:endParaRPr>
-          </a:p>
-        </p:txBody>
-      </p:sp>
-      <p:sp>
-        <p:nvSpPr>
-          <p:cNvPr id="32" name="Text 3">
-            <a:extLst>
-              <a:ext uri="{FF2B5EF4-FFF2-40B4-BE49-F238E27FC236}">
-                <a16:creationId xmlns:a16="http://schemas.microsoft.com/office/drawing/2014/main" id="{44FBA081-64E2-AA5F-6952-264D5CBC2667}"/>
-              </a:ext>
-            </a:extLst>
-          </p:cNvPr>
-          <p:cNvSpPr/>
-          <p:nvPr/>
-        </p:nvSpPr>
-        <p:spPr>
-          <a:xfrm>
-            <a:off x="241606" y="4118883"/>
-            <a:ext cx="8660787" cy="457200"/>
-          </a:xfrm>
-          <a:prstGeom prst="rect">
-            <a:avLst/>
-          </a:prstGeom>
-          <a:noFill/>
-          <a:ln/>
-        </p:spPr>
-        <p:txBody>
-          <a:bodyPr wrap="square" lIns="0" tIns="0" rIns="0" bIns="0" rtlCol="0" anchor="ctr"/>
-          <a:lstStyle/>
-          <a:p>
-            <a:pPr marL="171450" indent="-171450">
-              <a:buFont typeface="Arial" panose="020B0604020202020204" pitchFamily="34" charset="0"/>
-              <a:buChar char="•"/>
-            </a:pPr>
-            <a:r>
-              <a:rPr lang="en-US" sz="1200" dirty="0" err="1">
-                <a:latin typeface="Calibri" pitchFamily="34" charset="0"/>
-                <a:ea typeface="Calibri" pitchFamily="34" charset="-122"/>
-                <a:cs typeface="Calibri" pitchFamily="34" charset="-120"/>
-              </a:rPr>
-              <a:t>Rezultat</a:t>
-            </a:r>
-            <a:r>
-              <a:rPr lang="en-US" sz="1200" dirty="0">
-                <a:latin typeface="Calibri" pitchFamily="34" charset="0"/>
-                <a:ea typeface="Calibri" pitchFamily="34" charset="-122"/>
-                <a:cs typeface="Calibri" pitchFamily="34" charset="-120"/>
-              </a:rPr>
-              <a:t> </a:t>
-            </a:r>
-            <a:r>
-              <a:rPr lang="en-US" sz="1200" dirty="0" err="1">
-                <a:latin typeface="Calibri" pitchFamily="34" charset="0"/>
-                <a:ea typeface="Calibri" pitchFamily="34" charset="-122"/>
-                <a:cs typeface="Calibri" pitchFamily="34" charset="-120"/>
-              </a:rPr>
-              <a:t>prikazuje</a:t>
-            </a:r>
-            <a:r>
-              <a:rPr lang="en-US" sz="1200" dirty="0">
-                <a:latin typeface="Calibri" pitchFamily="34" charset="0"/>
-                <a:ea typeface="Calibri" pitchFamily="34" charset="-122"/>
-                <a:cs typeface="Calibri" pitchFamily="34" charset="-120"/>
-              </a:rPr>
-              <a:t> </a:t>
-            </a:r>
-            <a:r>
-              <a:rPr lang="en-US" sz="1200" dirty="0" err="1">
-                <a:latin typeface="Calibri" pitchFamily="34" charset="0"/>
-                <a:ea typeface="Calibri" pitchFamily="34" charset="-122"/>
-                <a:cs typeface="Calibri" pitchFamily="34" charset="-120"/>
-              </a:rPr>
-              <a:t>sve</a:t>
-            </a:r>
-            <a:r>
-              <a:rPr lang="en-US" sz="1200" dirty="0">
-                <a:latin typeface="Calibri" pitchFamily="34" charset="0"/>
-                <a:ea typeface="Calibri" pitchFamily="34" charset="-122"/>
-                <a:cs typeface="Calibri" pitchFamily="34" charset="-120"/>
-              </a:rPr>
-              <a:t> tri </a:t>
-            </a:r>
-            <a:r>
-              <a:rPr lang="en-US" sz="1200" dirty="0" err="1">
-                <a:latin typeface="Calibri" pitchFamily="34" charset="0"/>
-                <a:ea typeface="Calibri" pitchFamily="34" charset="-122"/>
-                <a:cs typeface="Calibri" pitchFamily="34" charset="-120"/>
-              </a:rPr>
-              <a:t>vrednosti</a:t>
-            </a:r>
-            <a:r>
-              <a:rPr lang="en-US" sz="1200" dirty="0">
-                <a:latin typeface="Calibri" pitchFamily="34" charset="0"/>
-                <a:ea typeface="Calibri" pitchFamily="34" charset="-122"/>
-                <a:cs typeface="Calibri" pitchFamily="34" charset="-120"/>
-              </a:rPr>
-              <a:t> u plaintext </a:t>
-            </a:r>
-            <a:r>
-              <a:rPr lang="en-US" sz="1200" dirty="0" err="1">
-                <a:latin typeface="Calibri" pitchFamily="34" charset="0"/>
-                <a:ea typeface="Calibri" pitchFamily="34" charset="-122"/>
-                <a:cs typeface="Calibri" pitchFamily="34" charset="-120"/>
-              </a:rPr>
-              <a:t>obliku</a:t>
-            </a:r>
-            <a:r>
-              <a:rPr lang="en-US" sz="1200" dirty="0">
-                <a:latin typeface="Calibri" pitchFamily="34" charset="0"/>
-                <a:ea typeface="Calibri" pitchFamily="34" charset="-122"/>
-                <a:cs typeface="Calibri" pitchFamily="34" charset="-120"/>
-              </a:rPr>
-              <a:t> - JMBG, </a:t>
-            </a:r>
-            <a:r>
-              <a:rPr lang="en-US" sz="1200" dirty="0" err="1">
-                <a:latin typeface="Calibri" pitchFamily="34" charset="0"/>
-                <a:ea typeface="Calibri" pitchFamily="34" charset="-122"/>
-                <a:cs typeface="Calibri" pitchFamily="34" charset="-120"/>
-              </a:rPr>
-              <a:t>broj</a:t>
-            </a:r>
-            <a:r>
-              <a:rPr lang="en-US" sz="1200" dirty="0">
-                <a:latin typeface="Calibri" pitchFamily="34" charset="0"/>
-                <a:ea typeface="Calibri" pitchFamily="34" charset="-122"/>
-                <a:cs typeface="Calibri" pitchFamily="34" charset="-120"/>
-              </a:rPr>
-              <a:t> </a:t>
-            </a:r>
-            <a:r>
-              <a:rPr lang="en-US" sz="1200" dirty="0" err="1">
-                <a:latin typeface="Calibri" pitchFamily="34" charset="0"/>
-                <a:ea typeface="Calibri" pitchFamily="34" charset="-122"/>
-                <a:cs typeface="Calibri" pitchFamily="34" charset="-120"/>
-              </a:rPr>
-              <a:t>kartice</a:t>
-            </a:r>
-            <a:r>
-              <a:rPr lang="en-US" sz="1200" dirty="0">
-                <a:latin typeface="Calibri" pitchFamily="34" charset="0"/>
-                <a:ea typeface="Calibri" pitchFamily="34" charset="-122"/>
-                <a:cs typeface="Calibri" pitchFamily="34" charset="-120"/>
-              </a:rPr>
-              <a:t> </a:t>
-            </a:r>
-            <a:r>
-              <a:rPr lang="en-US" sz="1200" dirty="0" err="1">
-                <a:latin typeface="Calibri" pitchFamily="34" charset="0"/>
-                <a:ea typeface="Calibri" pitchFamily="34" charset="-122"/>
-                <a:cs typeface="Calibri" pitchFamily="34" charset="-120"/>
-              </a:rPr>
-              <a:t>i</a:t>
-            </a:r>
-            <a:r>
-              <a:rPr lang="en-US" sz="1200" dirty="0">
-                <a:latin typeface="Calibri" pitchFamily="34" charset="0"/>
-                <a:ea typeface="Calibri" pitchFamily="34" charset="-122"/>
-                <a:cs typeface="Calibri" pitchFamily="34" charset="-120"/>
-              </a:rPr>
-              <a:t> </a:t>
-            </a:r>
-            <a:r>
-              <a:rPr lang="en-US" sz="1200" dirty="0" err="1">
-                <a:latin typeface="Calibri" pitchFamily="34" charset="0"/>
-                <a:ea typeface="Calibri" pitchFamily="34" charset="-122"/>
-                <a:cs typeface="Calibri" pitchFamily="34" charset="-120"/>
-              </a:rPr>
-              <a:t>bcrypt</a:t>
-            </a:r>
-            <a:r>
-              <a:rPr lang="en-US" sz="1200" dirty="0">
-                <a:latin typeface="Calibri" pitchFamily="34" charset="0"/>
-                <a:ea typeface="Calibri" pitchFamily="34" charset="-122"/>
-                <a:cs typeface="Calibri" pitchFamily="34" charset="-120"/>
-              </a:rPr>
-              <a:t> hash </a:t>
-            </a:r>
-            <a:r>
-              <a:rPr lang="en-US" sz="1200" dirty="0" err="1">
-                <a:latin typeface="Calibri" pitchFamily="34" charset="0"/>
-                <a:ea typeface="Calibri" pitchFamily="34" charset="-122"/>
-                <a:cs typeface="Calibri" pitchFamily="34" charset="-120"/>
-              </a:rPr>
-              <a:t>lozinke</a:t>
-            </a:r>
-            <a:r>
-              <a:rPr lang="en-US" sz="1200" dirty="0">
-                <a:latin typeface="Calibri" pitchFamily="34" charset="0"/>
-                <a:ea typeface="Calibri" pitchFamily="34" charset="-122"/>
-                <a:cs typeface="Calibri" pitchFamily="34" charset="-120"/>
-              </a:rPr>
-              <a:t>. </a:t>
-            </a:r>
-            <a:r>
-              <a:rPr lang="en-US" sz="1200" dirty="0" err="1">
-                <a:latin typeface="Calibri" pitchFamily="34" charset="0"/>
-                <a:ea typeface="Calibri" pitchFamily="34" charset="-122"/>
-                <a:cs typeface="Calibri" pitchFamily="34" charset="-120"/>
-              </a:rPr>
-              <a:t>Lozinka_hash</a:t>
-            </a:r>
-            <a:r>
-              <a:rPr lang="en-US" sz="1200" dirty="0">
-                <a:latin typeface="Calibri" pitchFamily="34" charset="0"/>
-                <a:ea typeface="Calibri" pitchFamily="34" charset="-122"/>
-                <a:cs typeface="Calibri" pitchFamily="34" charset="-120"/>
-              </a:rPr>
-              <a:t> </a:t>
-            </a:r>
-            <a:r>
-              <a:rPr lang="en-US" sz="1200" dirty="0" err="1">
-                <a:latin typeface="Calibri" pitchFamily="34" charset="0"/>
-                <a:ea typeface="Calibri" pitchFamily="34" charset="-122"/>
-                <a:cs typeface="Calibri" pitchFamily="34" charset="-120"/>
-              </a:rPr>
-              <a:t>kolona</a:t>
-            </a:r>
-            <a:r>
-              <a:rPr lang="en-US" sz="1200" dirty="0">
-                <a:latin typeface="Calibri" pitchFamily="34" charset="0"/>
-                <a:ea typeface="Calibri" pitchFamily="34" charset="-122"/>
-                <a:cs typeface="Calibri" pitchFamily="34" charset="-120"/>
-              </a:rPr>
-              <a:t> </a:t>
-            </a:r>
-            <a:r>
-              <a:rPr lang="en-US" sz="1200" dirty="0" err="1">
-                <a:latin typeface="Calibri" pitchFamily="34" charset="0"/>
-                <a:ea typeface="Calibri" pitchFamily="34" charset="-122"/>
-                <a:cs typeface="Calibri" pitchFamily="34" charset="-120"/>
-              </a:rPr>
-              <a:t>ostaje</a:t>
-            </a:r>
-            <a:r>
-              <a:rPr lang="en-US" sz="1200" dirty="0">
-                <a:latin typeface="Calibri" pitchFamily="34" charset="0"/>
-                <a:ea typeface="Calibri" pitchFamily="34" charset="-122"/>
-                <a:cs typeface="Calibri" pitchFamily="34" charset="-120"/>
-              </a:rPr>
-              <a:t> u </a:t>
-            </a:r>
-            <a:r>
-              <a:rPr lang="en-US" sz="1200" dirty="0" err="1">
-                <a:latin typeface="Calibri" pitchFamily="34" charset="0"/>
-                <a:ea typeface="Calibri" pitchFamily="34" charset="-122"/>
-                <a:cs typeface="Calibri" pitchFamily="34" charset="-120"/>
-              </a:rPr>
-              <a:t>heš</a:t>
-            </a:r>
-            <a:r>
-              <a:rPr lang="en-US" sz="1200" dirty="0">
-                <a:latin typeface="Calibri" pitchFamily="34" charset="0"/>
-                <a:ea typeface="Calibri" pitchFamily="34" charset="-122"/>
-                <a:cs typeface="Calibri" pitchFamily="34" charset="-120"/>
-              </a:rPr>
-              <a:t> </a:t>
-            </a:r>
-            <a:r>
-              <a:rPr lang="en-US" sz="1200" dirty="0" err="1">
-                <a:latin typeface="Calibri" pitchFamily="34" charset="0"/>
-                <a:ea typeface="Calibri" pitchFamily="34" charset="-122"/>
-                <a:cs typeface="Calibri" pitchFamily="34" charset="-120"/>
-              </a:rPr>
-              <a:t>obliku</a:t>
-            </a:r>
-            <a:r>
-              <a:rPr lang="en-US" sz="1200" dirty="0">
-                <a:latin typeface="Calibri" pitchFamily="34" charset="0"/>
-                <a:ea typeface="Calibri" pitchFamily="34" charset="-122"/>
-                <a:cs typeface="Calibri" pitchFamily="34" charset="-120"/>
-              </a:rPr>
-              <a:t> </a:t>
-            </a:r>
-            <a:r>
-              <a:rPr lang="en-US" sz="1200" dirty="0" err="1">
-                <a:latin typeface="Calibri" pitchFamily="34" charset="0"/>
-                <a:ea typeface="Calibri" pitchFamily="34" charset="-122"/>
-                <a:cs typeface="Calibri" pitchFamily="34" charset="-120"/>
-              </a:rPr>
-              <a:t>jer</a:t>
-            </a:r>
-            <a:r>
-              <a:rPr lang="en-US" sz="1200" dirty="0">
-                <a:latin typeface="Calibri" pitchFamily="34" charset="0"/>
-                <a:ea typeface="Calibri" pitchFamily="34" charset="-122"/>
-                <a:cs typeface="Calibri" pitchFamily="34" charset="-120"/>
-              </a:rPr>
-              <a:t> se </a:t>
-            </a:r>
-            <a:r>
-              <a:rPr lang="en-US" sz="1200" dirty="0" err="1">
-                <a:latin typeface="Calibri" pitchFamily="34" charset="0"/>
-                <a:ea typeface="Calibri" pitchFamily="34" charset="-122"/>
-                <a:cs typeface="Calibri" pitchFamily="34" charset="-120"/>
-              </a:rPr>
-              <a:t>lozinka</a:t>
-            </a:r>
-            <a:r>
-              <a:rPr lang="en-US" sz="1200" dirty="0">
-                <a:latin typeface="Calibri" pitchFamily="34" charset="0"/>
-                <a:ea typeface="Calibri" pitchFamily="34" charset="-122"/>
-                <a:cs typeface="Calibri" pitchFamily="34" charset="-120"/>
-              </a:rPr>
-              <a:t> </a:t>
-            </a:r>
-            <a:r>
-              <a:rPr lang="en-US" sz="1200" dirty="0" err="1">
-                <a:latin typeface="Calibri" pitchFamily="34" charset="0"/>
-                <a:ea typeface="Calibri" pitchFamily="34" charset="-122"/>
-                <a:cs typeface="Calibri" pitchFamily="34" charset="-120"/>
-              </a:rPr>
-              <a:t>nikada</a:t>
-            </a:r>
-            <a:r>
-              <a:rPr lang="en-US" sz="1200" dirty="0">
-                <a:latin typeface="Calibri" pitchFamily="34" charset="0"/>
-                <a:ea typeface="Calibri" pitchFamily="34" charset="-122"/>
-                <a:cs typeface="Calibri" pitchFamily="34" charset="-120"/>
-              </a:rPr>
-              <a:t> ne </a:t>
-            </a:r>
-            <a:r>
-              <a:rPr lang="en-US" sz="1200" dirty="0" err="1">
-                <a:latin typeface="Calibri" pitchFamily="34" charset="0"/>
-                <a:ea typeface="Calibri" pitchFamily="34" charset="-122"/>
-                <a:cs typeface="Calibri" pitchFamily="34" charset="-120"/>
-              </a:rPr>
-              <a:t>dekriptuje</a:t>
-            </a:r>
-            <a:r>
-              <a:rPr lang="en-US" sz="1200" dirty="0">
-                <a:latin typeface="Calibri" pitchFamily="34" charset="0"/>
-                <a:ea typeface="Calibri" pitchFamily="34" charset="-122"/>
-                <a:cs typeface="Calibri" pitchFamily="34" charset="-120"/>
-              </a:rPr>
-              <a:t>, </a:t>
-            </a:r>
-            <a:r>
-              <a:rPr lang="en-US" sz="1200" dirty="0" err="1">
-                <a:latin typeface="Calibri" pitchFamily="34" charset="0"/>
-                <a:ea typeface="Calibri" pitchFamily="34" charset="-122"/>
-                <a:cs typeface="Calibri" pitchFamily="34" charset="-120"/>
-              </a:rPr>
-              <a:t>već</a:t>
-            </a:r>
-            <a:r>
-              <a:rPr lang="en-US" sz="1200" dirty="0">
-                <a:latin typeface="Calibri" pitchFamily="34" charset="0"/>
-                <a:ea typeface="Calibri" pitchFamily="34" charset="-122"/>
-                <a:cs typeface="Calibri" pitchFamily="34" charset="-120"/>
-              </a:rPr>
-              <a:t> se </a:t>
-            </a:r>
-            <a:r>
-              <a:rPr lang="en-US" sz="1200" dirty="0" err="1">
-                <a:latin typeface="Calibri" pitchFamily="34" charset="0"/>
-                <a:ea typeface="Calibri" pitchFamily="34" charset="-122"/>
-                <a:cs typeface="Calibri" pitchFamily="34" charset="-120"/>
-              </a:rPr>
-              <a:t>samo</a:t>
-            </a:r>
-            <a:r>
-              <a:rPr lang="en-US" sz="1200" dirty="0">
-                <a:latin typeface="Calibri" pitchFamily="34" charset="0"/>
-                <a:ea typeface="Calibri" pitchFamily="34" charset="-122"/>
-                <a:cs typeface="Calibri" pitchFamily="34" charset="-120"/>
-              </a:rPr>
-              <a:t> </a:t>
-            </a:r>
-            <a:r>
-              <a:rPr lang="en-US" sz="1200" dirty="0" err="1">
-                <a:latin typeface="Calibri" pitchFamily="34" charset="0"/>
-                <a:ea typeface="Calibri" pitchFamily="34" charset="-122"/>
-                <a:cs typeface="Calibri" pitchFamily="34" charset="-120"/>
-              </a:rPr>
-              <a:t>poredi</a:t>
-            </a:r>
-            <a:r>
-              <a:rPr lang="en-US" sz="1200" dirty="0">
-                <a:latin typeface="Calibri" pitchFamily="34" charset="0"/>
-                <a:ea typeface="Calibri" pitchFamily="34" charset="-122"/>
-                <a:cs typeface="Calibri" pitchFamily="34" charset="-120"/>
-              </a:rPr>
-              <a:t> </a:t>
-            </a:r>
-            <a:r>
-              <a:rPr lang="en-US" sz="1200" dirty="0" err="1">
-                <a:latin typeface="Calibri" pitchFamily="34" charset="0"/>
-                <a:ea typeface="Calibri" pitchFamily="34" charset="-122"/>
-                <a:cs typeface="Calibri" pitchFamily="34" charset="-120"/>
-              </a:rPr>
-              <a:t>sa</a:t>
-            </a:r>
-            <a:r>
-              <a:rPr lang="en-US" sz="1200" dirty="0">
-                <a:latin typeface="Calibri" pitchFamily="34" charset="0"/>
-                <a:ea typeface="Calibri" pitchFamily="34" charset="-122"/>
-                <a:cs typeface="Calibri" pitchFamily="34" charset="-120"/>
-              </a:rPr>
-              <a:t> </a:t>
-            </a:r>
-            <a:r>
-              <a:rPr lang="en-US" sz="1200" dirty="0" err="1">
-                <a:latin typeface="Calibri" pitchFamily="34" charset="0"/>
-                <a:ea typeface="Calibri" pitchFamily="34" charset="-122"/>
-                <a:cs typeface="Calibri" pitchFamily="34" charset="-120"/>
-              </a:rPr>
-              <a:t>novim</a:t>
-            </a:r>
-            <a:r>
-              <a:rPr lang="en-US" sz="1200" dirty="0">
-                <a:latin typeface="Calibri" pitchFamily="34" charset="0"/>
-                <a:ea typeface="Calibri" pitchFamily="34" charset="-122"/>
-                <a:cs typeface="Calibri" pitchFamily="34" charset="-120"/>
-              </a:rPr>
-              <a:t> </a:t>
-            </a:r>
-            <a:r>
-              <a:rPr lang="en-US" sz="1200" dirty="0" err="1">
-                <a:latin typeface="Calibri" pitchFamily="34" charset="0"/>
-                <a:ea typeface="Calibri" pitchFamily="34" charset="-122"/>
-                <a:cs typeface="Calibri" pitchFamily="34" charset="-120"/>
-              </a:rPr>
-              <a:t>hashom</a:t>
-            </a:r>
-            <a:endParaRPr lang="en-US" sz="1200" dirty="0"/>
-          </a:p>
-        </p:txBody>
-      </p:sp>
-      <p:pic>
-        <p:nvPicPr>
-          <p:cNvPr id="4" name="Picture 3">
-            <a:extLst>
-              <a:ext uri="{FF2B5EF4-FFF2-40B4-BE49-F238E27FC236}">
-                <a16:creationId xmlns:a16="http://schemas.microsoft.com/office/drawing/2014/main" id="{13540218-0717-DA7C-BE17-6F561F0A4E2D}"/>
-              </a:ext>
-            </a:extLst>
-          </p:cNvPr>
-          <p:cNvPicPr>
-            <a:picLocks noChangeAspect="1"/>
-          </p:cNvPicPr>
-          <p:nvPr/>
-        </p:nvPicPr>
-        <p:blipFill>
-          <a:blip r:embed="rId3" cstate="print">
-            <a:extLst>
-              <a:ext uri="{28A0092B-C50C-407E-A947-70E740481C1C}">
-                <a14:useLocalDpi xmlns:a14="http://schemas.microsoft.com/office/drawing/2010/main" val="0"/>
-              </a:ext>
-            </a:extLst>
-          </a:blip>
-          <a:srcRect/>
-          <a:stretch>
-            <a:fillRect/>
-          </a:stretch>
-        </p:blipFill>
-        <p:spPr bwMode="auto">
-          <a:xfrm>
-            <a:off x="320040" y="939799"/>
-            <a:ext cx="8503920" cy="2949629"/>
-          </a:xfrm>
-          <a:prstGeom prst="rect">
-            <a:avLst/>
-          </a:prstGeom>
-          <a:noFill/>
-          <a:ln>
-            <a:noFill/>
-          </a:ln>
-        </p:spPr>
-      </p:pic>
-    </p:spTree>
-    <p:extLst>
-      <p:ext uri="{BB962C8B-B14F-4D97-AF65-F5344CB8AC3E}">
-        <p14:creationId xmlns:p14="http://schemas.microsoft.com/office/powerpoint/2010/main" val="2525910856"/>
-      </p:ext>
-    </p:extLst>
   </p:cSld>
   <p:clrMapOvr>
     <a:masterClrMapping/>

--- a/P2/pgcrypto_prezentacija.pptx
+++ b/P2/pgcrypto_prezentacija.pptx
@@ -2975,623 +2975,7 @@
                 <a:ea typeface="Calibri" pitchFamily="34" charset="-122"/>
                 <a:cs typeface="Calibri" pitchFamily="34" charset="-120"/>
               </a:rPr>
-              <a:t>. </a:t>
-            </a:r>
-            <a:r>
-              <a:rPr lang="en-US" sz="1200" dirty="0" err="1">
-                <a:solidFill>
-                  <a:srgbClr val="0F1B2D"/>
-                </a:solidFill>
-                <a:latin typeface="Calibri" pitchFamily="34" charset="0"/>
-                <a:ea typeface="Calibri" pitchFamily="34" charset="-122"/>
-                <a:cs typeface="Calibri" pitchFamily="34" charset="-120"/>
-              </a:rPr>
-              <a:t>Ključna</a:t>
-            </a:r>
-            <a:r>
-              <a:rPr lang="en-US" sz="1200" dirty="0">
-                <a:solidFill>
-                  <a:srgbClr val="0F1B2D"/>
-                </a:solidFill>
-                <a:latin typeface="Calibri" pitchFamily="34" charset="0"/>
-                <a:ea typeface="Calibri" pitchFamily="34" charset="-122"/>
-                <a:cs typeface="Calibri" pitchFamily="34" charset="-120"/>
-              </a:rPr>
-              <a:t> </a:t>
-            </a:r>
-            <a:r>
-              <a:rPr lang="en-US" sz="1200" dirty="0" err="1">
-                <a:solidFill>
-                  <a:srgbClr val="0F1B2D"/>
-                </a:solidFill>
-                <a:latin typeface="Calibri" pitchFamily="34" charset="0"/>
-                <a:ea typeface="Calibri" pitchFamily="34" charset="-122"/>
-                <a:cs typeface="Calibri" pitchFamily="34" charset="-120"/>
-              </a:rPr>
-              <a:t>karakteristika</a:t>
-            </a:r>
-            <a:r>
-              <a:rPr lang="en-US" sz="1200" dirty="0">
-                <a:solidFill>
-                  <a:srgbClr val="0F1B2D"/>
-                </a:solidFill>
-                <a:latin typeface="Calibri" pitchFamily="34" charset="0"/>
-                <a:ea typeface="Calibri" pitchFamily="34" charset="-122"/>
-                <a:cs typeface="Calibri" pitchFamily="34" charset="-120"/>
-              </a:rPr>
-              <a:t> crypt() </a:t>
-            </a:r>
-            <a:r>
-              <a:rPr lang="en-US" sz="1200" dirty="0" err="1">
-                <a:solidFill>
-                  <a:srgbClr val="0F1B2D"/>
-                </a:solidFill>
-                <a:latin typeface="Calibri" pitchFamily="34" charset="0"/>
-                <a:ea typeface="Calibri" pitchFamily="34" charset="-122"/>
-                <a:cs typeface="Calibri" pitchFamily="34" charset="-120"/>
-              </a:rPr>
-              <a:t>funkcije</a:t>
-            </a:r>
-            <a:r>
-              <a:rPr lang="en-US" sz="1200" dirty="0">
-                <a:solidFill>
-                  <a:srgbClr val="0F1B2D"/>
-                </a:solidFill>
-                <a:latin typeface="Calibri" pitchFamily="34" charset="0"/>
-                <a:ea typeface="Calibri" pitchFamily="34" charset="-122"/>
-                <a:cs typeface="Calibri" pitchFamily="34" charset="-120"/>
-              </a:rPr>
-              <a:t> je </a:t>
-            </a:r>
-            <a:r>
-              <a:rPr lang="en-US" sz="1200" dirty="0" err="1">
-                <a:solidFill>
-                  <a:srgbClr val="0F1B2D"/>
-                </a:solidFill>
-                <a:latin typeface="Calibri" pitchFamily="34" charset="0"/>
-                <a:ea typeface="Calibri" pitchFamily="34" charset="-122"/>
-                <a:cs typeface="Calibri" pitchFamily="34" charset="-120"/>
-              </a:rPr>
-              <a:t>sledeća</a:t>
-            </a:r>
-            <a:r>
-              <a:rPr lang="en-US" sz="1200" dirty="0">
-                <a:solidFill>
-                  <a:srgbClr val="0F1B2D"/>
-                </a:solidFill>
-                <a:latin typeface="Calibri" pitchFamily="34" charset="0"/>
-                <a:ea typeface="Calibri" pitchFamily="34" charset="-122"/>
-                <a:cs typeface="Calibri" pitchFamily="34" charset="-120"/>
-              </a:rPr>
-              <a:t>: </a:t>
-            </a:r>
-            <a:r>
-              <a:rPr lang="en-US" sz="1200" dirty="0" err="1">
-                <a:solidFill>
-                  <a:srgbClr val="0F1B2D"/>
-                </a:solidFill>
-                <a:latin typeface="Calibri" pitchFamily="34" charset="0"/>
-                <a:ea typeface="Calibri" pitchFamily="34" charset="-122"/>
-                <a:cs typeface="Calibri" pitchFamily="34" charset="-120"/>
-              </a:rPr>
-              <a:t>kada</a:t>
-            </a:r>
-            <a:r>
-              <a:rPr lang="en-US" sz="1200" dirty="0">
-                <a:solidFill>
-                  <a:srgbClr val="0F1B2D"/>
-                </a:solidFill>
-                <a:latin typeface="Calibri" pitchFamily="34" charset="0"/>
-                <a:ea typeface="Calibri" pitchFamily="34" charset="-122"/>
-                <a:cs typeface="Calibri" pitchFamily="34" charset="-120"/>
-              </a:rPr>
-              <a:t> se </a:t>
-            </a:r>
-            <a:r>
-              <a:rPr lang="en-US" sz="1200" dirty="0" err="1">
-                <a:solidFill>
-                  <a:srgbClr val="0F1B2D"/>
-                </a:solidFill>
-                <a:latin typeface="Calibri" pitchFamily="34" charset="0"/>
-                <a:ea typeface="Calibri" pitchFamily="34" charset="-122"/>
-                <a:cs typeface="Calibri" pitchFamily="34" charset="-120"/>
-              </a:rPr>
-              <a:t>kao</a:t>
-            </a:r>
-            <a:r>
-              <a:rPr lang="en-US" sz="1200" dirty="0">
-                <a:solidFill>
-                  <a:srgbClr val="0F1B2D"/>
-                </a:solidFill>
-                <a:latin typeface="Calibri" pitchFamily="34" charset="0"/>
-                <a:ea typeface="Calibri" pitchFamily="34" charset="-122"/>
-                <a:cs typeface="Calibri" pitchFamily="34" charset="-120"/>
-              </a:rPr>
-              <a:t> </a:t>
-            </a:r>
-            <a:r>
-              <a:rPr lang="en-US" sz="1200" dirty="0" err="1">
-                <a:solidFill>
-                  <a:srgbClr val="0F1B2D"/>
-                </a:solidFill>
-                <a:latin typeface="Calibri" pitchFamily="34" charset="0"/>
-                <a:ea typeface="Calibri" pitchFamily="34" charset="-122"/>
-                <a:cs typeface="Calibri" pitchFamily="34" charset="-120"/>
-              </a:rPr>
-              <a:t>drugi</a:t>
-            </a:r>
-            <a:r>
-              <a:rPr lang="en-US" sz="1200" dirty="0">
-                <a:solidFill>
-                  <a:srgbClr val="0F1B2D"/>
-                </a:solidFill>
-                <a:latin typeface="Calibri" pitchFamily="34" charset="0"/>
-                <a:ea typeface="Calibri" pitchFamily="34" charset="-122"/>
-                <a:cs typeface="Calibri" pitchFamily="34" charset="-120"/>
-              </a:rPr>
-              <a:t> argument </a:t>
-            </a:r>
-            <a:r>
-              <a:rPr lang="en-US" sz="1200" dirty="0" err="1">
-                <a:solidFill>
-                  <a:srgbClr val="0F1B2D"/>
-                </a:solidFill>
-                <a:latin typeface="Calibri" pitchFamily="34" charset="0"/>
-                <a:ea typeface="Calibri" pitchFamily="34" charset="-122"/>
-                <a:cs typeface="Calibri" pitchFamily="34" charset="-120"/>
-              </a:rPr>
-              <a:t>prosledi</a:t>
-            </a:r>
-            <a:r>
-              <a:rPr lang="en-US" sz="1200" dirty="0">
-                <a:solidFill>
-                  <a:srgbClr val="0F1B2D"/>
-                </a:solidFill>
-                <a:latin typeface="Calibri" pitchFamily="34" charset="0"/>
-                <a:ea typeface="Calibri" pitchFamily="34" charset="-122"/>
-                <a:cs typeface="Calibri" pitchFamily="34" charset="-120"/>
-              </a:rPr>
-              <a:t> </a:t>
-            </a:r>
-            <a:r>
-              <a:rPr lang="en-US" sz="1200" dirty="0" err="1">
-                <a:solidFill>
-                  <a:srgbClr val="0F1B2D"/>
-                </a:solidFill>
-                <a:latin typeface="Calibri" pitchFamily="34" charset="0"/>
-                <a:ea typeface="Calibri" pitchFamily="34" charset="-122"/>
-                <a:cs typeface="Calibri" pitchFamily="34" charset="-120"/>
-              </a:rPr>
-              <a:t>sačuvani</a:t>
-            </a:r>
-            <a:r>
-              <a:rPr lang="en-US" sz="1200" dirty="0">
-                <a:solidFill>
-                  <a:srgbClr val="0F1B2D"/>
-                </a:solidFill>
-                <a:latin typeface="Calibri" pitchFamily="34" charset="0"/>
-                <a:ea typeface="Calibri" pitchFamily="34" charset="-122"/>
-                <a:cs typeface="Calibri" pitchFamily="34" charset="-120"/>
-              </a:rPr>
-              <a:t> hash (</a:t>
-            </a:r>
-            <a:r>
-              <a:rPr lang="en-US" sz="1200" dirty="0" err="1">
-                <a:solidFill>
-                  <a:srgbClr val="0F1B2D"/>
-                </a:solidFill>
-                <a:latin typeface="Calibri" pitchFamily="34" charset="0"/>
-                <a:ea typeface="Calibri" pitchFamily="34" charset="-122"/>
-                <a:cs typeface="Calibri" pitchFamily="34" charset="-120"/>
-              </a:rPr>
-              <a:t>umesto</a:t>
-            </a:r>
-            <a:r>
-              <a:rPr lang="en-US" sz="1200" dirty="0">
-                <a:solidFill>
-                  <a:srgbClr val="0F1B2D"/>
-                </a:solidFill>
-                <a:latin typeface="Calibri" pitchFamily="34" charset="0"/>
-                <a:ea typeface="Calibri" pitchFamily="34" charset="-122"/>
-                <a:cs typeface="Calibri" pitchFamily="34" charset="-120"/>
-              </a:rPr>
-              <a:t> soli), </a:t>
-            </a:r>
-            <a:r>
-              <a:rPr lang="en-US" sz="1200" dirty="0" err="1">
-                <a:solidFill>
-                  <a:srgbClr val="0F1B2D"/>
-                </a:solidFill>
-                <a:latin typeface="Calibri" pitchFamily="34" charset="0"/>
-                <a:ea typeface="Calibri" pitchFamily="34" charset="-122"/>
-                <a:cs typeface="Calibri" pitchFamily="34" charset="-120"/>
-              </a:rPr>
-              <a:t>funkcija</a:t>
-            </a:r>
-            <a:r>
-              <a:rPr lang="en-US" sz="1200" dirty="0">
-                <a:solidFill>
-                  <a:srgbClr val="0F1B2D"/>
-                </a:solidFill>
-                <a:latin typeface="Calibri" pitchFamily="34" charset="0"/>
-                <a:ea typeface="Calibri" pitchFamily="34" charset="-122"/>
-                <a:cs typeface="Calibri" pitchFamily="34" charset="-120"/>
-              </a:rPr>
-              <a:t> </a:t>
-            </a:r>
-            <a:r>
-              <a:rPr lang="en-US" sz="1200" dirty="0" err="1">
-                <a:solidFill>
-                  <a:srgbClr val="0F1B2D"/>
-                </a:solidFill>
-                <a:latin typeface="Calibri" pitchFamily="34" charset="0"/>
-                <a:ea typeface="Calibri" pitchFamily="34" charset="-122"/>
-                <a:cs typeface="Calibri" pitchFamily="34" charset="-120"/>
-              </a:rPr>
-              <a:t>automatski</a:t>
-            </a:r>
-            <a:r>
-              <a:rPr lang="en-US" sz="1200" dirty="0">
-                <a:solidFill>
-                  <a:srgbClr val="0F1B2D"/>
-                </a:solidFill>
-                <a:latin typeface="Calibri" pitchFamily="34" charset="0"/>
-                <a:ea typeface="Calibri" pitchFamily="34" charset="-122"/>
-                <a:cs typeface="Calibri" pitchFamily="34" charset="-120"/>
-              </a:rPr>
-              <a:t> </a:t>
-            </a:r>
-            <a:r>
-              <a:rPr lang="en-US" sz="1200" dirty="0" err="1">
-                <a:solidFill>
-                  <a:srgbClr val="0F1B2D"/>
-                </a:solidFill>
-                <a:latin typeface="Calibri" pitchFamily="34" charset="0"/>
-                <a:ea typeface="Calibri" pitchFamily="34" charset="-122"/>
-                <a:cs typeface="Calibri" pitchFamily="34" charset="-120"/>
-              </a:rPr>
-              <a:t>izvlači</a:t>
-            </a:r>
-            <a:r>
-              <a:rPr lang="en-US" sz="1200" dirty="0">
-                <a:solidFill>
-                  <a:srgbClr val="0F1B2D"/>
-                </a:solidFill>
-                <a:latin typeface="Calibri" pitchFamily="34" charset="0"/>
-                <a:ea typeface="Calibri" pitchFamily="34" charset="-122"/>
-                <a:cs typeface="Calibri" pitchFamily="34" charset="-120"/>
-              </a:rPr>
-              <a:t> salt </a:t>
-            </a:r>
-            <a:r>
-              <a:rPr lang="en-US" sz="1200" dirty="0" err="1">
-                <a:solidFill>
-                  <a:srgbClr val="0F1B2D"/>
-                </a:solidFill>
-                <a:latin typeface="Calibri" pitchFamily="34" charset="0"/>
-                <a:ea typeface="Calibri" pitchFamily="34" charset="-122"/>
-                <a:cs typeface="Calibri" pitchFamily="34" charset="-120"/>
-              </a:rPr>
-              <a:t>iz</a:t>
-            </a:r>
-            <a:r>
-              <a:rPr lang="en-US" sz="1200" dirty="0">
-                <a:solidFill>
-                  <a:srgbClr val="0F1B2D"/>
-                </a:solidFill>
-                <a:latin typeface="Calibri" pitchFamily="34" charset="0"/>
-                <a:ea typeface="Calibri" pitchFamily="34" charset="-122"/>
-                <a:cs typeface="Calibri" pitchFamily="34" charset="-120"/>
-              </a:rPr>
-              <a:t> </a:t>
-            </a:r>
-            <a:r>
-              <a:rPr lang="en-US" sz="1200" dirty="0" err="1">
-                <a:solidFill>
-                  <a:srgbClr val="0F1B2D"/>
-                </a:solidFill>
-                <a:latin typeface="Calibri" pitchFamily="34" charset="0"/>
-                <a:ea typeface="Calibri" pitchFamily="34" charset="-122"/>
-                <a:cs typeface="Calibri" pitchFamily="34" charset="-120"/>
-              </a:rPr>
-              <a:t>hasha</a:t>
-            </a:r>
-            <a:r>
-              <a:rPr lang="en-US" sz="1200" dirty="0">
-                <a:solidFill>
-                  <a:srgbClr val="0F1B2D"/>
-                </a:solidFill>
-                <a:latin typeface="Calibri" pitchFamily="34" charset="0"/>
-                <a:ea typeface="Calibri" pitchFamily="34" charset="-122"/>
-                <a:cs typeface="Calibri" pitchFamily="34" charset="-120"/>
-              </a:rPr>
-              <a:t> </a:t>
-            </a:r>
-            <a:r>
-              <a:rPr lang="en-US" sz="1200" dirty="0" err="1">
-                <a:solidFill>
-                  <a:srgbClr val="0F1B2D"/>
-                </a:solidFill>
-                <a:latin typeface="Calibri" pitchFamily="34" charset="0"/>
-                <a:ea typeface="Calibri" pitchFamily="34" charset="-122"/>
-                <a:cs typeface="Calibri" pitchFamily="34" charset="-120"/>
-              </a:rPr>
-              <a:t>i</a:t>
-            </a:r>
-            <a:r>
-              <a:rPr lang="en-US" sz="1200" dirty="0">
-                <a:solidFill>
-                  <a:srgbClr val="0F1B2D"/>
-                </a:solidFill>
-                <a:latin typeface="Calibri" pitchFamily="34" charset="0"/>
-                <a:ea typeface="Calibri" pitchFamily="34" charset="-122"/>
-                <a:cs typeface="Calibri" pitchFamily="34" charset="-120"/>
-              </a:rPr>
-              <a:t> </a:t>
-            </a:r>
-            <a:r>
-              <a:rPr lang="en-US" sz="1200" dirty="0" err="1">
-                <a:solidFill>
-                  <a:srgbClr val="0F1B2D"/>
-                </a:solidFill>
-                <a:latin typeface="Calibri" pitchFamily="34" charset="0"/>
-                <a:ea typeface="Calibri" pitchFamily="34" charset="-122"/>
-                <a:cs typeface="Calibri" pitchFamily="34" charset="-120"/>
-              </a:rPr>
-              <a:t>primenjuje</a:t>
-            </a:r>
-            <a:r>
-              <a:rPr lang="en-US" sz="1200" dirty="0">
-                <a:solidFill>
-                  <a:srgbClr val="0F1B2D"/>
-                </a:solidFill>
-                <a:latin typeface="Calibri" pitchFamily="34" charset="0"/>
-                <a:ea typeface="Calibri" pitchFamily="34" charset="-122"/>
-                <a:cs typeface="Calibri" pitchFamily="34" charset="-120"/>
-              </a:rPr>
-              <a:t> </a:t>
-            </a:r>
-            <a:r>
-              <a:rPr lang="en-US" sz="1200" dirty="0" err="1">
-                <a:solidFill>
-                  <a:srgbClr val="0F1B2D"/>
-                </a:solidFill>
-                <a:latin typeface="Calibri" pitchFamily="34" charset="0"/>
-                <a:ea typeface="Calibri" pitchFamily="34" charset="-122"/>
-                <a:cs typeface="Calibri" pitchFamily="34" charset="-120"/>
-              </a:rPr>
-              <a:t>isti</a:t>
-            </a:r>
-            <a:r>
-              <a:rPr lang="en-US" sz="1200" dirty="0">
-                <a:solidFill>
-                  <a:srgbClr val="0F1B2D"/>
-                </a:solidFill>
-                <a:latin typeface="Calibri" pitchFamily="34" charset="0"/>
-                <a:ea typeface="Calibri" pitchFamily="34" charset="-122"/>
-                <a:cs typeface="Calibri" pitchFamily="34" charset="-120"/>
-              </a:rPr>
-              <a:t> </a:t>
-            </a:r>
-            <a:r>
-              <a:rPr lang="en-US" sz="1200" dirty="0" err="1">
-                <a:solidFill>
-                  <a:srgbClr val="0F1B2D"/>
-                </a:solidFill>
-                <a:latin typeface="Calibri" pitchFamily="34" charset="0"/>
-                <a:ea typeface="Calibri" pitchFamily="34" charset="-122"/>
-                <a:cs typeface="Calibri" pitchFamily="34" charset="-120"/>
-              </a:rPr>
-              <a:t>bcrypt</a:t>
-            </a:r>
-            <a:r>
-              <a:rPr lang="en-US" sz="1200" dirty="0">
-                <a:solidFill>
-                  <a:srgbClr val="0F1B2D"/>
-                </a:solidFill>
-                <a:latin typeface="Calibri" pitchFamily="34" charset="0"/>
-                <a:ea typeface="Calibri" pitchFamily="34" charset="-122"/>
-                <a:cs typeface="Calibri" pitchFamily="34" charset="-120"/>
-              </a:rPr>
-              <a:t> </a:t>
-            </a:r>
-            <a:r>
-              <a:rPr lang="en-US" sz="1200" dirty="0" err="1">
-                <a:solidFill>
-                  <a:srgbClr val="0F1B2D"/>
-                </a:solidFill>
-                <a:latin typeface="Calibri" pitchFamily="34" charset="0"/>
-                <a:ea typeface="Calibri" pitchFamily="34" charset="-122"/>
-                <a:cs typeface="Calibri" pitchFamily="34" charset="-120"/>
-              </a:rPr>
-              <a:t>proces</a:t>
-            </a:r>
-            <a:r>
-              <a:rPr lang="en-US" sz="1200" dirty="0">
-                <a:solidFill>
-                  <a:srgbClr val="0F1B2D"/>
-                </a:solidFill>
-                <a:latin typeface="Calibri" pitchFamily="34" charset="0"/>
-                <a:ea typeface="Calibri" pitchFamily="34" charset="-122"/>
-                <a:cs typeface="Calibri" pitchFamily="34" charset="-120"/>
-              </a:rPr>
-              <a:t> </a:t>
-            </a:r>
-            <a:r>
-              <a:rPr lang="en-US" sz="1200" dirty="0" err="1">
-                <a:solidFill>
-                  <a:srgbClr val="0F1B2D"/>
-                </a:solidFill>
-                <a:latin typeface="Calibri" pitchFamily="34" charset="0"/>
-                <a:ea typeface="Calibri" pitchFamily="34" charset="-122"/>
-                <a:cs typeface="Calibri" pitchFamily="34" charset="-120"/>
-              </a:rPr>
-              <a:t>na</a:t>
-            </a:r>
-            <a:r>
-              <a:rPr lang="en-US" sz="1200" dirty="0">
-                <a:solidFill>
-                  <a:srgbClr val="0F1B2D"/>
-                </a:solidFill>
-                <a:latin typeface="Calibri" pitchFamily="34" charset="0"/>
-                <a:ea typeface="Calibri" pitchFamily="34" charset="-122"/>
-                <a:cs typeface="Calibri" pitchFamily="34" charset="-120"/>
-              </a:rPr>
-              <a:t> </a:t>
-            </a:r>
-            <a:r>
-              <a:rPr lang="en-US" sz="1200" dirty="0" err="1">
-                <a:solidFill>
-                  <a:srgbClr val="0F1B2D"/>
-                </a:solidFill>
-                <a:latin typeface="Calibri" pitchFamily="34" charset="0"/>
-                <a:ea typeface="Calibri" pitchFamily="34" charset="-122"/>
-                <a:cs typeface="Calibri" pitchFamily="34" charset="-120"/>
-              </a:rPr>
-              <a:t>unešenu</a:t>
-            </a:r>
-            <a:r>
-              <a:rPr lang="en-US" sz="1200" dirty="0">
-                <a:solidFill>
-                  <a:srgbClr val="0F1B2D"/>
-                </a:solidFill>
-                <a:latin typeface="Calibri" pitchFamily="34" charset="0"/>
-                <a:ea typeface="Calibri" pitchFamily="34" charset="-122"/>
-                <a:cs typeface="Calibri" pitchFamily="34" charset="-120"/>
-              </a:rPr>
-              <a:t> </a:t>
-            </a:r>
-            <a:r>
-              <a:rPr lang="en-US" sz="1200" dirty="0" err="1">
-                <a:solidFill>
-                  <a:srgbClr val="0F1B2D"/>
-                </a:solidFill>
-                <a:latin typeface="Calibri" pitchFamily="34" charset="0"/>
-                <a:ea typeface="Calibri" pitchFamily="34" charset="-122"/>
-                <a:cs typeface="Calibri" pitchFamily="34" charset="-120"/>
-              </a:rPr>
-              <a:t>lozinku</a:t>
-            </a:r>
-            <a:r>
-              <a:rPr lang="en-US" sz="1200" dirty="0">
-                <a:solidFill>
-                  <a:srgbClr val="0F1B2D"/>
-                </a:solidFill>
-                <a:latin typeface="Calibri" pitchFamily="34" charset="0"/>
-                <a:ea typeface="Calibri" pitchFamily="34" charset="-122"/>
-                <a:cs typeface="Calibri" pitchFamily="34" charset="-120"/>
-              </a:rPr>
-              <a:t>. Ovo </a:t>
-            </a:r>
-            <a:r>
-              <a:rPr lang="en-US" sz="1200" dirty="0" err="1">
-                <a:solidFill>
-                  <a:srgbClr val="0F1B2D"/>
-                </a:solidFill>
-                <a:latin typeface="Calibri" pitchFamily="34" charset="0"/>
-                <a:ea typeface="Calibri" pitchFamily="34" charset="-122"/>
-                <a:cs typeface="Calibri" pitchFamily="34" charset="-120"/>
-              </a:rPr>
-              <a:t>omogućava</a:t>
-            </a:r>
-            <a:r>
-              <a:rPr lang="en-US" sz="1200" dirty="0">
-                <a:solidFill>
-                  <a:srgbClr val="0F1B2D"/>
-                </a:solidFill>
-                <a:latin typeface="Calibri" pitchFamily="34" charset="0"/>
-                <a:ea typeface="Calibri" pitchFamily="34" charset="-122"/>
-                <a:cs typeface="Calibri" pitchFamily="34" charset="-120"/>
-              </a:rPr>
-              <a:t> </a:t>
-            </a:r>
-            <a:r>
-              <a:rPr lang="en-US" sz="1200" dirty="0" err="1">
-                <a:solidFill>
-                  <a:srgbClr val="0F1B2D"/>
-                </a:solidFill>
-                <a:latin typeface="Calibri" pitchFamily="34" charset="0"/>
-                <a:ea typeface="Calibri" pitchFamily="34" charset="-122"/>
-                <a:cs typeface="Calibri" pitchFamily="34" charset="-120"/>
-              </a:rPr>
-              <a:t>poređenje</a:t>
-            </a:r>
-            <a:r>
-              <a:rPr lang="en-US" sz="1200" dirty="0">
-                <a:solidFill>
-                  <a:srgbClr val="0F1B2D"/>
-                </a:solidFill>
-                <a:latin typeface="Calibri" pitchFamily="34" charset="0"/>
-                <a:ea typeface="Calibri" pitchFamily="34" charset="-122"/>
-                <a:cs typeface="Calibri" pitchFamily="34" charset="-120"/>
-              </a:rPr>
-              <a:t> bez </a:t>
-            </a:r>
-            <a:r>
-              <a:rPr lang="en-US" sz="1200" dirty="0" err="1">
-                <a:solidFill>
-                  <a:srgbClr val="0F1B2D"/>
-                </a:solidFill>
-                <a:latin typeface="Calibri" pitchFamily="34" charset="0"/>
-                <a:ea typeface="Calibri" pitchFamily="34" charset="-122"/>
-                <a:cs typeface="Calibri" pitchFamily="34" charset="-120"/>
-              </a:rPr>
-              <a:t>potrebe</a:t>
-            </a:r>
-            <a:r>
-              <a:rPr lang="en-US" sz="1200" dirty="0">
-                <a:solidFill>
-                  <a:srgbClr val="0F1B2D"/>
-                </a:solidFill>
-                <a:latin typeface="Calibri" pitchFamily="34" charset="0"/>
-                <a:ea typeface="Calibri" pitchFamily="34" charset="-122"/>
-                <a:cs typeface="Calibri" pitchFamily="34" charset="-120"/>
-              </a:rPr>
-              <a:t> za </a:t>
-            </a:r>
-            <a:r>
-              <a:rPr lang="en-US" sz="1200" dirty="0" err="1">
-                <a:solidFill>
-                  <a:srgbClr val="0F1B2D"/>
-                </a:solidFill>
-                <a:latin typeface="Calibri" pitchFamily="34" charset="0"/>
-                <a:ea typeface="Calibri" pitchFamily="34" charset="-122"/>
-                <a:cs typeface="Calibri" pitchFamily="34" charset="-120"/>
-              </a:rPr>
-              <a:t>zasebnim</a:t>
-            </a:r>
-            <a:r>
-              <a:rPr lang="en-US" sz="1200" dirty="0">
-                <a:solidFill>
-                  <a:srgbClr val="0F1B2D"/>
-                </a:solidFill>
-                <a:latin typeface="Calibri" pitchFamily="34" charset="0"/>
-                <a:ea typeface="Calibri" pitchFamily="34" charset="-122"/>
-                <a:cs typeface="Calibri" pitchFamily="34" charset="-120"/>
-              </a:rPr>
-              <a:t> </a:t>
-            </a:r>
-            <a:r>
-              <a:rPr lang="en-US" sz="1200" dirty="0" err="1">
-                <a:solidFill>
-                  <a:srgbClr val="0F1B2D"/>
-                </a:solidFill>
-                <a:latin typeface="Calibri" pitchFamily="34" charset="0"/>
-                <a:ea typeface="Calibri" pitchFamily="34" charset="-122"/>
-                <a:cs typeface="Calibri" pitchFamily="34" charset="-120"/>
-              </a:rPr>
-              <a:t>čuvanjem</a:t>
-            </a:r>
-            <a:r>
-              <a:rPr lang="en-US" sz="1200" dirty="0">
-                <a:solidFill>
-                  <a:srgbClr val="0F1B2D"/>
-                </a:solidFill>
-                <a:latin typeface="Calibri" pitchFamily="34" charset="0"/>
-                <a:ea typeface="Calibri" pitchFamily="34" charset="-122"/>
-                <a:cs typeface="Calibri" pitchFamily="34" charset="-120"/>
-              </a:rPr>
-              <a:t> soli</a:t>
+              <a:t>.</a:t>
             </a:r>
             <a:endParaRPr lang="en-US" sz="1200" dirty="0"/>
           </a:p>
@@ -5517,24 +4901,6 @@
             </a:r>
             <a:endParaRPr lang="en-US" sz="1200" dirty="0"/>
           </a:p>
-          <a:p>
-            <a:pPr marL="342900" indent="-342900">
-              <a:lnSpc>
-                <a:spcPct val="150000"/>
-              </a:lnSpc>
-              <a:buSzPct val="100000"/>
-              <a:buChar char="•"/>
-            </a:pPr>
-            <a:r>
-              <a:rPr lang="en-US" sz="1200" dirty="0">
-                <a:latin typeface="Calibri" pitchFamily="34" charset="0"/>
-                <a:ea typeface="Calibri" pitchFamily="34" charset="-122"/>
-                <a:cs typeface="Calibri" pitchFamily="34" charset="-120"/>
-              </a:rPr>
-              <a:t>Štiti od kompromitacije SQL interfejsa</a:t>
-            </a:r>
-            <a:endParaRPr lang="en-US" sz="1200" dirty="0"/>
-          </a:p>
         </p:txBody>
       </p:sp>
     </p:spTree>
@@ -6608,7 +5974,7 @@
                 <a:ea typeface="Calibri" pitchFamily="34" charset="-122"/>
                 <a:cs typeface="Calibri" pitchFamily="34" charset="-120"/>
               </a:rPr>
-              <a:t>ECB mode </a:t>
+              <a:t>ECB (Electronic Codebook) mode </a:t>
             </a:r>
             <a:r>
               <a:rPr lang="en-US" sz="1100" dirty="0" err="1">
@@ -7121,22 +6487,23 @@
                 <a:ea typeface="Calibri" pitchFamily="34" charset="-122"/>
                 <a:cs typeface="Calibri" pitchFamily="34" charset="-120"/>
               </a:rPr>
-              <a:t>14 rundi transformacija (SubBytes, ShiftRows, MixColumns, AddRoundKey)</a:t>
-            </a:r>
-            <a:endParaRPr lang="en-US" sz="1200" dirty="0"/>
-          </a:p>
-          <a:p>
-            <a:pPr marL="342900" indent="-342900">
-              <a:buSzPct val="100000"/>
-              <a:buChar char="•"/>
-            </a:pPr>
-            <a:r>
-              <a:rPr lang="en-US" sz="1200" dirty="0">
-                <a:latin typeface="Calibri" pitchFamily="34" charset="0"/>
-                <a:ea typeface="Calibri" pitchFamily="34" charset="-122"/>
-                <a:cs typeface="Calibri" pitchFamily="34" charset="-120"/>
-              </a:rPr>
-              <a:t>pgcrypto PGP koristi CFB mode – nema ponavljanja obrazaca</a:t>
+              <a:t>14 rundi transformacija (SubBytes, ShiftRows, MixColumns, </a:t>
+            </a:r>
+            <a:r>
+              <a:rPr lang="en-US" sz="1200" dirty="0" err="1">
+                <a:latin typeface="Calibri" pitchFamily="34" charset="0"/>
+                <a:ea typeface="Calibri" pitchFamily="34" charset="-122"/>
+                <a:cs typeface="Calibri" pitchFamily="34" charset="-120"/>
+              </a:rPr>
+              <a:t>AddRoundKey</a:t>
+            </a:r>
+            <a:r>
+              <a:rPr lang="en-US" sz="1200" dirty="0">
+                <a:latin typeface="Calibri" pitchFamily="34" charset="0"/>
+                <a:ea typeface="Calibri" pitchFamily="34" charset="-122"/>
+                <a:cs typeface="Calibri" pitchFamily="34" charset="-120"/>
+              </a:rPr>
+              <a:t>)</a:t>
             </a:r>
             <a:endParaRPr lang="en-US" sz="1200" dirty="0"/>
           </a:p>
@@ -7647,22 +7014,15 @@
                 <a:ea typeface="Calibri" pitchFamily="34" charset="-122"/>
                 <a:cs typeface="Calibri" pitchFamily="34" charset="-120"/>
               </a:rPr>
-              <a:t>pgcrypto: pgp_pub_encrypt / pgp_pub_decrypt</a:t>
-            </a:r>
-            <a:endParaRPr lang="en-US" sz="1200" dirty="0"/>
-          </a:p>
-          <a:p>
-            <a:pPr marL="342900" indent="-342900">
-              <a:buSzPct val="100000"/>
-              <a:buChar char="•"/>
-            </a:pPr>
-            <a:r>
-              <a:rPr lang="en-US" sz="1200" dirty="0">
-                <a:latin typeface="Calibri" pitchFamily="34" charset="0"/>
-                <a:ea typeface="Calibri" pitchFamily="34" charset="-122"/>
-                <a:cs typeface="Calibri" pitchFamily="34" charset="-120"/>
-              </a:rPr>
-              <a:t>RSA ključevi kroz OpenPGP format (dearmor())</a:t>
+              <a:t>pgcrypto: pgp_pub_encrypt / </a:t>
+            </a:r>
+            <a:r>
+              <a:rPr lang="en-US" sz="1200" dirty="0" err="1">
+                <a:latin typeface="Calibri" pitchFamily="34" charset="0"/>
+                <a:ea typeface="Calibri" pitchFamily="34" charset="-122"/>
+                <a:cs typeface="Calibri" pitchFamily="34" charset="-120"/>
+              </a:rPr>
+              <a:t>pgp_pub_decrypt</a:t>
             </a:r>
             <a:endParaRPr lang="en-US" sz="1200" dirty="0"/>
           </a:p>

--- a/P2/pgcrypto_prezentacija.pptx
+++ b/P2/pgcrypto_prezentacija.pptx
@@ -9635,7 +9635,33 @@
                 <a:ea typeface="Calibri" pitchFamily="34" charset="-122"/>
                 <a:cs typeface="Calibri" pitchFamily="34" charset="-120"/>
               </a:rPr>
-              <a:t>okruzenja</a:t>
+              <a:t>okru</a:t>
+            </a:r>
+            <a:r>
+              <a:rPr lang="sr-Latn-RS" sz="2200" b="1" dirty="0">
+                <a:solidFill>
+                  <a:schemeClr val="accent5">
+                    <a:lumMod val="75000"/>
+                  </a:schemeClr>
+                </a:solidFill>
+                <a:latin typeface="Calibri" pitchFamily="34" charset="0"/>
+                <a:ea typeface="Calibri" pitchFamily="34" charset="-122"/>
+                <a:cs typeface="Calibri" pitchFamily="34" charset="-120"/>
+              </a:rPr>
+              <a:t>ž</a:t>
+            </a:r>
+            <a:r>
+              <a:rPr lang="en-US" sz="2200" b="1" dirty="0" err="1">
+                <a:solidFill>
+                  <a:schemeClr val="accent5">
+                    <a:lumMod val="75000"/>
+                  </a:schemeClr>
+                </a:solidFill>
+                <a:latin typeface="Calibri" pitchFamily="34" charset="0"/>
+                <a:ea typeface="Calibri" pitchFamily="34" charset="-122"/>
+                <a:cs typeface="Calibri" pitchFamily="34" charset="-120"/>
+              </a:rPr>
+              <a:t>enja</a:t>
             </a:r>
             <a:endParaRPr lang="en-US" sz="2200" dirty="0">
               <a:solidFill>
